--- a/docs/content/05-teaching-resources/slides/core/20-employer-set-project.pptx
+++ b/docs/content/05-teaching-resources/slides/core/20-employer-set-project.pptx
@@ -10,11 +10,15 @@
     <p:sldId id="258" r:id="rId9"/>
     <p:sldId id="259" r:id="rId10"/>
     <p:sldId id="260" r:id="rId11"/>
-    <p:sldId id="261" r:id="rId12"/>
-    <p:sldId id="262" r:id="rId13"/>
+    <p:sldId id="261" r:id="rId13"/>
+    <p:sldId id="262" r:id="rId14"/>
     <p:sldId id="263" r:id="rId15"/>
     <p:sldId id="264" r:id="rId16"/>
     <p:sldId id="265" r:id="rId17"/>
+    <p:sldId id="266" r:id="rId18"/>
+    <p:sldId id="267" r:id="rId19"/>
+    <p:sldId id="268" r:id="rId20"/>
+    <p:sldId id="269" r:id="rId21"/>
   </p:sldIdLst>
   <p:sldSz cx="12191695" cy="6858000" type="screen4x3"/>
   <p:notesSz cx="6858000" cy="9144000"/>
@@ -511,7 +515,22 @@
           <a:lstStyle/>
           <a:p>
             <a:r>
-              <a:t>Give students a few minutes to answer on mini whiteboards or paper, then reveal the answers on the next slide.</a:t>
+              <a:t>Answers:</a:t>
+            </a:r>
+          </a:p>
+          <a:p>
+            <a:r>
+              <a:t>1. 40%.</a:t>
+            </a:r>
+          </a:p>
+          <a:p>
+            <a:r>
+              <a:t>2. No.</a:t>
+            </a:r>
+          </a:p>
+          <a:p>
+            <a:r>
+              <a:t>3. It's externally marked.</a:t>
             </a:r>
           </a:p>
         </p:txBody>
@@ -581,7 +600,22 @@
           <a:lstStyle/>
           <a:p>
             <a:r>
-              <a:t>Talk through any answers the class found difficult.</a:t>
+              <a:t>Answers:</a:t>
+            </a:r>
+          </a:p>
+          <a:p>
+            <a:r>
+              <a:t>1. Valid, valid extreme, invalid, invalid extreme, erroneous.</a:t>
+            </a:r>
+          </a:p>
+          <a:p>
+            <a:r>
+              <a:t>2. A third party to build the solution.</a:t>
+            </a:r>
+          </a:p>
+          <a:p>
+            <a:r>
+              <a:t>3. E.g. functions, meaningful names, comments, exception handling.</a:t>
             </a:r>
           </a:p>
         </p:txBody>
@@ -607,6 +641,146 @@
 </file>
 
 <file path=ppt/notesSlides/notesSlide3.xml><?xml version="1.0" encoding="utf-8"?>
+<p:notes xmlns:a="http://schemas.openxmlformats.org/drawingml/2006/main" xmlns:p="http://schemas.openxmlformats.org/presentationml/2006/main" xmlns:r="http://schemas.openxmlformats.org/officeDocument/2006/relationships">
+  <p:cSld>
+    <p:spTree>
+      <p:nvGrpSpPr>
+        <p:cNvPr id="1" name=""/>
+        <p:cNvGrpSpPr/>
+        <p:nvPr/>
+      </p:nvGrpSpPr>
+      <p:grpSpPr>
+        <a:xfrm>
+          <a:off x="0" y="0"/>
+          <a:ext cx="0" cy="0"/>
+          <a:chOff x="0" y="0"/>
+          <a:chExt cx="0" cy="0"/>
+        </a:xfrm>
+      </p:grpSpPr>
+      <p:sp>
+        <p:nvSpPr>
+          <p:cNvPr id="2" name="Slide Image Placeholder 1"/>
+          <p:cNvSpPr>
+            <a:spLocks noGrp="1"/>
+          </p:cNvSpPr>
+          <p:nvPr>
+            <p:ph type="sldImg" idx="2"/>
+          </p:nvPr>
+        </p:nvSpPr>
+        <p:spPr/>
+      </p:sp>
+      <p:sp>
+        <p:nvSpPr>
+          <p:cNvPr id="3" name="Notes Placeholder 2"/>
+          <p:cNvSpPr>
+            <a:spLocks noGrp="1"/>
+          </p:cNvSpPr>
+          <p:nvPr>
+            <p:ph type="body" idx="3" sz="quarter"/>
+          </p:nvPr>
+        </p:nvSpPr>
+        <p:spPr/>
+        <p:txBody>
+          <a:bodyPr/>
+          <a:lstStyle/>
+          <a:p>
+            <a:r>
+              <a:t>Give students a few minutes to answer on mini whiteboards or paper, then reveal the answers on the next slide.</a:t>
+            </a:r>
+          </a:p>
+        </p:txBody>
+      </p:sp>
+      <p:sp>
+        <p:nvSpPr>
+          <p:cNvPr id="4" name="Slide Number Placeholder 3"/>
+          <p:cNvSpPr>
+            <a:spLocks noGrp="1"/>
+          </p:cNvSpPr>
+          <p:nvPr>
+            <p:ph type="sldNum" idx="5" sz="quarter"/>
+          </p:nvPr>
+        </p:nvSpPr>
+        <p:spPr/>
+      </p:sp>
+    </p:spTree>
+  </p:cSld>
+  <p:clrMapOvr>
+    <a:masterClrMapping/>
+  </p:clrMapOvr>
+</p:notes>
+</file>
+
+<file path=ppt/notesSlides/notesSlide4.xml><?xml version="1.0" encoding="utf-8"?>
+<p:notes xmlns:a="http://schemas.openxmlformats.org/drawingml/2006/main" xmlns:p="http://schemas.openxmlformats.org/presentationml/2006/main" xmlns:r="http://schemas.openxmlformats.org/officeDocument/2006/relationships">
+  <p:cSld>
+    <p:spTree>
+      <p:nvGrpSpPr>
+        <p:cNvPr id="1" name=""/>
+        <p:cNvGrpSpPr/>
+        <p:nvPr/>
+      </p:nvGrpSpPr>
+      <p:grpSpPr>
+        <a:xfrm>
+          <a:off x="0" y="0"/>
+          <a:ext cx="0" cy="0"/>
+          <a:chOff x="0" y="0"/>
+          <a:chExt cx="0" cy="0"/>
+        </a:xfrm>
+      </p:grpSpPr>
+      <p:sp>
+        <p:nvSpPr>
+          <p:cNvPr id="2" name="Slide Image Placeholder 1"/>
+          <p:cNvSpPr>
+            <a:spLocks noGrp="1"/>
+          </p:cNvSpPr>
+          <p:nvPr>
+            <p:ph type="sldImg" idx="2"/>
+          </p:nvPr>
+        </p:nvSpPr>
+        <p:spPr/>
+      </p:sp>
+      <p:sp>
+        <p:nvSpPr>
+          <p:cNvPr id="3" name="Notes Placeholder 2"/>
+          <p:cNvSpPr>
+            <a:spLocks noGrp="1"/>
+          </p:cNvSpPr>
+          <p:nvPr>
+            <p:ph type="body" idx="3" sz="quarter"/>
+          </p:nvPr>
+        </p:nvSpPr>
+        <p:spPr/>
+        <p:txBody>
+          <a:bodyPr/>
+          <a:lstStyle/>
+          <a:p>
+            <a:r>
+              <a:t>Talk through any answers the class found difficult.</a:t>
+            </a:r>
+          </a:p>
+        </p:txBody>
+      </p:sp>
+      <p:sp>
+        <p:nvSpPr>
+          <p:cNvPr id="4" name="Slide Number Placeholder 3"/>
+          <p:cNvSpPr>
+            <a:spLocks noGrp="1"/>
+          </p:cNvSpPr>
+          <p:nvPr>
+            <p:ph type="sldNum" idx="5" sz="quarter"/>
+          </p:nvPr>
+        </p:nvSpPr>
+        <p:spPr/>
+      </p:sp>
+    </p:spTree>
+  </p:cSld>
+  <p:clrMapOvr>
+    <a:masterClrMapping/>
+  </p:clrMapOvr>
+</p:notes>
+</file>
+
+<file path=ppt/notesSlides/notesSlide5.xml><?xml version="1.0" encoding="utf-8"?>
 <p:notes xmlns:a="http://schemas.openxmlformats.org/drawingml/2006/main" xmlns:p="http://schemas.openxmlformats.org/presentationml/2006/main" xmlns:r="http://schemas.openxmlformats.org/officeDocument/2006/relationships">
   <p:cSld>
     <p:spTree>
@@ -3982,6 +4156,2278 @@
     <p:bg>
       <p:bgPr>
         <a:solidFill>
+          <a:srgbClr val="FFFFFF"/>
+        </a:solidFill>
+        <a:effectLst/>
+      </p:bgPr>
+    </p:bg>
+    <p:spTree>
+      <p:nvGrpSpPr>
+        <p:cNvPr id="1" name=""/>
+        <p:cNvGrpSpPr/>
+        <p:nvPr/>
+      </p:nvGrpSpPr>
+      <p:grpSpPr/>
+      <p:sp>
+        <p:nvSpPr>
+          <p:cNvPr id="2" name="TextBox 1"/>
+          <p:cNvSpPr txBox="1"/>
+          <p:nvPr/>
+        </p:nvSpPr>
+        <p:spPr>
+          <a:xfrm>
+            <a:off x="548640" y="320040"/>
+            <a:ext cx="11094415" cy="274320"/>
+          </a:xfrm>
+          <a:prstGeom prst="rect">
+            <a:avLst/>
+          </a:prstGeom>
+          <a:noFill/>
+        </p:spPr>
+        <p:txBody>
+          <a:bodyPr wrap="square" anchor="t" lIns="0" rIns="0" tIns="0" bIns="0"/>
+          <a:lstStyle/>
+          <a:p>
+            <a:pPr algn="l"/>
+            <a:r>
+              <a:rPr sz="1100" b="1" i="0">
+                <a:solidFill>
+                  <a:srgbClr val="54595D"/>
+                </a:solidFill>
+                <a:latin typeface="Calibri"/>
+              </a:rPr>
+              <a:t>CORE COMPONENT  ·  Core Component</a:t>
+            </a:r>
+          </a:p>
+        </p:txBody>
+      </p:sp>
+      <p:sp>
+        <p:nvSpPr>
+          <p:cNvPr id="3" name="TextBox 2"/>
+          <p:cNvSpPr txBox="1"/>
+          <p:nvPr/>
+        </p:nvSpPr>
+        <p:spPr>
+          <a:xfrm>
+            <a:off x="548640" y="566928"/>
+            <a:ext cx="11094415" cy="822960"/>
+          </a:xfrm>
+          <a:prstGeom prst="rect">
+            <a:avLst/>
+          </a:prstGeom>
+          <a:noFill/>
+        </p:spPr>
+        <p:txBody>
+          <a:bodyPr wrap="square" anchor="ctr" lIns="0" rIns="0" tIns="0" bIns="0"/>
+          <a:lstStyle/>
+          <a:p>
+            <a:pPr algn="l"/>
+            <a:r>
+              <a:rPr sz="3200" b="1" i="0">
+                <a:solidFill>
+                  <a:srgbClr val="03306E"/>
+                </a:solidFill>
+                <a:latin typeface="Cambria"/>
+              </a:rPr>
+              <a:t>How to prepare</a:t>
+            </a:r>
+          </a:p>
+        </p:txBody>
+      </p:sp>
+      <p:sp>
+        <p:nvSpPr>
+          <p:cNvPr id="4" name="TextBox 3"/>
+          <p:cNvSpPr txBox="1"/>
+          <p:nvPr/>
+        </p:nvSpPr>
+        <p:spPr>
+          <a:xfrm>
+            <a:off x="548640" y="6446520"/>
+            <a:ext cx="8229600" cy="274320"/>
+          </a:xfrm>
+          <a:prstGeom prst="rect">
+            <a:avLst/>
+          </a:prstGeom>
+          <a:noFill/>
+        </p:spPr>
+        <p:txBody>
+          <a:bodyPr wrap="square" anchor="t" lIns="0" rIns="0" tIns="0" bIns="0"/>
+          <a:lstStyle/>
+          <a:p>
+            <a:pPr algn="l"/>
+            <a:r>
+              <a:rPr sz="1000" b="0" i="0">
+                <a:solidFill>
+                  <a:srgbClr val="54595D"/>
+                </a:solidFill>
+                <a:latin typeface="Calibri"/>
+              </a:rPr>
+              <a:t>Digital Software Development T Level  ·  The Employer Set Project</a:t>
+            </a:r>
+          </a:p>
+        </p:txBody>
+      </p:sp>
+      <p:sp>
+        <p:nvSpPr>
+          <p:cNvPr id="5" name="TextBox 4"/>
+          <p:cNvSpPr txBox="1"/>
+          <p:nvPr/>
+        </p:nvSpPr>
+        <p:spPr>
+          <a:xfrm>
+            <a:off x="10728655" y="6446520"/>
+            <a:ext cx="914400" cy="274320"/>
+          </a:xfrm>
+          <a:prstGeom prst="rect">
+            <a:avLst/>
+          </a:prstGeom>
+          <a:noFill/>
+        </p:spPr>
+        <p:txBody>
+          <a:bodyPr wrap="square" anchor="t" lIns="0" rIns="0" tIns="0" bIns="0"/>
+          <a:lstStyle/>
+          <a:p>
+            <a:pPr algn="r"/>
+            <a:r>
+              <a:rPr sz="1000" b="0" i="0">
+                <a:solidFill>
+                  <a:srgbClr val="54595D"/>
+                </a:solidFill>
+                <a:latin typeface="Calibri"/>
+              </a:rPr>
+              <a:t>10</a:t>
+            </a:r>
+          </a:p>
+        </p:txBody>
+      </p:sp>
+      <p:sp>
+        <p:nvSpPr>
+          <p:cNvPr id="6" name="TextBox 5"/>
+          <p:cNvSpPr txBox="1"/>
+          <p:nvPr/>
+        </p:nvSpPr>
+        <p:spPr>
+          <a:xfrm>
+            <a:off x="548640" y="1600200"/>
+            <a:ext cx="6675120" cy="4572000"/>
+          </a:xfrm>
+          <a:prstGeom prst="rect">
+            <a:avLst/>
+          </a:prstGeom>
+          <a:noFill/>
+        </p:spPr>
+        <p:txBody>
+          <a:bodyPr wrap="square" lIns="0" rIns="0" tIns="0" bIns="0">
+            <a:spAutoFit/>
+          </a:bodyPr>
+          <a:lstStyle/>
+          <a:p>
+            <a:pPr marL="274320" indent="-274320">
+              <a:spcAft>
+                <a:spcPts val="1080"/>
+              </a:spcAft>
+              <a:buClr>
+                <a:srgbClr val="0645AD"/>
+              </a:buClr>
+              <a:buFont typeface="Arial"/>
+              <a:buChar char="•"/>
+            </a:pPr>
+            <a:r>
+              <a:rPr sz="2400" b="0">
+                <a:solidFill>
+                  <a:srgbClr val="202122"/>
+                </a:solidFill>
+                <a:latin typeface="Calibri"/>
+              </a:rPr>
+              <a:t>Practise Gantt charts and cost plans against a deadline.</a:t>
+            </a:r>
+          </a:p>
+          <a:p>
+            <a:pPr marL="274320" indent="-274320">
+              <a:spcAft>
+                <a:spcPts val="1080"/>
+              </a:spcAft>
+              <a:buClr>
+                <a:srgbClr val="0645AD"/>
+              </a:buClr>
+              <a:buFont typeface="Arial"/>
+              <a:buChar char="•"/>
+            </a:pPr>
+            <a:r>
+              <a:rPr sz="2400" b="0">
+                <a:solidFill>
+                  <a:srgbClr val="202122"/>
+                </a:solidFill>
+                <a:latin typeface="Calibri"/>
+              </a:rPr>
+              <a:t>Practise finding and fixing bugs in code you did not write.</a:t>
+            </a:r>
+          </a:p>
+          <a:p>
+            <a:pPr marL="274320" indent="-274320">
+              <a:spcAft>
+                <a:spcPts val="1080"/>
+              </a:spcAft>
+              <a:buClr>
+                <a:srgbClr val="0645AD"/>
+              </a:buClr>
+              <a:buFont typeface="Arial"/>
+              <a:buChar char="•"/>
+            </a:pPr>
+            <a:r>
+              <a:rPr sz="2400" b="0">
+                <a:solidFill>
+                  <a:srgbClr val="202122"/>
+                </a:solidFill>
+                <a:latin typeface="Calibri"/>
+              </a:rPr>
+              <a:t>Get fluent with pandas and Matplotlib on CSV files.</a:t>
+            </a:r>
+          </a:p>
+          <a:p>
+            <a:pPr marL="274320" indent="-274320">
+              <a:spcAft>
+                <a:spcPts val="1080"/>
+              </a:spcAft>
+              <a:buClr>
+                <a:srgbClr val="0645AD"/>
+              </a:buClr>
+              <a:buFont typeface="Arial"/>
+              <a:buChar char="•"/>
+            </a:pPr>
+            <a:r>
+              <a:rPr sz="2400" b="0">
+                <a:solidFill>
+                  <a:srgbClr val="202122"/>
+                </a:solidFill>
+                <a:latin typeface="Calibri"/>
+              </a:rPr>
+              <a:t>Practise flowcharts with correct symbols.</a:t>
+            </a:r>
+          </a:p>
+          <a:p>
+            <a:pPr marL="274320" indent="-274320">
+              <a:spcAft>
+                <a:spcPts val="1080"/>
+              </a:spcAft>
+              <a:buClr>
+                <a:srgbClr val="0645AD"/>
+              </a:buClr>
+              <a:buFont typeface="Arial"/>
+              <a:buChar char="•"/>
+            </a:pPr>
+            <a:r>
+              <a:rPr sz="2400" b="0">
+                <a:solidFill>
+                  <a:srgbClr val="202122"/>
+                </a:solidFill>
+                <a:latin typeface="Calibri"/>
+              </a:rPr>
+              <a:t>Write reflections against success criteria.</a:t>
+            </a:r>
+          </a:p>
+        </p:txBody>
+      </p:sp>
+      <p:sp>
+        <p:nvSpPr>
+          <p:cNvPr id="7" name="Rounded Rectangle 6"/>
+          <p:cNvSpPr/>
+          <p:nvPr/>
+        </p:nvSpPr>
+        <p:spPr>
+          <a:xfrm>
+            <a:off x="7772400" y="1600200"/>
+            <a:ext cx="3867912" cy="4434840"/>
+          </a:xfrm>
+          <a:prstGeom prst="roundRect">
+            <a:avLst>
+              <a:gd name="adj" fmla="val 8000"/>
+            </a:avLst>
+          </a:prstGeom>
+          <a:solidFill>
+            <a:srgbClr val="03306E"/>
+          </a:solidFill>
+          <a:ln>
+            <a:noFill/>
+          </a:ln>
+          <a:effectLst/>
+        </p:spPr>
+        <p:style>
+          <a:lnRef idx="1">
+            <a:schemeClr val="accent1"/>
+          </a:lnRef>
+          <a:fillRef idx="3">
+            <a:schemeClr val="accent1"/>
+          </a:fillRef>
+          <a:effectRef idx="2">
+            <a:schemeClr val="accent1"/>
+          </a:effectRef>
+          <a:fontRef idx="minor">
+            <a:schemeClr val="lt1"/>
+          </a:fontRef>
+        </p:style>
+        <p:txBody>
+          <a:bodyPr rtlCol="0" anchor="ctr"/>
+          <a:lstStyle/>
+          <a:p/>
+        </p:txBody>
+      </p:sp>
+      <p:sp>
+        <p:nvSpPr>
+          <p:cNvPr id="8" name="Oval 7"/>
+          <p:cNvSpPr/>
+          <p:nvPr/>
+        </p:nvSpPr>
+        <p:spPr>
+          <a:xfrm>
+            <a:off x="8046720" y="1874519"/>
+            <a:ext cx="548640" cy="548640"/>
+          </a:xfrm>
+          <a:prstGeom prst="ellipse">
+            <a:avLst/>
+          </a:prstGeom>
+          <a:solidFill>
+            <a:srgbClr val="F2B705"/>
+          </a:solidFill>
+          <a:ln>
+            <a:noFill/>
+          </a:ln>
+          <a:effectLst/>
+        </p:spPr>
+        <p:style>
+          <a:lnRef idx="1">
+            <a:schemeClr val="accent1"/>
+          </a:lnRef>
+          <a:fillRef idx="3">
+            <a:schemeClr val="accent1"/>
+          </a:fillRef>
+          <a:effectRef idx="2">
+            <a:schemeClr val="accent1"/>
+          </a:effectRef>
+          <a:fontRef idx="minor">
+            <a:schemeClr val="lt1"/>
+          </a:fontRef>
+        </p:style>
+        <p:txBody>
+          <a:bodyPr rtlCol="0" anchor="ctr" lIns="0" rIns="0" tIns="0" bIns="0"/>
+          <a:lstStyle/>
+          <a:p>
+            <a:pPr algn="ctr"/>
+            <a:r>
+              <a:rPr sz="2000" b="1">
+                <a:solidFill>
+                  <a:srgbClr val="202122"/>
+                </a:solidFill>
+                <a:latin typeface="Calibri"/>
+              </a:rPr>
+              <a:t>!</a:t>
+            </a:r>
+          </a:p>
+        </p:txBody>
+      </p:sp>
+      <p:sp>
+        <p:nvSpPr>
+          <p:cNvPr id="9" name="TextBox 8"/>
+          <p:cNvSpPr txBox="1"/>
+          <p:nvPr/>
+        </p:nvSpPr>
+        <p:spPr>
+          <a:xfrm>
+            <a:off x="8046720" y="2606040"/>
+            <a:ext cx="3291840" cy="365760"/>
+          </a:xfrm>
+          <a:prstGeom prst="rect">
+            <a:avLst/>
+          </a:prstGeom>
+          <a:noFill/>
+        </p:spPr>
+        <p:txBody>
+          <a:bodyPr wrap="square" anchor="t" lIns="0" rIns="0" tIns="0" bIns="0"/>
+          <a:lstStyle/>
+          <a:p>
+            <a:pPr algn="l"/>
+            <a:r>
+              <a:rPr sz="1300" b="1" i="0">
+                <a:solidFill>
+                  <a:srgbClr val="A9C8F0"/>
+                </a:solidFill>
+                <a:latin typeface="Calibri"/>
+              </a:rPr>
+              <a:t>KEY IDEA</a:t>
+            </a:r>
+          </a:p>
+        </p:txBody>
+      </p:sp>
+      <p:sp>
+        <p:nvSpPr>
+          <p:cNvPr id="10" name="TextBox 9"/>
+          <p:cNvSpPr txBox="1"/>
+          <p:nvPr/>
+        </p:nvSpPr>
+        <p:spPr>
+          <a:xfrm>
+            <a:off x="8046720" y="3017520"/>
+            <a:ext cx="3291840" cy="2926080"/>
+          </a:xfrm>
+          <a:prstGeom prst="rect">
+            <a:avLst/>
+          </a:prstGeom>
+          <a:noFill/>
+        </p:spPr>
+        <p:txBody>
+          <a:bodyPr wrap="square" anchor="t" lIns="0" rIns="0" tIns="0" bIns="0"/>
+          <a:lstStyle/>
+          <a:p>
+            <a:pPr algn="l"/>
+            <a:r>
+              <a:rPr sz="2200" b="0" i="0">
+                <a:solidFill>
+                  <a:srgbClr val="FFFFFF"/>
+                </a:solidFill>
+                <a:latin typeface="Cambria"/>
+              </a:rPr>
+              <a:t>With no internet, you need the Python reference in your head. Practise without looking things up.</a:t>
+            </a:r>
+          </a:p>
+        </p:txBody>
+      </p:sp>
+    </p:spTree>
+  </p:cSld>
+  <p:clrMapOvr>
+    <a:masterClrMapping/>
+  </p:clrMapOvr>
+</p:sld>
+</file>
+
+<file path=ppt/slides/slide11.xml><?xml version="1.0" encoding="utf-8"?>
+<p:sld xmlns:a="http://schemas.openxmlformats.org/drawingml/2006/main" xmlns:p="http://schemas.openxmlformats.org/presentationml/2006/main" xmlns:r="http://schemas.openxmlformats.org/officeDocument/2006/relationships">
+  <p:cSld>
+    <p:bg>
+      <p:bgPr>
+        <a:solidFill>
+          <a:srgbClr val="FFFFFF"/>
+        </a:solidFill>
+        <a:effectLst/>
+      </p:bgPr>
+    </p:bg>
+    <p:spTree>
+      <p:nvGrpSpPr>
+        <p:cNvPr id="1" name=""/>
+        <p:cNvGrpSpPr/>
+        <p:nvPr/>
+      </p:nvGrpSpPr>
+      <p:grpSpPr/>
+      <p:sp>
+        <p:nvSpPr>
+          <p:cNvPr id="2" name="TextBox 1"/>
+          <p:cNvSpPr txBox="1"/>
+          <p:nvPr/>
+        </p:nvSpPr>
+        <p:spPr>
+          <a:xfrm>
+            <a:off x="548640" y="320040"/>
+            <a:ext cx="11094415" cy="274320"/>
+          </a:xfrm>
+          <a:prstGeom prst="rect">
+            <a:avLst/>
+          </a:prstGeom>
+          <a:noFill/>
+        </p:spPr>
+        <p:txBody>
+          <a:bodyPr wrap="square" anchor="t" lIns="0" rIns="0" tIns="0" bIns="0"/>
+          <a:lstStyle/>
+          <a:p>
+            <a:pPr algn="l"/>
+            <a:r>
+              <a:rPr sz="1100" b="1" i="0">
+                <a:solidFill>
+                  <a:srgbClr val="54595D"/>
+                </a:solidFill>
+                <a:latin typeface="Calibri"/>
+              </a:rPr>
+              <a:t>CORE COMPONENT  ·  Core Component</a:t>
+            </a:r>
+          </a:p>
+        </p:txBody>
+      </p:sp>
+      <p:sp>
+        <p:nvSpPr>
+          <p:cNvPr id="3" name="TextBox 2"/>
+          <p:cNvSpPr txBox="1"/>
+          <p:nvPr/>
+        </p:nvSpPr>
+        <p:spPr>
+          <a:xfrm>
+            <a:off x="548640" y="566928"/>
+            <a:ext cx="11094415" cy="822960"/>
+          </a:xfrm>
+          <a:prstGeom prst="rect">
+            <a:avLst/>
+          </a:prstGeom>
+          <a:noFill/>
+        </p:spPr>
+        <p:txBody>
+          <a:bodyPr wrap="square" anchor="ctr" lIns="0" rIns="0" tIns="0" bIns="0"/>
+          <a:lstStyle/>
+          <a:p>
+            <a:pPr algn="l"/>
+            <a:r>
+              <a:rPr sz="3200" b="1" i="0">
+                <a:solidFill>
+                  <a:srgbClr val="03306E"/>
+                </a:solidFill>
+                <a:latin typeface="Cambria"/>
+              </a:rPr>
+              <a:t>Check your understanding</a:t>
+            </a:r>
+          </a:p>
+        </p:txBody>
+      </p:sp>
+      <p:sp>
+        <p:nvSpPr>
+          <p:cNvPr id="4" name="TextBox 3"/>
+          <p:cNvSpPr txBox="1"/>
+          <p:nvPr/>
+        </p:nvSpPr>
+        <p:spPr>
+          <a:xfrm>
+            <a:off x="548640" y="6446520"/>
+            <a:ext cx="8229600" cy="274320"/>
+          </a:xfrm>
+          <a:prstGeom prst="rect">
+            <a:avLst/>
+          </a:prstGeom>
+          <a:noFill/>
+        </p:spPr>
+        <p:txBody>
+          <a:bodyPr wrap="square" anchor="t" lIns="0" rIns="0" tIns="0" bIns="0"/>
+          <a:lstStyle/>
+          <a:p>
+            <a:pPr algn="l"/>
+            <a:r>
+              <a:rPr sz="1000" b="0" i="0">
+                <a:solidFill>
+                  <a:srgbClr val="54595D"/>
+                </a:solidFill>
+                <a:latin typeface="Calibri"/>
+              </a:rPr>
+              <a:t>Digital Software Development T Level  ·  The Employer Set Project</a:t>
+            </a:r>
+          </a:p>
+        </p:txBody>
+      </p:sp>
+      <p:sp>
+        <p:nvSpPr>
+          <p:cNvPr id="5" name="TextBox 4"/>
+          <p:cNvSpPr txBox="1"/>
+          <p:nvPr/>
+        </p:nvSpPr>
+        <p:spPr>
+          <a:xfrm>
+            <a:off x="10728655" y="6446520"/>
+            <a:ext cx="914400" cy="274320"/>
+          </a:xfrm>
+          <a:prstGeom prst="rect">
+            <a:avLst/>
+          </a:prstGeom>
+          <a:noFill/>
+        </p:spPr>
+        <p:txBody>
+          <a:bodyPr wrap="square" anchor="t" lIns="0" rIns="0" tIns="0" bIns="0"/>
+          <a:lstStyle/>
+          <a:p>
+            <a:pPr algn="r"/>
+            <a:r>
+              <a:rPr sz="1000" b="0" i="0">
+                <a:solidFill>
+                  <a:srgbClr val="54595D"/>
+                </a:solidFill>
+                <a:latin typeface="Calibri"/>
+              </a:rPr>
+              <a:t>11</a:t>
+            </a:r>
+          </a:p>
+        </p:txBody>
+      </p:sp>
+      <p:sp>
+        <p:nvSpPr>
+          <p:cNvPr id="6" name="Oval 5"/>
+          <p:cNvSpPr/>
+          <p:nvPr/>
+        </p:nvSpPr>
+        <p:spPr>
+          <a:xfrm>
+            <a:off x="548640" y="1618488"/>
+            <a:ext cx="411480" cy="411480"/>
+          </a:xfrm>
+          <a:prstGeom prst="ellipse">
+            <a:avLst/>
+          </a:prstGeom>
+          <a:solidFill>
+            <a:srgbClr val="F2B705"/>
+          </a:solidFill>
+          <a:ln>
+            <a:noFill/>
+          </a:ln>
+          <a:effectLst/>
+        </p:spPr>
+        <p:style>
+          <a:lnRef idx="1">
+            <a:schemeClr val="accent1"/>
+          </a:lnRef>
+          <a:fillRef idx="3">
+            <a:schemeClr val="accent1"/>
+          </a:fillRef>
+          <a:effectRef idx="2">
+            <a:schemeClr val="accent1"/>
+          </a:effectRef>
+          <a:fontRef idx="minor">
+            <a:schemeClr val="lt1"/>
+          </a:fontRef>
+        </p:style>
+        <p:txBody>
+          <a:bodyPr rtlCol="0" anchor="ctr" lIns="0" rIns="0" tIns="0" bIns="0"/>
+          <a:lstStyle/>
+          <a:p>
+            <a:pPr algn="ctr"/>
+            <a:r>
+              <a:rPr sz="1400" b="1">
+                <a:solidFill>
+                  <a:srgbClr val="202122"/>
+                </a:solidFill>
+                <a:latin typeface="Calibri"/>
+              </a:rPr>
+              <a:t>1</a:t>
+            </a:r>
+          </a:p>
+        </p:txBody>
+      </p:sp>
+      <p:sp>
+        <p:nvSpPr>
+          <p:cNvPr id="7" name="TextBox 6"/>
+          <p:cNvSpPr txBox="1"/>
+          <p:nvPr/>
+        </p:nvSpPr>
+        <p:spPr>
+          <a:xfrm>
+            <a:off x="1234440" y="1600200"/>
+            <a:ext cx="10408615" cy="1030986"/>
+          </a:xfrm>
+          <a:prstGeom prst="rect">
+            <a:avLst/>
+          </a:prstGeom>
+          <a:noFill/>
+        </p:spPr>
+        <p:txBody>
+          <a:bodyPr wrap="square" anchor="t" lIns="0" rIns="0" tIns="0" bIns="0"/>
+          <a:lstStyle/>
+          <a:p>
+            <a:pPr algn="l"/>
+            <a:r>
+              <a:rPr sz="2200" b="0" i="0">
+                <a:solidFill>
+                  <a:srgbClr val="202122"/>
+                </a:solidFill>
+                <a:latin typeface="Calibri"/>
+              </a:rPr>
+              <a:t>What percentage of the core assessments is the ESP?</a:t>
+            </a:r>
+          </a:p>
+        </p:txBody>
+      </p:sp>
+      <p:sp>
+        <p:nvSpPr>
+          <p:cNvPr id="8" name="Oval 7"/>
+          <p:cNvSpPr/>
+          <p:nvPr/>
+        </p:nvSpPr>
+        <p:spPr>
+          <a:xfrm>
+            <a:off x="548640" y="2814066"/>
+            <a:ext cx="411480" cy="411480"/>
+          </a:xfrm>
+          <a:prstGeom prst="ellipse">
+            <a:avLst/>
+          </a:prstGeom>
+          <a:solidFill>
+            <a:srgbClr val="F2B705"/>
+          </a:solidFill>
+          <a:ln>
+            <a:noFill/>
+          </a:ln>
+          <a:effectLst/>
+        </p:spPr>
+        <p:style>
+          <a:lnRef idx="1">
+            <a:schemeClr val="accent1"/>
+          </a:lnRef>
+          <a:fillRef idx="3">
+            <a:schemeClr val="accent1"/>
+          </a:fillRef>
+          <a:effectRef idx="2">
+            <a:schemeClr val="accent1"/>
+          </a:effectRef>
+          <a:fontRef idx="minor">
+            <a:schemeClr val="lt1"/>
+          </a:fontRef>
+        </p:style>
+        <p:txBody>
+          <a:bodyPr rtlCol="0" anchor="ctr" lIns="0" rIns="0" tIns="0" bIns="0"/>
+          <a:lstStyle/>
+          <a:p>
+            <a:pPr algn="ctr"/>
+            <a:r>
+              <a:rPr sz="1400" b="1">
+                <a:solidFill>
+                  <a:srgbClr val="202122"/>
+                </a:solidFill>
+                <a:latin typeface="Calibri"/>
+              </a:rPr>
+              <a:t>2</a:t>
+            </a:r>
+          </a:p>
+        </p:txBody>
+      </p:sp>
+      <p:sp>
+        <p:nvSpPr>
+          <p:cNvPr id="9" name="TextBox 8"/>
+          <p:cNvSpPr txBox="1"/>
+          <p:nvPr/>
+        </p:nvSpPr>
+        <p:spPr>
+          <a:xfrm>
+            <a:off x="1234440" y="2795778"/>
+            <a:ext cx="10408615" cy="1030986"/>
+          </a:xfrm>
+          <a:prstGeom prst="rect">
+            <a:avLst/>
+          </a:prstGeom>
+          <a:noFill/>
+        </p:spPr>
+        <p:txBody>
+          <a:bodyPr wrap="square" anchor="t" lIns="0" rIns="0" tIns="0" bIns="0"/>
+          <a:lstStyle/>
+          <a:p>
+            <a:pPr algn="l"/>
+            <a:r>
+              <a:rPr sz="2200" b="0" i="0">
+                <a:solidFill>
+                  <a:srgbClr val="202122"/>
+                </a:solidFill>
+                <a:latin typeface="Calibri"/>
+              </a:rPr>
+              <a:t>Name the five types of test data in Task 2.</a:t>
+            </a:r>
+          </a:p>
+        </p:txBody>
+      </p:sp>
+      <p:sp>
+        <p:nvSpPr>
+          <p:cNvPr id="10" name="Oval 9"/>
+          <p:cNvSpPr/>
+          <p:nvPr/>
+        </p:nvSpPr>
+        <p:spPr>
+          <a:xfrm>
+            <a:off x="548640" y="4009644"/>
+            <a:ext cx="411480" cy="411480"/>
+          </a:xfrm>
+          <a:prstGeom prst="ellipse">
+            <a:avLst/>
+          </a:prstGeom>
+          <a:solidFill>
+            <a:srgbClr val="F2B705"/>
+          </a:solidFill>
+          <a:ln>
+            <a:noFill/>
+          </a:ln>
+          <a:effectLst/>
+        </p:spPr>
+        <p:style>
+          <a:lnRef idx="1">
+            <a:schemeClr val="accent1"/>
+          </a:lnRef>
+          <a:fillRef idx="3">
+            <a:schemeClr val="accent1"/>
+          </a:fillRef>
+          <a:effectRef idx="2">
+            <a:schemeClr val="accent1"/>
+          </a:effectRef>
+          <a:fontRef idx="minor">
+            <a:schemeClr val="lt1"/>
+          </a:fontRef>
+        </p:style>
+        <p:txBody>
+          <a:bodyPr rtlCol="0" anchor="ctr" lIns="0" rIns="0" tIns="0" bIns="0"/>
+          <a:lstStyle/>
+          <a:p>
+            <a:pPr algn="ctr"/>
+            <a:r>
+              <a:rPr sz="1400" b="1">
+                <a:solidFill>
+                  <a:srgbClr val="202122"/>
+                </a:solidFill>
+                <a:latin typeface="Calibri"/>
+              </a:rPr>
+              <a:t>3</a:t>
+            </a:r>
+          </a:p>
+        </p:txBody>
+      </p:sp>
+      <p:sp>
+        <p:nvSpPr>
+          <p:cNvPr id="11" name="TextBox 10"/>
+          <p:cNvSpPr txBox="1"/>
+          <p:nvPr/>
+        </p:nvSpPr>
+        <p:spPr>
+          <a:xfrm>
+            <a:off x="1234440" y="3991356"/>
+            <a:ext cx="10408615" cy="1030986"/>
+          </a:xfrm>
+          <a:prstGeom prst="rect">
+            <a:avLst/>
+          </a:prstGeom>
+          <a:noFill/>
+        </p:spPr>
+        <p:txBody>
+          <a:bodyPr wrap="square" anchor="t" lIns="0" rIns="0" tIns="0" bIns="0"/>
+          <a:lstStyle/>
+          <a:p>
+            <a:pPr algn="l"/>
+            <a:r>
+              <a:rPr sz="2200" b="0" i="0">
+                <a:solidFill>
+                  <a:srgbClr val="202122"/>
+                </a:solidFill>
+                <a:latin typeface="Calibri"/>
+              </a:rPr>
+              <a:t>Which library is suggested for graphs?</a:t>
+            </a:r>
+          </a:p>
+        </p:txBody>
+      </p:sp>
+      <p:sp>
+        <p:nvSpPr>
+          <p:cNvPr id="12" name="Oval 11"/>
+          <p:cNvSpPr/>
+          <p:nvPr/>
+        </p:nvSpPr>
+        <p:spPr>
+          <a:xfrm>
+            <a:off x="548640" y="5205221"/>
+            <a:ext cx="411480" cy="411480"/>
+          </a:xfrm>
+          <a:prstGeom prst="ellipse">
+            <a:avLst/>
+          </a:prstGeom>
+          <a:solidFill>
+            <a:srgbClr val="F2B705"/>
+          </a:solidFill>
+          <a:ln>
+            <a:noFill/>
+          </a:ln>
+          <a:effectLst/>
+        </p:spPr>
+        <p:style>
+          <a:lnRef idx="1">
+            <a:schemeClr val="accent1"/>
+          </a:lnRef>
+          <a:fillRef idx="3">
+            <a:schemeClr val="accent1"/>
+          </a:fillRef>
+          <a:effectRef idx="2">
+            <a:schemeClr val="accent1"/>
+          </a:effectRef>
+          <a:fontRef idx="minor">
+            <a:schemeClr val="lt1"/>
+          </a:fontRef>
+        </p:style>
+        <p:txBody>
+          <a:bodyPr rtlCol="0" anchor="ctr" lIns="0" rIns="0" tIns="0" bIns="0"/>
+          <a:lstStyle/>
+          <a:p>
+            <a:pPr algn="ctr"/>
+            <a:r>
+              <a:rPr sz="1400" b="1">
+                <a:solidFill>
+                  <a:srgbClr val="202122"/>
+                </a:solidFill>
+                <a:latin typeface="Calibri"/>
+              </a:rPr>
+              <a:t>4</a:t>
+            </a:r>
+          </a:p>
+        </p:txBody>
+      </p:sp>
+      <p:sp>
+        <p:nvSpPr>
+          <p:cNvPr id="13" name="TextBox 12"/>
+          <p:cNvSpPr txBox="1"/>
+          <p:nvPr/>
+        </p:nvSpPr>
+        <p:spPr>
+          <a:xfrm>
+            <a:off x="1234440" y="5186933"/>
+            <a:ext cx="10408615" cy="1030986"/>
+          </a:xfrm>
+          <a:prstGeom prst="rect">
+            <a:avLst/>
+          </a:prstGeom>
+          <a:noFill/>
+        </p:spPr>
+        <p:txBody>
+          <a:bodyPr wrap="square" anchor="t" lIns="0" rIns="0" tIns="0" bIns="0"/>
+          <a:lstStyle/>
+          <a:p>
+            <a:pPr algn="l"/>
+            <a:r>
+              <a:rPr sz="2200" b="0" i="0">
+                <a:solidFill>
+                  <a:srgbClr val="202122"/>
+                </a:solidFill>
+                <a:latin typeface="Calibri"/>
+              </a:rPr>
+              <a:t>What must a Task 3 design allow a third party to do?</a:t>
+            </a:r>
+          </a:p>
+        </p:txBody>
+      </p:sp>
+    </p:spTree>
+  </p:cSld>
+  <p:clrMapOvr>
+    <a:masterClrMapping/>
+  </p:clrMapOvr>
+</p:sld>
+</file>
+
+<file path=ppt/slides/slide12.xml><?xml version="1.0" encoding="utf-8"?>
+<p:sld xmlns:a="http://schemas.openxmlformats.org/drawingml/2006/main" xmlns:p="http://schemas.openxmlformats.org/presentationml/2006/main" xmlns:r="http://schemas.openxmlformats.org/officeDocument/2006/relationships">
+  <p:cSld>
+    <p:bg>
+      <p:bgPr>
+        <a:solidFill>
+          <a:srgbClr val="FFFFFF"/>
+        </a:solidFill>
+        <a:effectLst/>
+      </p:bgPr>
+    </p:bg>
+    <p:spTree>
+      <p:nvGrpSpPr>
+        <p:cNvPr id="1" name=""/>
+        <p:cNvGrpSpPr/>
+        <p:nvPr/>
+      </p:nvGrpSpPr>
+      <p:grpSpPr/>
+      <p:sp>
+        <p:nvSpPr>
+          <p:cNvPr id="2" name="TextBox 1"/>
+          <p:cNvSpPr txBox="1"/>
+          <p:nvPr/>
+        </p:nvSpPr>
+        <p:spPr>
+          <a:xfrm>
+            <a:off x="548640" y="320040"/>
+            <a:ext cx="11094415" cy="274320"/>
+          </a:xfrm>
+          <a:prstGeom prst="rect">
+            <a:avLst/>
+          </a:prstGeom>
+          <a:noFill/>
+        </p:spPr>
+        <p:txBody>
+          <a:bodyPr wrap="square" anchor="t" lIns="0" rIns="0" tIns="0" bIns="0"/>
+          <a:lstStyle/>
+          <a:p>
+            <a:pPr algn="l"/>
+            <a:r>
+              <a:rPr sz="1100" b="1" i="0">
+                <a:solidFill>
+                  <a:srgbClr val="54595D"/>
+                </a:solidFill>
+                <a:latin typeface="Calibri"/>
+              </a:rPr>
+              <a:t>CORE COMPONENT  ·  Core Component</a:t>
+            </a:r>
+          </a:p>
+        </p:txBody>
+      </p:sp>
+      <p:sp>
+        <p:nvSpPr>
+          <p:cNvPr id="3" name="TextBox 2"/>
+          <p:cNvSpPr txBox="1"/>
+          <p:nvPr/>
+        </p:nvSpPr>
+        <p:spPr>
+          <a:xfrm>
+            <a:off x="548640" y="566928"/>
+            <a:ext cx="11094415" cy="822960"/>
+          </a:xfrm>
+          <a:prstGeom prst="rect">
+            <a:avLst/>
+          </a:prstGeom>
+          <a:noFill/>
+        </p:spPr>
+        <p:txBody>
+          <a:bodyPr wrap="square" anchor="ctr" lIns="0" rIns="0" tIns="0" bIns="0"/>
+          <a:lstStyle/>
+          <a:p>
+            <a:pPr algn="l"/>
+            <a:r>
+              <a:rPr sz="3200" b="1" i="0">
+                <a:solidFill>
+                  <a:srgbClr val="03306E"/>
+                </a:solidFill>
+                <a:latin typeface="Cambria"/>
+              </a:rPr>
+              <a:t>Answers</a:t>
+            </a:r>
+          </a:p>
+        </p:txBody>
+      </p:sp>
+      <p:sp>
+        <p:nvSpPr>
+          <p:cNvPr id="4" name="TextBox 3"/>
+          <p:cNvSpPr txBox="1"/>
+          <p:nvPr/>
+        </p:nvSpPr>
+        <p:spPr>
+          <a:xfrm>
+            <a:off x="548640" y="6446520"/>
+            <a:ext cx="8229600" cy="274320"/>
+          </a:xfrm>
+          <a:prstGeom prst="rect">
+            <a:avLst/>
+          </a:prstGeom>
+          <a:noFill/>
+        </p:spPr>
+        <p:txBody>
+          <a:bodyPr wrap="square" anchor="t" lIns="0" rIns="0" tIns="0" bIns="0"/>
+          <a:lstStyle/>
+          <a:p>
+            <a:pPr algn="l"/>
+            <a:r>
+              <a:rPr sz="1000" b="0" i="0">
+                <a:solidFill>
+                  <a:srgbClr val="54595D"/>
+                </a:solidFill>
+                <a:latin typeface="Calibri"/>
+              </a:rPr>
+              <a:t>Digital Software Development T Level  ·  The Employer Set Project</a:t>
+            </a:r>
+          </a:p>
+        </p:txBody>
+      </p:sp>
+      <p:sp>
+        <p:nvSpPr>
+          <p:cNvPr id="5" name="TextBox 4"/>
+          <p:cNvSpPr txBox="1"/>
+          <p:nvPr/>
+        </p:nvSpPr>
+        <p:spPr>
+          <a:xfrm>
+            <a:off x="10728655" y="6446520"/>
+            <a:ext cx="914400" cy="274320"/>
+          </a:xfrm>
+          <a:prstGeom prst="rect">
+            <a:avLst/>
+          </a:prstGeom>
+          <a:noFill/>
+        </p:spPr>
+        <p:txBody>
+          <a:bodyPr wrap="square" anchor="t" lIns="0" rIns="0" tIns="0" bIns="0"/>
+          <a:lstStyle/>
+          <a:p>
+            <a:pPr algn="r"/>
+            <a:r>
+              <a:rPr sz="1000" b="0" i="0">
+                <a:solidFill>
+                  <a:srgbClr val="54595D"/>
+                </a:solidFill>
+                <a:latin typeface="Calibri"/>
+              </a:rPr>
+              <a:t>12</a:t>
+            </a:r>
+          </a:p>
+        </p:txBody>
+      </p:sp>
+      <p:sp>
+        <p:nvSpPr>
+          <p:cNvPr id="6" name="Oval 5"/>
+          <p:cNvSpPr/>
+          <p:nvPr/>
+        </p:nvSpPr>
+        <p:spPr>
+          <a:xfrm>
+            <a:off x="548640" y="1618488"/>
+            <a:ext cx="411480" cy="411480"/>
+          </a:xfrm>
+          <a:prstGeom prst="ellipse">
+            <a:avLst/>
+          </a:prstGeom>
+          <a:solidFill>
+            <a:srgbClr val="F2B705"/>
+          </a:solidFill>
+          <a:ln>
+            <a:noFill/>
+          </a:ln>
+          <a:effectLst/>
+        </p:spPr>
+        <p:style>
+          <a:lnRef idx="1">
+            <a:schemeClr val="accent1"/>
+          </a:lnRef>
+          <a:fillRef idx="3">
+            <a:schemeClr val="accent1"/>
+          </a:fillRef>
+          <a:effectRef idx="2">
+            <a:schemeClr val="accent1"/>
+          </a:effectRef>
+          <a:fontRef idx="minor">
+            <a:schemeClr val="lt1"/>
+          </a:fontRef>
+        </p:style>
+        <p:txBody>
+          <a:bodyPr rtlCol="0" anchor="ctr" lIns="0" rIns="0" tIns="0" bIns="0"/>
+          <a:lstStyle/>
+          <a:p>
+            <a:pPr algn="ctr"/>
+            <a:r>
+              <a:rPr sz="1400" b="1">
+                <a:solidFill>
+                  <a:srgbClr val="202122"/>
+                </a:solidFill>
+                <a:latin typeface="Calibri"/>
+              </a:rPr>
+              <a:t>1</a:t>
+            </a:r>
+          </a:p>
+        </p:txBody>
+      </p:sp>
+      <p:sp>
+        <p:nvSpPr>
+          <p:cNvPr id="7" name="TextBox 6"/>
+          <p:cNvSpPr txBox="1"/>
+          <p:nvPr/>
+        </p:nvSpPr>
+        <p:spPr>
+          <a:xfrm>
+            <a:off x="1234440" y="1600200"/>
+            <a:ext cx="10408615" cy="1030986"/>
+          </a:xfrm>
+          <a:prstGeom prst="rect">
+            <a:avLst/>
+          </a:prstGeom>
+          <a:noFill/>
+        </p:spPr>
+        <p:txBody>
+          <a:bodyPr wrap="square" anchor="t" lIns="0" rIns="0" tIns="0" bIns="0"/>
+          <a:lstStyle/>
+          <a:p>
+            <a:pPr algn="l"/>
+            <a:r>
+              <a:rPr sz="1800" b="0" i="0">
+                <a:solidFill>
+                  <a:srgbClr val="54595D"/>
+                </a:solidFill>
+                <a:latin typeface="Calibri"/>
+              </a:rPr>
+              <a:t>What percentage of the core assessments is the ESP?</a:t>
+            </a:r>
+          </a:p>
+          <a:p>
+            <a:r>
+              <a:rPr sz="1800" b="1">
+                <a:solidFill>
+                  <a:srgbClr val="03306E"/>
+                </a:solidFill>
+                <a:latin typeface="Calibri"/>
+              </a:rPr>
+              <a:t>40%.</a:t>
+            </a:r>
+          </a:p>
+        </p:txBody>
+      </p:sp>
+      <p:sp>
+        <p:nvSpPr>
+          <p:cNvPr id="8" name="Oval 7"/>
+          <p:cNvSpPr/>
+          <p:nvPr/>
+        </p:nvSpPr>
+        <p:spPr>
+          <a:xfrm>
+            <a:off x="548640" y="2814066"/>
+            <a:ext cx="411480" cy="411480"/>
+          </a:xfrm>
+          <a:prstGeom prst="ellipse">
+            <a:avLst/>
+          </a:prstGeom>
+          <a:solidFill>
+            <a:srgbClr val="F2B705"/>
+          </a:solidFill>
+          <a:ln>
+            <a:noFill/>
+          </a:ln>
+          <a:effectLst/>
+        </p:spPr>
+        <p:style>
+          <a:lnRef idx="1">
+            <a:schemeClr val="accent1"/>
+          </a:lnRef>
+          <a:fillRef idx="3">
+            <a:schemeClr val="accent1"/>
+          </a:fillRef>
+          <a:effectRef idx="2">
+            <a:schemeClr val="accent1"/>
+          </a:effectRef>
+          <a:fontRef idx="minor">
+            <a:schemeClr val="lt1"/>
+          </a:fontRef>
+        </p:style>
+        <p:txBody>
+          <a:bodyPr rtlCol="0" anchor="ctr" lIns="0" rIns="0" tIns="0" bIns="0"/>
+          <a:lstStyle/>
+          <a:p>
+            <a:pPr algn="ctr"/>
+            <a:r>
+              <a:rPr sz="1400" b="1">
+                <a:solidFill>
+                  <a:srgbClr val="202122"/>
+                </a:solidFill>
+                <a:latin typeface="Calibri"/>
+              </a:rPr>
+              <a:t>2</a:t>
+            </a:r>
+          </a:p>
+        </p:txBody>
+      </p:sp>
+      <p:sp>
+        <p:nvSpPr>
+          <p:cNvPr id="9" name="TextBox 8"/>
+          <p:cNvSpPr txBox="1"/>
+          <p:nvPr/>
+        </p:nvSpPr>
+        <p:spPr>
+          <a:xfrm>
+            <a:off x="1234440" y="2795778"/>
+            <a:ext cx="10408615" cy="1030986"/>
+          </a:xfrm>
+          <a:prstGeom prst="rect">
+            <a:avLst/>
+          </a:prstGeom>
+          <a:noFill/>
+        </p:spPr>
+        <p:txBody>
+          <a:bodyPr wrap="square" anchor="t" lIns="0" rIns="0" tIns="0" bIns="0"/>
+          <a:lstStyle/>
+          <a:p>
+            <a:pPr algn="l"/>
+            <a:r>
+              <a:rPr sz="1800" b="0" i="0">
+                <a:solidFill>
+                  <a:srgbClr val="54595D"/>
+                </a:solidFill>
+                <a:latin typeface="Calibri"/>
+              </a:rPr>
+              <a:t>Name the five types of test data in Task 2.</a:t>
+            </a:r>
+          </a:p>
+          <a:p>
+            <a:r>
+              <a:rPr sz="1800" b="1">
+                <a:solidFill>
+                  <a:srgbClr val="03306E"/>
+                </a:solidFill>
+                <a:latin typeface="Calibri"/>
+              </a:rPr>
+              <a:t>Valid, valid extreme, invalid, invalid extreme, erroneous.</a:t>
+            </a:r>
+          </a:p>
+        </p:txBody>
+      </p:sp>
+      <p:sp>
+        <p:nvSpPr>
+          <p:cNvPr id="10" name="Oval 9"/>
+          <p:cNvSpPr/>
+          <p:nvPr/>
+        </p:nvSpPr>
+        <p:spPr>
+          <a:xfrm>
+            <a:off x="548640" y="4009644"/>
+            <a:ext cx="411480" cy="411480"/>
+          </a:xfrm>
+          <a:prstGeom prst="ellipse">
+            <a:avLst/>
+          </a:prstGeom>
+          <a:solidFill>
+            <a:srgbClr val="F2B705"/>
+          </a:solidFill>
+          <a:ln>
+            <a:noFill/>
+          </a:ln>
+          <a:effectLst/>
+        </p:spPr>
+        <p:style>
+          <a:lnRef idx="1">
+            <a:schemeClr val="accent1"/>
+          </a:lnRef>
+          <a:fillRef idx="3">
+            <a:schemeClr val="accent1"/>
+          </a:fillRef>
+          <a:effectRef idx="2">
+            <a:schemeClr val="accent1"/>
+          </a:effectRef>
+          <a:fontRef idx="minor">
+            <a:schemeClr val="lt1"/>
+          </a:fontRef>
+        </p:style>
+        <p:txBody>
+          <a:bodyPr rtlCol="0" anchor="ctr" lIns="0" rIns="0" tIns="0" bIns="0"/>
+          <a:lstStyle/>
+          <a:p>
+            <a:pPr algn="ctr"/>
+            <a:r>
+              <a:rPr sz="1400" b="1">
+                <a:solidFill>
+                  <a:srgbClr val="202122"/>
+                </a:solidFill>
+                <a:latin typeface="Calibri"/>
+              </a:rPr>
+              <a:t>3</a:t>
+            </a:r>
+          </a:p>
+        </p:txBody>
+      </p:sp>
+      <p:sp>
+        <p:nvSpPr>
+          <p:cNvPr id="11" name="TextBox 10"/>
+          <p:cNvSpPr txBox="1"/>
+          <p:nvPr/>
+        </p:nvSpPr>
+        <p:spPr>
+          <a:xfrm>
+            <a:off x="1234440" y="3991356"/>
+            <a:ext cx="10408615" cy="1030986"/>
+          </a:xfrm>
+          <a:prstGeom prst="rect">
+            <a:avLst/>
+          </a:prstGeom>
+          <a:noFill/>
+        </p:spPr>
+        <p:txBody>
+          <a:bodyPr wrap="square" anchor="t" lIns="0" rIns="0" tIns="0" bIns="0"/>
+          <a:lstStyle/>
+          <a:p>
+            <a:pPr algn="l"/>
+            <a:r>
+              <a:rPr sz="1800" b="0" i="0">
+                <a:solidFill>
+                  <a:srgbClr val="54595D"/>
+                </a:solidFill>
+                <a:latin typeface="Calibri"/>
+              </a:rPr>
+              <a:t>Which library is suggested for graphs?</a:t>
+            </a:r>
+          </a:p>
+          <a:p>
+            <a:r>
+              <a:rPr sz="1800" b="1">
+                <a:solidFill>
+                  <a:srgbClr val="03306E"/>
+                </a:solidFill>
+                <a:latin typeface="Calibri"/>
+              </a:rPr>
+              <a:t>Matplotlib.</a:t>
+            </a:r>
+          </a:p>
+        </p:txBody>
+      </p:sp>
+      <p:sp>
+        <p:nvSpPr>
+          <p:cNvPr id="12" name="Oval 11"/>
+          <p:cNvSpPr/>
+          <p:nvPr/>
+        </p:nvSpPr>
+        <p:spPr>
+          <a:xfrm>
+            <a:off x="548640" y="5205221"/>
+            <a:ext cx="411480" cy="411480"/>
+          </a:xfrm>
+          <a:prstGeom prst="ellipse">
+            <a:avLst/>
+          </a:prstGeom>
+          <a:solidFill>
+            <a:srgbClr val="F2B705"/>
+          </a:solidFill>
+          <a:ln>
+            <a:noFill/>
+          </a:ln>
+          <a:effectLst/>
+        </p:spPr>
+        <p:style>
+          <a:lnRef idx="1">
+            <a:schemeClr val="accent1"/>
+          </a:lnRef>
+          <a:fillRef idx="3">
+            <a:schemeClr val="accent1"/>
+          </a:fillRef>
+          <a:effectRef idx="2">
+            <a:schemeClr val="accent1"/>
+          </a:effectRef>
+          <a:fontRef idx="minor">
+            <a:schemeClr val="lt1"/>
+          </a:fontRef>
+        </p:style>
+        <p:txBody>
+          <a:bodyPr rtlCol="0" anchor="ctr" lIns="0" rIns="0" tIns="0" bIns="0"/>
+          <a:lstStyle/>
+          <a:p>
+            <a:pPr algn="ctr"/>
+            <a:r>
+              <a:rPr sz="1400" b="1">
+                <a:solidFill>
+                  <a:srgbClr val="202122"/>
+                </a:solidFill>
+                <a:latin typeface="Calibri"/>
+              </a:rPr>
+              <a:t>4</a:t>
+            </a:r>
+          </a:p>
+        </p:txBody>
+      </p:sp>
+      <p:sp>
+        <p:nvSpPr>
+          <p:cNvPr id="13" name="TextBox 12"/>
+          <p:cNvSpPr txBox="1"/>
+          <p:nvPr/>
+        </p:nvSpPr>
+        <p:spPr>
+          <a:xfrm>
+            <a:off x="1234440" y="5186933"/>
+            <a:ext cx="10408615" cy="1030986"/>
+          </a:xfrm>
+          <a:prstGeom prst="rect">
+            <a:avLst/>
+          </a:prstGeom>
+          <a:noFill/>
+        </p:spPr>
+        <p:txBody>
+          <a:bodyPr wrap="square" anchor="t" lIns="0" rIns="0" tIns="0" bIns="0"/>
+          <a:lstStyle/>
+          <a:p>
+            <a:pPr algn="l"/>
+            <a:r>
+              <a:rPr sz="1800" b="0" i="0">
+                <a:solidFill>
+                  <a:srgbClr val="54595D"/>
+                </a:solidFill>
+                <a:latin typeface="Calibri"/>
+              </a:rPr>
+              <a:t>What must a Task 3 design allow a third party to do?</a:t>
+            </a:r>
+          </a:p>
+          <a:p>
+            <a:r>
+              <a:rPr sz="1800" b="1">
+                <a:solidFill>
+                  <a:srgbClr val="03306E"/>
+                </a:solidFill>
+                <a:latin typeface="Calibri"/>
+              </a:rPr>
+              <a:t>Build the proposed solution from it.</a:t>
+            </a:r>
+          </a:p>
+        </p:txBody>
+      </p:sp>
+    </p:spTree>
+  </p:cSld>
+  <p:clrMapOvr>
+    <a:masterClrMapping/>
+  </p:clrMapOvr>
+</p:sld>
+</file>
+
+<file path=ppt/slides/slide13.xml><?xml version="1.0" encoding="utf-8"?>
+<p:sld xmlns:a="http://schemas.openxmlformats.org/drawingml/2006/main" xmlns:p="http://schemas.openxmlformats.org/presentationml/2006/main" xmlns:r="http://schemas.openxmlformats.org/officeDocument/2006/relationships">
+  <p:cSld>
+    <p:bg>
+      <p:bgPr>
+        <a:solidFill>
+          <a:srgbClr val="FFFFFF"/>
+        </a:solidFill>
+        <a:effectLst/>
+      </p:bgPr>
+    </p:bg>
+    <p:spTree>
+      <p:nvGrpSpPr>
+        <p:cNvPr id="1" name=""/>
+        <p:cNvGrpSpPr/>
+        <p:nvPr/>
+      </p:nvGrpSpPr>
+      <p:grpSpPr/>
+      <p:sp>
+        <p:nvSpPr>
+          <p:cNvPr id="2" name="TextBox 1"/>
+          <p:cNvSpPr txBox="1"/>
+          <p:nvPr/>
+        </p:nvSpPr>
+        <p:spPr>
+          <a:xfrm>
+            <a:off x="548640" y="320040"/>
+            <a:ext cx="11094415" cy="274320"/>
+          </a:xfrm>
+          <a:prstGeom prst="rect">
+            <a:avLst/>
+          </a:prstGeom>
+          <a:noFill/>
+        </p:spPr>
+        <p:txBody>
+          <a:bodyPr wrap="square" anchor="t" lIns="0" rIns="0" tIns="0" bIns="0"/>
+          <a:lstStyle/>
+          <a:p>
+            <a:pPr algn="l"/>
+            <a:r>
+              <a:rPr sz="1100" b="1" i="0">
+                <a:solidFill>
+                  <a:srgbClr val="54595D"/>
+                </a:solidFill>
+                <a:latin typeface="Calibri"/>
+              </a:rPr>
+              <a:t>CORE COMPONENT  ·  Core Component</a:t>
+            </a:r>
+          </a:p>
+        </p:txBody>
+      </p:sp>
+      <p:sp>
+        <p:nvSpPr>
+          <p:cNvPr id="3" name="TextBox 2"/>
+          <p:cNvSpPr txBox="1"/>
+          <p:nvPr/>
+        </p:nvSpPr>
+        <p:spPr>
+          <a:xfrm>
+            <a:off x="548640" y="566928"/>
+            <a:ext cx="11094415" cy="822960"/>
+          </a:xfrm>
+          <a:prstGeom prst="rect">
+            <a:avLst/>
+          </a:prstGeom>
+          <a:noFill/>
+        </p:spPr>
+        <p:txBody>
+          <a:bodyPr wrap="square" anchor="ctr" lIns="0" rIns="0" tIns="0" bIns="0"/>
+          <a:lstStyle/>
+          <a:p>
+            <a:pPr algn="l"/>
+            <a:r>
+              <a:rPr sz="3200" b="1" i="0">
+                <a:solidFill>
+                  <a:srgbClr val="03306E"/>
+                </a:solidFill>
+                <a:latin typeface="Cambria"/>
+              </a:rPr>
+              <a:t>Activity: Mini Task 2</a:t>
+            </a:r>
+          </a:p>
+        </p:txBody>
+      </p:sp>
+      <p:sp>
+        <p:nvSpPr>
+          <p:cNvPr id="4" name="TextBox 3"/>
+          <p:cNvSpPr txBox="1"/>
+          <p:nvPr/>
+        </p:nvSpPr>
+        <p:spPr>
+          <a:xfrm>
+            <a:off x="548640" y="6446520"/>
+            <a:ext cx="8229600" cy="274320"/>
+          </a:xfrm>
+          <a:prstGeom prst="rect">
+            <a:avLst/>
+          </a:prstGeom>
+          <a:noFill/>
+        </p:spPr>
+        <p:txBody>
+          <a:bodyPr wrap="square" anchor="t" lIns="0" rIns="0" tIns="0" bIns="0"/>
+          <a:lstStyle/>
+          <a:p>
+            <a:pPr algn="l"/>
+            <a:r>
+              <a:rPr sz="1000" b="0" i="0">
+                <a:solidFill>
+                  <a:srgbClr val="54595D"/>
+                </a:solidFill>
+                <a:latin typeface="Calibri"/>
+              </a:rPr>
+              <a:t>Digital Software Development T Level  ·  The Employer Set Project</a:t>
+            </a:r>
+          </a:p>
+        </p:txBody>
+      </p:sp>
+      <p:sp>
+        <p:nvSpPr>
+          <p:cNvPr id="5" name="TextBox 4"/>
+          <p:cNvSpPr txBox="1"/>
+          <p:nvPr/>
+        </p:nvSpPr>
+        <p:spPr>
+          <a:xfrm>
+            <a:off x="10728655" y="6446520"/>
+            <a:ext cx="914400" cy="274320"/>
+          </a:xfrm>
+          <a:prstGeom prst="rect">
+            <a:avLst/>
+          </a:prstGeom>
+          <a:noFill/>
+        </p:spPr>
+        <p:txBody>
+          <a:bodyPr wrap="square" anchor="t" lIns="0" rIns="0" tIns="0" bIns="0"/>
+          <a:lstStyle/>
+          <a:p>
+            <a:pPr algn="r"/>
+            <a:r>
+              <a:rPr sz="1000" b="0" i="0">
+                <a:solidFill>
+                  <a:srgbClr val="54595D"/>
+                </a:solidFill>
+                <a:latin typeface="Calibri"/>
+              </a:rPr>
+              <a:t>13</a:t>
+            </a:r>
+          </a:p>
+        </p:txBody>
+      </p:sp>
+      <p:sp>
+        <p:nvSpPr>
+          <p:cNvPr id="6" name="Rounded Rectangle 5"/>
+          <p:cNvSpPr/>
+          <p:nvPr/>
+        </p:nvSpPr>
+        <p:spPr>
+          <a:xfrm>
+            <a:off x="548640" y="1508760"/>
+            <a:ext cx="2011680" cy="457200"/>
+          </a:xfrm>
+          <a:prstGeom prst="roundRect">
+            <a:avLst>
+              <a:gd name="adj" fmla="val 50000"/>
+            </a:avLst>
+          </a:prstGeom>
+          <a:solidFill>
+            <a:srgbClr val="F2B705"/>
+          </a:solidFill>
+          <a:ln>
+            <a:noFill/>
+          </a:ln>
+          <a:effectLst/>
+        </p:spPr>
+        <p:style>
+          <a:lnRef idx="1">
+            <a:schemeClr val="accent1"/>
+          </a:lnRef>
+          <a:fillRef idx="3">
+            <a:schemeClr val="accent1"/>
+          </a:fillRef>
+          <a:effectRef idx="2">
+            <a:schemeClr val="accent1"/>
+          </a:effectRef>
+          <a:fontRef idx="minor">
+            <a:schemeClr val="lt1"/>
+          </a:fontRef>
+        </p:style>
+        <p:txBody>
+          <a:bodyPr rtlCol="0" anchor="ctr"/>
+          <a:lstStyle/>
+          <a:p/>
+        </p:txBody>
+      </p:sp>
+      <p:sp>
+        <p:nvSpPr>
+          <p:cNvPr id="7" name="TextBox 6"/>
+          <p:cNvSpPr txBox="1"/>
+          <p:nvPr/>
+        </p:nvSpPr>
+        <p:spPr>
+          <a:xfrm>
+            <a:off x="548640" y="1508760"/>
+            <a:ext cx="2011680" cy="457200"/>
+          </a:xfrm>
+          <a:prstGeom prst="rect">
+            <a:avLst/>
+          </a:prstGeom>
+          <a:noFill/>
+        </p:spPr>
+        <p:txBody>
+          <a:bodyPr wrap="square" anchor="ctr" lIns="0" rIns="0" tIns="0" bIns="0"/>
+          <a:lstStyle/>
+          <a:p>
+            <a:pPr algn="ctr"/>
+            <a:r>
+              <a:rPr sz="1400" b="1" i="0">
+                <a:solidFill>
+                  <a:srgbClr val="202122"/>
+                </a:solidFill>
+                <a:latin typeface="Calibri"/>
+              </a:rPr>
+              <a:t>40 minutes</a:t>
+            </a:r>
+          </a:p>
+        </p:txBody>
+      </p:sp>
+      <p:sp>
+        <p:nvSpPr>
+          <p:cNvPr id="8" name="TextBox 7"/>
+          <p:cNvSpPr txBox="1"/>
+          <p:nvPr/>
+        </p:nvSpPr>
+        <p:spPr>
+          <a:xfrm>
+            <a:off x="2743200" y="1508760"/>
+            <a:ext cx="4754880" cy="457200"/>
+          </a:xfrm>
+          <a:prstGeom prst="rect">
+            <a:avLst/>
+          </a:prstGeom>
+          <a:noFill/>
+        </p:spPr>
+        <p:txBody>
+          <a:bodyPr wrap="square" anchor="ctr" lIns="0" rIns="0" tIns="0" bIns="0"/>
+          <a:lstStyle/>
+          <a:p>
+            <a:pPr algn="l"/>
+            <a:r>
+              <a:rPr sz="1400" b="0" i="1">
+                <a:solidFill>
+                  <a:srgbClr val="54595D"/>
+                </a:solidFill>
+                <a:latin typeface="Calibri"/>
+              </a:rPr>
+              <a:t>Individual</a:t>
+            </a:r>
+          </a:p>
+        </p:txBody>
+      </p:sp>
+      <p:sp>
+        <p:nvSpPr>
+          <p:cNvPr id="9" name="Oval 8"/>
+          <p:cNvSpPr/>
+          <p:nvPr/>
+        </p:nvSpPr>
+        <p:spPr>
+          <a:xfrm>
+            <a:off x="548640" y="2482596"/>
+            <a:ext cx="384048" cy="384048"/>
+          </a:xfrm>
+          <a:prstGeom prst="ellipse">
+            <a:avLst/>
+          </a:prstGeom>
+          <a:solidFill>
+            <a:srgbClr val="0645AD"/>
+          </a:solidFill>
+          <a:ln>
+            <a:noFill/>
+          </a:ln>
+          <a:effectLst/>
+        </p:spPr>
+        <p:style>
+          <a:lnRef idx="1">
+            <a:schemeClr val="accent1"/>
+          </a:lnRef>
+          <a:fillRef idx="3">
+            <a:schemeClr val="accent1"/>
+          </a:fillRef>
+          <a:effectRef idx="2">
+            <a:schemeClr val="accent1"/>
+          </a:effectRef>
+          <a:fontRef idx="minor">
+            <a:schemeClr val="lt1"/>
+          </a:fontRef>
+        </p:style>
+        <p:txBody>
+          <a:bodyPr rtlCol="0" anchor="ctr" lIns="0" rIns="0" tIns="0" bIns="0"/>
+          <a:lstStyle/>
+          <a:p>
+            <a:pPr algn="ctr"/>
+            <a:r>
+              <a:rPr sz="1300" b="1">
+                <a:solidFill>
+                  <a:srgbClr val="FFFFFF"/>
+                </a:solidFill>
+                <a:latin typeface="Calibri"/>
+              </a:rPr>
+              <a:t>1</a:t>
+            </a:r>
+          </a:p>
+        </p:txBody>
+      </p:sp>
+      <p:sp>
+        <p:nvSpPr>
+          <p:cNvPr id="10" name="TextBox 9"/>
+          <p:cNvSpPr txBox="1"/>
+          <p:nvPr/>
+        </p:nvSpPr>
+        <p:spPr>
+          <a:xfrm>
+            <a:off x="1143000" y="2240280"/>
+            <a:ext cx="5943600" cy="868680"/>
+          </a:xfrm>
+          <a:prstGeom prst="rect">
+            <a:avLst/>
+          </a:prstGeom>
+          <a:noFill/>
+        </p:spPr>
+        <p:txBody>
+          <a:bodyPr wrap="square" anchor="ctr" lIns="0" rIns="0" tIns="0" bIns="0"/>
+          <a:lstStyle/>
+          <a:p>
+            <a:pPr algn="l"/>
+            <a:r>
+              <a:rPr sz="1700" b="0" i="0">
+                <a:solidFill>
+                  <a:srgbClr val="202122"/>
+                </a:solidFill>
+                <a:latin typeface="Calibri"/>
+              </a:rPr>
+              <a:t>Your teacher gives you a short program with four defects.</a:t>
+            </a:r>
+          </a:p>
+        </p:txBody>
+      </p:sp>
+      <p:sp>
+        <p:nvSpPr>
+          <p:cNvPr id="11" name="Oval 10"/>
+          <p:cNvSpPr/>
+          <p:nvPr/>
+        </p:nvSpPr>
+        <p:spPr>
+          <a:xfrm>
+            <a:off x="548640" y="3461004"/>
+            <a:ext cx="384048" cy="384048"/>
+          </a:xfrm>
+          <a:prstGeom prst="ellipse">
+            <a:avLst/>
+          </a:prstGeom>
+          <a:solidFill>
+            <a:srgbClr val="0645AD"/>
+          </a:solidFill>
+          <a:ln>
+            <a:noFill/>
+          </a:ln>
+          <a:effectLst/>
+        </p:spPr>
+        <p:style>
+          <a:lnRef idx="1">
+            <a:schemeClr val="accent1"/>
+          </a:lnRef>
+          <a:fillRef idx="3">
+            <a:schemeClr val="accent1"/>
+          </a:fillRef>
+          <a:effectRef idx="2">
+            <a:schemeClr val="accent1"/>
+          </a:effectRef>
+          <a:fontRef idx="minor">
+            <a:schemeClr val="lt1"/>
+          </a:fontRef>
+        </p:style>
+        <p:txBody>
+          <a:bodyPr rtlCol="0" anchor="ctr" lIns="0" rIns="0" tIns="0" bIns="0"/>
+          <a:lstStyle/>
+          <a:p>
+            <a:pPr algn="ctr"/>
+            <a:r>
+              <a:rPr sz="1300" b="1">
+                <a:solidFill>
+                  <a:srgbClr val="FFFFFF"/>
+                </a:solidFill>
+                <a:latin typeface="Calibri"/>
+              </a:rPr>
+              <a:t>2</a:t>
+            </a:r>
+          </a:p>
+        </p:txBody>
+      </p:sp>
+      <p:sp>
+        <p:nvSpPr>
+          <p:cNvPr id="12" name="TextBox 11"/>
+          <p:cNvSpPr txBox="1"/>
+          <p:nvPr/>
+        </p:nvSpPr>
+        <p:spPr>
+          <a:xfrm>
+            <a:off x="1143000" y="3218688"/>
+            <a:ext cx="5943600" cy="868680"/>
+          </a:xfrm>
+          <a:prstGeom prst="rect">
+            <a:avLst/>
+          </a:prstGeom>
+          <a:noFill/>
+        </p:spPr>
+        <p:txBody>
+          <a:bodyPr wrap="square" anchor="ctr" lIns="0" rIns="0" tIns="0" bIns="0"/>
+          <a:lstStyle/>
+          <a:p>
+            <a:pPr algn="l"/>
+            <a:r>
+              <a:rPr sz="1700" b="0" i="0">
+                <a:solidFill>
+                  <a:srgbClr val="202122"/>
+                </a:solidFill>
+                <a:latin typeface="Calibri"/>
+              </a:rPr>
+              <a:t>Write a test table before changing anything.</a:t>
+            </a:r>
+          </a:p>
+        </p:txBody>
+      </p:sp>
+      <p:sp>
+        <p:nvSpPr>
+          <p:cNvPr id="13" name="Oval 12"/>
+          <p:cNvSpPr/>
+          <p:nvPr/>
+        </p:nvSpPr>
+        <p:spPr>
+          <a:xfrm>
+            <a:off x="548640" y="4439412"/>
+            <a:ext cx="384048" cy="384048"/>
+          </a:xfrm>
+          <a:prstGeom prst="ellipse">
+            <a:avLst/>
+          </a:prstGeom>
+          <a:solidFill>
+            <a:srgbClr val="0645AD"/>
+          </a:solidFill>
+          <a:ln>
+            <a:noFill/>
+          </a:ln>
+          <a:effectLst/>
+        </p:spPr>
+        <p:style>
+          <a:lnRef idx="1">
+            <a:schemeClr val="accent1"/>
+          </a:lnRef>
+          <a:fillRef idx="3">
+            <a:schemeClr val="accent1"/>
+          </a:fillRef>
+          <a:effectRef idx="2">
+            <a:schemeClr val="accent1"/>
+          </a:effectRef>
+          <a:fontRef idx="minor">
+            <a:schemeClr val="lt1"/>
+          </a:fontRef>
+        </p:style>
+        <p:txBody>
+          <a:bodyPr rtlCol="0" anchor="ctr" lIns="0" rIns="0" tIns="0" bIns="0"/>
+          <a:lstStyle/>
+          <a:p>
+            <a:pPr algn="ctr"/>
+            <a:r>
+              <a:rPr sz="1300" b="1">
+                <a:solidFill>
+                  <a:srgbClr val="FFFFFF"/>
+                </a:solidFill>
+                <a:latin typeface="Calibri"/>
+              </a:rPr>
+              <a:t>3</a:t>
+            </a:r>
+          </a:p>
+        </p:txBody>
+      </p:sp>
+      <p:sp>
+        <p:nvSpPr>
+          <p:cNvPr id="14" name="TextBox 13"/>
+          <p:cNvSpPr txBox="1"/>
+          <p:nvPr/>
+        </p:nvSpPr>
+        <p:spPr>
+          <a:xfrm>
+            <a:off x="1143000" y="4197096"/>
+            <a:ext cx="5943600" cy="868680"/>
+          </a:xfrm>
+          <a:prstGeom prst="rect">
+            <a:avLst/>
+          </a:prstGeom>
+          <a:noFill/>
+        </p:spPr>
+        <p:txBody>
+          <a:bodyPr wrap="square" anchor="ctr" lIns="0" rIns="0" tIns="0" bIns="0"/>
+          <a:lstStyle/>
+          <a:p>
+            <a:pPr algn="l"/>
+            <a:r>
+              <a:rPr sz="1700" b="0" i="0">
+                <a:solidFill>
+                  <a:srgbClr val="202122"/>
+                </a:solidFill>
+                <a:latin typeface="Calibri"/>
+              </a:rPr>
+              <a:t>Fix each defect and retest.</a:t>
+            </a:r>
+          </a:p>
+        </p:txBody>
+      </p:sp>
+      <p:sp>
+        <p:nvSpPr>
+          <p:cNvPr id="15" name="Oval 14"/>
+          <p:cNvSpPr/>
+          <p:nvPr/>
+        </p:nvSpPr>
+        <p:spPr>
+          <a:xfrm>
+            <a:off x="548640" y="5417820"/>
+            <a:ext cx="384048" cy="384048"/>
+          </a:xfrm>
+          <a:prstGeom prst="ellipse">
+            <a:avLst/>
+          </a:prstGeom>
+          <a:solidFill>
+            <a:srgbClr val="0645AD"/>
+          </a:solidFill>
+          <a:ln>
+            <a:noFill/>
+          </a:ln>
+          <a:effectLst/>
+        </p:spPr>
+        <p:style>
+          <a:lnRef idx="1">
+            <a:schemeClr val="accent1"/>
+          </a:lnRef>
+          <a:fillRef idx="3">
+            <a:schemeClr val="accent1"/>
+          </a:fillRef>
+          <a:effectRef idx="2">
+            <a:schemeClr val="accent1"/>
+          </a:effectRef>
+          <a:fontRef idx="minor">
+            <a:schemeClr val="lt1"/>
+          </a:fontRef>
+        </p:style>
+        <p:txBody>
+          <a:bodyPr rtlCol="0" anchor="ctr" lIns="0" rIns="0" tIns="0" bIns="0"/>
+          <a:lstStyle/>
+          <a:p>
+            <a:pPr algn="ctr"/>
+            <a:r>
+              <a:rPr sz="1300" b="1">
+                <a:solidFill>
+                  <a:srgbClr val="FFFFFF"/>
+                </a:solidFill>
+                <a:latin typeface="Calibri"/>
+              </a:rPr>
+              <a:t>4</a:t>
+            </a:r>
+          </a:p>
+        </p:txBody>
+      </p:sp>
+      <p:sp>
+        <p:nvSpPr>
+          <p:cNvPr id="16" name="TextBox 15"/>
+          <p:cNvSpPr txBox="1"/>
+          <p:nvPr/>
+        </p:nvSpPr>
+        <p:spPr>
+          <a:xfrm>
+            <a:off x="1143000" y="5175504"/>
+            <a:ext cx="5943600" cy="868680"/>
+          </a:xfrm>
+          <a:prstGeom prst="rect">
+            <a:avLst/>
+          </a:prstGeom>
+          <a:noFill/>
+        </p:spPr>
+        <p:txBody>
+          <a:bodyPr wrap="square" anchor="ctr" lIns="0" rIns="0" tIns="0" bIns="0"/>
+          <a:lstStyle/>
+          <a:p>
+            <a:pPr algn="l"/>
+            <a:r>
+              <a:rPr sz="1700" b="0" i="0">
+                <a:solidFill>
+                  <a:srgbClr val="202122"/>
+                </a:solidFill>
+                <a:latin typeface="Calibri"/>
+              </a:rPr>
+              <a:t>Justify each fix in one sentence.</a:t>
+            </a:r>
+          </a:p>
+        </p:txBody>
+      </p:sp>
+      <p:sp>
+        <p:nvSpPr>
+          <p:cNvPr id="17" name="Rounded Rectangle 16"/>
+          <p:cNvSpPr/>
+          <p:nvPr/>
+        </p:nvSpPr>
+        <p:spPr>
+          <a:xfrm>
+            <a:off x="7772400" y="1508760"/>
+            <a:ext cx="3867912" cy="4572000"/>
+          </a:xfrm>
+          <a:prstGeom prst="roundRect">
+            <a:avLst>
+              <a:gd name="adj" fmla="val 8000"/>
+            </a:avLst>
+          </a:prstGeom>
+          <a:solidFill>
+            <a:srgbClr val="EAF3FF"/>
+          </a:solidFill>
+          <a:ln>
+            <a:noFill/>
+          </a:ln>
+          <a:effectLst/>
+        </p:spPr>
+        <p:style>
+          <a:lnRef idx="1">
+            <a:schemeClr val="accent1"/>
+          </a:lnRef>
+          <a:fillRef idx="3">
+            <a:schemeClr val="accent1"/>
+          </a:fillRef>
+          <a:effectRef idx="2">
+            <a:schemeClr val="accent1"/>
+          </a:effectRef>
+          <a:fontRef idx="minor">
+            <a:schemeClr val="lt1"/>
+          </a:fontRef>
+        </p:style>
+        <p:txBody>
+          <a:bodyPr rtlCol="0" anchor="ctr"/>
+          <a:lstStyle/>
+          <a:p/>
+        </p:txBody>
+      </p:sp>
+      <p:sp>
+        <p:nvSpPr>
+          <p:cNvPr id="18" name="TextBox 17"/>
+          <p:cNvSpPr txBox="1"/>
+          <p:nvPr/>
+        </p:nvSpPr>
+        <p:spPr>
+          <a:xfrm>
+            <a:off x="8046720" y="1737360"/>
+            <a:ext cx="3291840" cy="365760"/>
+          </a:xfrm>
+          <a:prstGeom prst="rect">
+            <a:avLst/>
+          </a:prstGeom>
+          <a:noFill/>
+        </p:spPr>
+        <p:txBody>
+          <a:bodyPr wrap="square" anchor="t" lIns="0" rIns="0" tIns="0" bIns="0"/>
+          <a:lstStyle/>
+          <a:p>
+            <a:pPr algn="l"/>
+            <a:r>
+              <a:rPr sz="1300" b="1" i="0">
+                <a:solidFill>
+                  <a:srgbClr val="0645AD"/>
+                </a:solidFill>
+                <a:latin typeface="Calibri"/>
+              </a:rPr>
+              <a:t>SUCCESS CRITERIA</a:t>
+            </a:r>
+          </a:p>
+        </p:txBody>
+      </p:sp>
+      <p:sp>
+        <p:nvSpPr>
+          <p:cNvPr id="19" name="TextBox 18"/>
+          <p:cNvSpPr txBox="1"/>
+          <p:nvPr/>
+        </p:nvSpPr>
+        <p:spPr>
+          <a:xfrm>
+            <a:off x="8046720" y="2240280"/>
+            <a:ext cx="3337560" cy="3657600"/>
+          </a:xfrm>
+          <a:prstGeom prst="rect">
+            <a:avLst/>
+          </a:prstGeom>
+          <a:noFill/>
+        </p:spPr>
+        <p:txBody>
+          <a:bodyPr wrap="square" lIns="0" rIns="0" tIns="0" bIns="0">
+            <a:spAutoFit/>
+          </a:bodyPr>
+          <a:lstStyle/>
+          <a:p>
+            <a:pPr marL="274320" indent="-274320">
+              <a:spcAft>
+                <a:spcPts val="810"/>
+              </a:spcAft>
+              <a:buClr>
+                <a:srgbClr val="0645AD"/>
+              </a:buClr>
+              <a:buFont typeface="Arial"/>
+              <a:buChar char="•"/>
+            </a:pPr>
+            <a:r>
+              <a:rPr sz="1800" b="0">
+                <a:solidFill>
+                  <a:srgbClr val="202122"/>
+                </a:solidFill>
+                <a:latin typeface="Calibri"/>
+              </a:rPr>
+              <a:t>All five test data types used</a:t>
+            </a:r>
+          </a:p>
+          <a:p>
+            <a:pPr marL="274320" indent="-274320">
+              <a:spcAft>
+                <a:spcPts val="810"/>
+              </a:spcAft>
+              <a:buClr>
+                <a:srgbClr val="0645AD"/>
+              </a:buClr>
+              <a:buFont typeface="Arial"/>
+              <a:buChar char="•"/>
+            </a:pPr>
+            <a:r>
+              <a:rPr sz="1800" b="0">
+                <a:solidFill>
+                  <a:srgbClr val="202122"/>
+                </a:solidFill>
+                <a:latin typeface="Calibri"/>
+              </a:rPr>
+              <a:t>Every defect fixed</a:t>
+            </a:r>
+          </a:p>
+          <a:p>
+            <a:pPr marL="274320" indent="-274320">
+              <a:spcAft>
+                <a:spcPts val="810"/>
+              </a:spcAft>
+              <a:buClr>
+                <a:srgbClr val="0645AD"/>
+              </a:buClr>
+              <a:buFont typeface="Arial"/>
+              <a:buChar char="•"/>
+            </a:pPr>
+            <a:r>
+              <a:rPr sz="1800" b="0">
+                <a:solidFill>
+                  <a:srgbClr val="202122"/>
+                </a:solidFill>
+                <a:latin typeface="Calibri"/>
+              </a:rPr>
+              <a:t>Expected and actual results compared</a:t>
+            </a:r>
+          </a:p>
+        </p:txBody>
+      </p:sp>
+    </p:spTree>
+  </p:cSld>
+  <p:clrMapOvr>
+    <a:masterClrMapping/>
+  </p:clrMapOvr>
+</p:sld>
+</file>
+
+<file path=ppt/slides/slide14.xml><?xml version="1.0" encoding="utf-8"?>
+<p:sld xmlns:a="http://schemas.openxmlformats.org/drawingml/2006/main" xmlns:p="http://schemas.openxmlformats.org/presentationml/2006/main" xmlns:r="http://schemas.openxmlformats.org/officeDocument/2006/relationships">
+  <p:cSld>
+    <p:bg>
+      <p:bgPr>
+        <a:solidFill>
           <a:srgbClr val="03306E"/>
         </a:solidFill>
         <a:effectLst/>
@@ -5219,8 +7665,8 @@
         </p:nvSpPr>
         <p:spPr>
           <a:xfrm>
-            <a:off x="548640" y="1600200"/>
-            <a:ext cx="6675120" cy="4572000"/>
+            <a:off x="548640" y="1554480"/>
+            <a:ext cx="6720840" cy="4617720"/>
           </a:xfrm>
           <a:prstGeom prst="rect">
             <a:avLst/>
@@ -5233,87 +7679,51 @@
           </a:bodyPr>
           <a:lstStyle/>
           <a:p>
-            <a:pPr marL="274320" indent="-274320">
+            <a:pPr>
               <a:spcAft>
-                <a:spcPts val="1080"/>
+                <a:spcPts val="1320"/>
               </a:spcAft>
-              <a:buClr>
-                <a:srgbClr val="0645AD"/>
-              </a:buClr>
-              <a:buFont typeface="Arial"/>
-              <a:buChar char="•"/>
             </a:pPr>
             <a:r>
-              <a:rPr sz="2400" b="0">
+              <a:rPr sz="2200" b="0">
                 <a:solidFill>
                   <a:srgbClr val="202122"/>
                 </a:solidFill>
                 <a:latin typeface="Calibri"/>
               </a:rPr>
-              <a:t>40% of the core assessments, 100 marks.</a:t>
-            </a:r>
-          </a:p>
-          <a:p>
-            <a:pPr marL="274320" indent="-274320">
+              <a:t>The Employer Set Project is worth 40% of the core assessments (100 marks) and takes up to 14 hours 30 minutes across several sessions.</a:t>
+            </a:r>
+          </a:p>
+          <a:p>
+            <a:pPr>
               <a:spcAft>
-                <a:spcPts val="1080"/>
+                <a:spcPts val="1320"/>
               </a:spcAft>
-              <a:buClr>
-                <a:srgbClr val="0645AD"/>
-              </a:buClr>
-              <a:buFont typeface="Arial"/>
-              <a:buChar char="•"/>
             </a:pPr>
             <a:r>
-              <a:rPr sz="2400" b="0">
+              <a:rPr sz="2200" b="0">
                 <a:solidFill>
                   <a:srgbClr val="202122"/>
                 </a:solidFill>
                 <a:latin typeface="Calibri"/>
               </a:rPr>
-              <a:t>Up to 14 hours 30 minutes across several sessions.</a:t>
-            </a:r>
-          </a:p>
-          <a:p>
-            <a:pPr marL="274320" indent="-274320">
+              <a:t>It's set and marked externally and responds to a realistic vocational brief, drawing on everything in the core. You can't use the internet or AI tools during the assessed sessions, so the Python you need has to be in your head.</a:t>
+            </a:r>
+          </a:p>
+          <a:p>
+            <a:pPr>
               <a:spcAft>
-                <a:spcPts val="1080"/>
+                <a:spcPts val="1320"/>
               </a:spcAft>
-              <a:buClr>
-                <a:srgbClr val="0645AD"/>
-              </a:buClr>
-              <a:buFont typeface="Arial"/>
-              <a:buChar char="•"/>
             </a:pPr>
             <a:r>
-              <a:rPr sz="2400" b="0">
+              <a:rPr sz="2200" b="0">
                 <a:solidFill>
                   <a:srgbClr val="202122"/>
                 </a:solidFill>
                 <a:latin typeface="Calibri"/>
               </a:rPr>
-              <a:t>A realistic vocational brief, externally set and marked.</a:t>
-            </a:r>
-          </a:p>
-          <a:p>
-            <a:pPr marL="274320" indent="-274320">
-              <a:spcAft>
-                <a:spcPts val="1080"/>
-              </a:spcAft>
-              <a:buClr>
-                <a:srgbClr val="0645AD"/>
-              </a:buClr>
-              <a:buFont typeface="Arial"/>
-              <a:buChar char="•"/>
-            </a:pPr>
-            <a:r>
-              <a:rPr sz="2400" b="0">
-                <a:solidFill>
-                  <a:srgbClr val="202122"/>
-                </a:solidFill>
-                <a:latin typeface="Calibri"/>
-              </a:rPr>
-              <a:t>No internet access or AI tools during assessed sessions.</a:t>
+              <a:t>The order and detail of the tasks can change each series, but the number and focus stay the same.</a:t>
             </a:r>
           </a:p>
         </p:txBody>
@@ -5326,8 +7736,8 @@
         </p:nvSpPr>
         <p:spPr>
           <a:xfrm>
-            <a:off x="7772400" y="1600200"/>
-            <a:ext cx="3867912" cy="4434840"/>
+            <a:off x="7772400" y="1554480"/>
+            <a:ext cx="3867912" cy="4526280"/>
           </a:xfrm>
           <a:prstGeom prst="roundRect">
             <a:avLst>
@@ -5370,7 +7780,7 @@
         </p:nvSpPr>
         <p:spPr>
           <a:xfrm>
-            <a:off x="8046720" y="1874519"/>
+            <a:off x="8046720" y="1828800"/>
             <a:ext cx="548640" cy="548640"/>
           </a:xfrm>
           <a:prstGeom prst="ellipse">
@@ -5404,13 +7814,13 @@
           <a:p>
             <a:pPr algn="ctr"/>
             <a:r>
-              <a:rPr sz="2000" b="1">
+              <a:rPr sz="1300" b="1">
                 <a:solidFill>
                   <a:srgbClr val="202122"/>
                 </a:solidFill>
                 <a:latin typeface="Calibri"/>
               </a:rPr>
-              <a:t>!</a:t>
+              <a:t>e.g.</a:t>
             </a:r>
           </a:p>
         </p:txBody>
@@ -5423,7 +7833,7 @@
         </p:nvSpPr>
         <p:spPr>
           <a:xfrm>
-            <a:off x="8046720" y="2606040"/>
+            <a:off x="8046720" y="2560320"/>
             <a:ext cx="3291840" cy="365760"/>
           </a:xfrm>
           <a:prstGeom prst="rect">
@@ -5443,7 +7853,7 @@
                 </a:solidFill>
                 <a:latin typeface="Calibri"/>
               </a:rPr>
-              <a:t>KEY IDEA</a:t>
+              <a:t>EXAMPLE</a:t>
             </a:r>
           </a:p>
         </p:txBody>
@@ -5456,8 +7866,8 @@
         </p:nvSpPr>
         <p:spPr>
           <a:xfrm>
-            <a:off x="8046720" y="3017520"/>
-            <a:ext cx="3291840" cy="2926080"/>
+            <a:off x="8046720" y="2971800"/>
+            <a:ext cx="3291840" cy="2971800"/>
           </a:xfrm>
           <a:prstGeom prst="rect">
             <a:avLst/>
@@ -5470,13 +7880,13 @@
           <a:p>
             <a:pPr algn="l"/>
             <a:r>
-              <a:rPr sz="2200" b="0" i="0">
+              <a:rPr sz="1900" b="0" i="0">
                 <a:solidFill>
                   <a:srgbClr val="FFFFFF"/>
                 </a:solidFill>
                 <a:latin typeface="Cambria"/>
               </a:rPr>
-              <a:t>The order and detail of tasks can change each series, but the number and focus of tasks stay the same.</a:t>
+              <a:t>The specimen brief was set in the financial sector: planning, fixing and building software for a fictional finance company.</a:t>
             </a:r>
           </a:p>
         </p:txBody>
@@ -5568,7 +7978,7 @@
                 </a:solidFill>
                 <a:latin typeface="Cambria"/>
               </a:rPr>
-              <a:t>The tasks</a:t>
+              <a:t>What is the ESP?</a:t>
             </a:r>
           </a:p>
         </p:txBody>
@@ -5641,20 +8051,129 @@
       </p:sp>
       <p:sp>
         <p:nvSpPr>
-          <p:cNvPr id="6" name="Rectangle 5"/>
+          <p:cNvPr id="6" name="TextBox 5"/>
+          <p:cNvSpPr txBox="1"/>
+          <p:nvPr/>
+        </p:nvSpPr>
+        <p:spPr>
+          <a:xfrm>
+            <a:off x="548640" y="1600200"/>
+            <a:ext cx="6675120" cy="4572000"/>
+          </a:xfrm>
+          <a:prstGeom prst="rect">
+            <a:avLst/>
+          </a:prstGeom>
+          <a:noFill/>
+        </p:spPr>
+        <p:txBody>
+          <a:bodyPr wrap="square" lIns="0" rIns="0" tIns="0" bIns="0">
+            <a:spAutoFit/>
+          </a:bodyPr>
+          <a:lstStyle/>
+          <a:p>
+            <a:pPr marL="274320" indent="-274320">
+              <a:spcAft>
+                <a:spcPts val="1080"/>
+              </a:spcAft>
+              <a:buClr>
+                <a:srgbClr val="0645AD"/>
+              </a:buClr>
+              <a:buFont typeface="Arial"/>
+              <a:buChar char="•"/>
+            </a:pPr>
+            <a:r>
+              <a:rPr sz="2400" b="0">
+                <a:solidFill>
+                  <a:srgbClr val="202122"/>
+                </a:solidFill>
+                <a:latin typeface="Calibri"/>
+              </a:rPr>
+              <a:t>40% of the core assessments, 100 marks.</a:t>
+            </a:r>
+          </a:p>
+          <a:p>
+            <a:pPr marL="274320" indent="-274320">
+              <a:spcAft>
+                <a:spcPts val="1080"/>
+              </a:spcAft>
+              <a:buClr>
+                <a:srgbClr val="0645AD"/>
+              </a:buClr>
+              <a:buFont typeface="Arial"/>
+              <a:buChar char="•"/>
+            </a:pPr>
+            <a:r>
+              <a:rPr sz="2400" b="0">
+                <a:solidFill>
+                  <a:srgbClr val="202122"/>
+                </a:solidFill>
+                <a:latin typeface="Calibri"/>
+              </a:rPr>
+              <a:t>Up to 14 hours 30 minutes across several sessions.</a:t>
+            </a:r>
+          </a:p>
+          <a:p>
+            <a:pPr marL="274320" indent="-274320">
+              <a:spcAft>
+                <a:spcPts val="1080"/>
+              </a:spcAft>
+              <a:buClr>
+                <a:srgbClr val="0645AD"/>
+              </a:buClr>
+              <a:buFont typeface="Arial"/>
+              <a:buChar char="•"/>
+            </a:pPr>
+            <a:r>
+              <a:rPr sz="2400" b="0">
+                <a:solidFill>
+                  <a:srgbClr val="202122"/>
+                </a:solidFill>
+                <a:latin typeface="Calibri"/>
+              </a:rPr>
+              <a:t>A realistic vocational brief, externally set and marked.</a:t>
+            </a:r>
+          </a:p>
+          <a:p>
+            <a:pPr marL="274320" indent="-274320">
+              <a:spcAft>
+                <a:spcPts val="1080"/>
+              </a:spcAft>
+              <a:buClr>
+                <a:srgbClr val="0645AD"/>
+              </a:buClr>
+              <a:buFont typeface="Arial"/>
+              <a:buChar char="•"/>
+            </a:pPr>
+            <a:r>
+              <a:rPr sz="2400" b="0">
+                <a:solidFill>
+                  <a:srgbClr val="202122"/>
+                </a:solidFill>
+                <a:latin typeface="Calibri"/>
+              </a:rPr>
+              <a:t>No internet access or AI tools during assessed sessions.</a:t>
+            </a:r>
+          </a:p>
+        </p:txBody>
+      </p:sp>
+      <p:sp>
+        <p:nvSpPr>
+          <p:cNvPr id="7" name="Rounded Rectangle 6"/>
           <p:cNvSpPr/>
           <p:nvPr/>
         </p:nvSpPr>
         <p:spPr>
           <a:xfrm>
-            <a:off x="1416024" y="2656332"/>
-            <a:ext cx="9359646" cy="36576"/>
-          </a:xfrm>
-          <a:prstGeom prst="rect">
-            <a:avLst/>
+            <a:off x="7772400" y="1600200"/>
+            <a:ext cx="3867912" cy="4434840"/>
+          </a:xfrm>
+          <a:prstGeom prst="roundRect">
+            <a:avLst>
+              <a:gd name="adj" fmla="val 8000"/>
+            </a:avLst>
           </a:prstGeom>
           <a:solidFill>
-            <a:srgbClr val="A9C8F0"/>
+            <a:srgbClr val="03306E"/>
           </a:solidFill>
           <a:ln>
             <a:noFill/>
@@ -5683,14 +8202,14 @@
       </p:sp>
       <p:sp>
         <p:nvSpPr>
-          <p:cNvPr id="7" name="Oval 6"/>
+          <p:cNvPr id="8" name="Oval 7"/>
           <p:cNvSpPr/>
           <p:nvPr/>
         </p:nvSpPr>
         <p:spPr>
           <a:xfrm>
-            <a:off x="1095984" y="2354580"/>
-            <a:ext cx="640080" cy="640080"/>
+            <a:off x="8046720" y="1874519"/>
+            <a:ext cx="548640" cy="548640"/>
           </a:xfrm>
           <a:prstGeom prst="ellipse">
             <a:avLst/>
@@ -5729,21 +8248,21 @@
                 </a:solidFill>
                 <a:latin typeface="Calibri"/>
               </a:rPr>
-              <a:t>1</a:t>
-            </a:r>
-          </a:p>
-        </p:txBody>
-      </p:sp>
-      <p:sp>
-        <p:nvSpPr>
-          <p:cNvPr id="8" name="TextBox 7"/>
-          <p:cNvSpPr txBox="1"/>
-          <p:nvPr/>
-        </p:nvSpPr>
-        <p:spPr>
-          <a:xfrm>
-            <a:off x="548640" y="3131820"/>
-            <a:ext cx="1734769" cy="731520"/>
+              <a:t>!</a:t>
+            </a:r>
+          </a:p>
+        </p:txBody>
+      </p:sp>
+      <p:sp>
+        <p:nvSpPr>
+          <p:cNvPr id="9" name="TextBox 8"/>
+          <p:cNvSpPr txBox="1"/>
+          <p:nvPr/>
+        </p:nvSpPr>
+        <p:spPr>
+          <a:xfrm>
+            <a:off x="8046720" y="2606040"/>
+            <a:ext cx="3291840" cy="365760"/>
           </a:xfrm>
           <a:prstGeom prst="rect">
             <a:avLst/>
@@ -5754,61 +8273,17 @@
           <a:bodyPr wrap="square" anchor="t" lIns="0" rIns="0" tIns="0" bIns="0"/>
           <a:lstStyle/>
           <a:p>
-            <a:pPr algn="ctr"/>
-            <a:r>
-              <a:rPr sz="1700" b="1" i="0">
-                <a:solidFill>
-                  <a:srgbClr val="03306E"/>
-                </a:solidFill>
-                <a:latin typeface="Calibri"/>
-              </a:rPr>
-              <a:t>Pre-task</a:t>
-            </a:r>
-          </a:p>
-        </p:txBody>
-      </p:sp>
-      <p:sp>
-        <p:nvSpPr>
-          <p:cNvPr id="9" name="Rounded Rectangle 8"/>
-          <p:cNvSpPr/>
-          <p:nvPr/>
-        </p:nvSpPr>
-        <p:spPr>
-          <a:xfrm>
-            <a:off x="548640" y="3909060"/>
-            <a:ext cx="1734769" cy="1508760"/>
-          </a:xfrm>
-          <a:prstGeom prst="roundRect">
-            <a:avLst>
-              <a:gd name="adj" fmla="val 6000"/>
-            </a:avLst>
-          </a:prstGeom>
-          <a:solidFill>
-            <a:srgbClr val="EAF3FF"/>
-          </a:solidFill>
-          <a:ln>
-            <a:noFill/>
-          </a:ln>
-          <a:effectLst/>
-        </p:spPr>
-        <p:style>
-          <a:lnRef idx="1">
-            <a:schemeClr val="accent1"/>
-          </a:lnRef>
-          <a:fillRef idx="3">
-            <a:schemeClr val="accent1"/>
-          </a:fillRef>
-          <a:effectRef idx="2">
-            <a:schemeClr val="accent1"/>
-          </a:effectRef>
-          <a:fontRef idx="minor">
-            <a:schemeClr val="lt1"/>
-          </a:fontRef>
-        </p:style>
-        <p:txBody>
-          <a:bodyPr rtlCol="0" anchor="ctr"/>
-          <a:lstStyle/>
-          <a:p/>
+            <a:pPr algn="l"/>
+            <a:r>
+              <a:rPr sz="1300" b="1" i="0">
+                <a:solidFill>
+                  <a:srgbClr val="A9C8F0"/>
+                </a:solidFill>
+                <a:latin typeface="Calibri"/>
+              </a:rPr>
+              <a:t>KEY IDEA</a:t>
+            </a:r>
+          </a:p>
         </p:txBody>
       </p:sp>
       <p:sp>
@@ -5819,8 +8294,8 @@
         </p:nvSpPr>
         <p:spPr>
           <a:xfrm>
-            <a:off x="685800" y="4046220"/>
-            <a:ext cx="1460449" cy="1234439"/>
+            <a:off x="8046720" y="3017520"/>
+            <a:ext cx="3291840" cy="2926080"/>
           </a:xfrm>
           <a:prstGeom prst="rect">
             <a:avLst/>
@@ -5833,828 +8308,13 @@
           <a:p>
             <a:pPr algn="l"/>
             <a:r>
-              <a:rPr sz="1800" b="0" i="0">
-                <a:solidFill>
-                  <a:srgbClr val="202122"/>
-                </a:solidFill>
-                <a:latin typeface="Calibri"/>
-              </a:rPr>
-              <a:t>Research the industry context. Not assessed.</a:t>
-            </a:r>
-          </a:p>
-        </p:txBody>
-      </p:sp>
-      <p:sp>
-        <p:nvSpPr>
-          <p:cNvPr id="11" name="Oval 10"/>
-          <p:cNvSpPr/>
-          <p:nvPr/>
-        </p:nvSpPr>
-        <p:spPr>
-          <a:xfrm>
-            <a:off x="2967913" y="2354580"/>
-            <a:ext cx="640080" cy="640080"/>
-          </a:xfrm>
-          <a:prstGeom prst="ellipse">
-            <a:avLst/>
-          </a:prstGeom>
-          <a:solidFill>
-            <a:srgbClr val="F2B705"/>
-          </a:solidFill>
-          <a:ln>
-            <a:noFill/>
-          </a:ln>
-          <a:effectLst/>
-        </p:spPr>
-        <p:style>
-          <a:lnRef idx="1">
-            <a:schemeClr val="accent1"/>
-          </a:lnRef>
-          <a:fillRef idx="3">
-            <a:schemeClr val="accent1"/>
-          </a:fillRef>
-          <a:effectRef idx="2">
-            <a:schemeClr val="accent1"/>
-          </a:effectRef>
-          <a:fontRef idx="minor">
-            <a:schemeClr val="lt1"/>
-          </a:fontRef>
-        </p:style>
-        <p:txBody>
-          <a:bodyPr rtlCol="0" anchor="ctr" lIns="0" rIns="0" tIns="0" bIns="0"/>
-          <a:lstStyle/>
-          <a:p>
-            <a:pPr algn="ctr"/>
-            <a:r>
-              <a:rPr sz="2000" b="1">
-                <a:solidFill>
-                  <a:srgbClr val="202122"/>
-                </a:solidFill>
-                <a:latin typeface="Calibri"/>
-              </a:rPr>
-              <a:t>2</a:t>
-            </a:r>
-          </a:p>
-        </p:txBody>
-      </p:sp>
-      <p:sp>
-        <p:nvSpPr>
-          <p:cNvPr id="12" name="TextBox 11"/>
-          <p:cNvSpPr txBox="1"/>
-          <p:nvPr/>
-        </p:nvSpPr>
-        <p:spPr>
-          <a:xfrm>
-            <a:off x="2420569" y="3131820"/>
-            <a:ext cx="1734769" cy="731520"/>
-          </a:xfrm>
-          <a:prstGeom prst="rect">
-            <a:avLst/>
-          </a:prstGeom>
-          <a:noFill/>
-        </p:spPr>
-        <p:txBody>
-          <a:bodyPr wrap="square" anchor="t" lIns="0" rIns="0" tIns="0" bIns="0"/>
-          <a:lstStyle/>
-          <a:p>
-            <a:pPr algn="ctr"/>
-            <a:r>
-              <a:rPr sz="1700" b="1" i="0">
-                <a:solidFill>
-                  <a:srgbClr val="03306E"/>
-                </a:solidFill>
-                <a:latin typeface="Calibri"/>
-              </a:rPr>
-              <a:t>Task 1</a:t>
-            </a:r>
-          </a:p>
-        </p:txBody>
-      </p:sp>
-      <p:sp>
-        <p:nvSpPr>
-          <p:cNvPr id="13" name="Rounded Rectangle 12"/>
-          <p:cNvSpPr/>
-          <p:nvPr/>
-        </p:nvSpPr>
-        <p:spPr>
-          <a:xfrm>
-            <a:off x="2420569" y="3909060"/>
-            <a:ext cx="1734769" cy="1508760"/>
-          </a:xfrm>
-          <a:prstGeom prst="roundRect">
-            <a:avLst>
-              <a:gd name="adj" fmla="val 6000"/>
-            </a:avLst>
-          </a:prstGeom>
-          <a:solidFill>
-            <a:srgbClr val="EAF3FF"/>
-          </a:solidFill>
-          <a:ln>
-            <a:noFill/>
-          </a:ln>
-          <a:effectLst/>
-        </p:spPr>
-        <p:style>
-          <a:lnRef idx="1">
-            <a:schemeClr val="accent1"/>
-          </a:lnRef>
-          <a:fillRef idx="3">
-            <a:schemeClr val="accent1"/>
-          </a:fillRef>
-          <a:effectRef idx="2">
-            <a:schemeClr val="accent1"/>
-          </a:effectRef>
-          <a:fontRef idx="minor">
-            <a:schemeClr val="lt1"/>
-          </a:fontRef>
-        </p:style>
-        <p:txBody>
-          <a:bodyPr rtlCol="0" anchor="ctr"/>
-          <a:lstStyle/>
-          <a:p/>
-        </p:txBody>
-      </p:sp>
-      <p:sp>
-        <p:nvSpPr>
-          <p:cNvPr id="14" name="TextBox 13"/>
-          <p:cNvSpPr txBox="1"/>
-          <p:nvPr/>
-        </p:nvSpPr>
-        <p:spPr>
-          <a:xfrm>
-            <a:off x="2557729" y="4046220"/>
-            <a:ext cx="1460449" cy="1234439"/>
-          </a:xfrm>
-          <a:prstGeom prst="rect">
-            <a:avLst/>
-          </a:prstGeom>
-          <a:noFill/>
-        </p:spPr>
-        <p:txBody>
-          <a:bodyPr wrap="square" anchor="t" lIns="0" rIns="0" tIns="0" bIns="0"/>
-          <a:lstStyle/>
-          <a:p>
-            <a:pPr algn="l"/>
-            <a:r>
-              <a:rPr sz="1800" b="0" i="0">
-                <a:solidFill>
-                  <a:srgbClr val="202122"/>
-                </a:solidFill>
-                <a:latin typeface="Calibri"/>
-              </a:rPr>
-              <a:t>Gantt chart, resource and cost plan, rationale.</a:t>
-            </a:r>
-          </a:p>
-        </p:txBody>
-      </p:sp>
-      <p:sp>
-        <p:nvSpPr>
-          <p:cNvPr id="15" name="Oval 14"/>
-          <p:cNvSpPr/>
-          <p:nvPr/>
-        </p:nvSpPr>
-        <p:spPr>
-          <a:xfrm>
-            <a:off x="4839843" y="2354580"/>
-            <a:ext cx="640080" cy="640080"/>
-          </a:xfrm>
-          <a:prstGeom prst="ellipse">
-            <a:avLst/>
-          </a:prstGeom>
-          <a:solidFill>
-            <a:srgbClr val="F2B705"/>
-          </a:solidFill>
-          <a:ln>
-            <a:noFill/>
-          </a:ln>
-          <a:effectLst/>
-        </p:spPr>
-        <p:style>
-          <a:lnRef idx="1">
-            <a:schemeClr val="accent1"/>
-          </a:lnRef>
-          <a:fillRef idx="3">
-            <a:schemeClr val="accent1"/>
-          </a:fillRef>
-          <a:effectRef idx="2">
-            <a:schemeClr val="accent1"/>
-          </a:effectRef>
-          <a:fontRef idx="minor">
-            <a:schemeClr val="lt1"/>
-          </a:fontRef>
-        </p:style>
-        <p:txBody>
-          <a:bodyPr rtlCol="0" anchor="ctr" lIns="0" rIns="0" tIns="0" bIns="0"/>
-          <a:lstStyle/>
-          <a:p>
-            <a:pPr algn="ctr"/>
-            <a:r>
-              <a:rPr sz="2000" b="1">
-                <a:solidFill>
-                  <a:srgbClr val="202122"/>
-                </a:solidFill>
-                <a:latin typeface="Calibri"/>
-              </a:rPr>
-              <a:t>3</a:t>
-            </a:r>
-          </a:p>
-        </p:txBody>
-      </p:sp>
-      <p:sp>
-        <p:nvSpPr>
-          <p:cNvPr id="16" name="TextBox 15"/>
-          <p:cNvSpPr txBox="1"/>
-          <p:nvPr/>
-        </p:nvSpPr>
-        <p:spPr>
-          <a:xfrm>
-            <a:off x="4292498" y="3131820"/>
-            <a:ext cx="1734769" cy="731520"/>
-          </a:xfrm>
-          <a:prstGeom prst="rect">
-            <a:avLst/>
-          </a:prstGeom>
-          <a:noFill/>
-        </p:spPr>
-        <p:txBody>
-          <a:bodyPr wrap="square" anchor="t" lIns="0" rIns="0" tIns="0" bIns="0"/>
-          <a:lstStyle/>
-          <a:p>
-            <a:pPr algn="ctr"/>
-            <a:r>
-              <a:rPr sz="1700" b="1" i="0">
-                <a:solidFill>
-                  <a:srgbClr val="03306E"/>
-                </a:solidFill>
-                <a:latin typeface="Calibri"/>
-              </a:rPr>
-              <a:t>Task 2</a:t>
-            </a:r>
-          </a:p>
-        </p:txBody>
-      </p:sp>
-      <p:sp>
-        <p:nvSpPr>
-          <p:cNvPr id="17" name="Rounded Rectangle 16"/>
-          <p:cNvSpPr/>
-          <p:nvPr/>
-        </p:nvSpPr>
-        <p:spPr>
-          <a:xfrm>
-            <a:off x="4292498" y="3909060"/>
-            <a:ext cx="1734769" cy="1508760"/>
-          </a:xfrm>
-          <a:prstGeom prst="roundRect">
-            <a:avLst>
-              <a:gd name="adj" fmla="val 6000"/>
-            </a:avLst>
-          </a:prstGeom>
-          <a:solidFill>
-            <a:srgbClr val="EAF3FF"/>
-          </a:solidFill>
-          <a:ln>
-            <a:noFill/>
-          </a:ln>
-          <a:effectLst/>
-        </p:spPr>
-        <p:style>
-          <a:lnRef idx="1">
-            <a:schemeClr val="accent1"/>
-          </a:lnRef>
-          <a:fillRef idx="3">
-            <a:schemeClr val="accent1"/>
-          </a:fillRef>
-          <a:effectRef idx="2">
-            <a:schemeClr val="accent1"/>
-          </a:effectRef>
-          <a:fontRef idx="minor">
-            <a:schemeClr val="lt1"/>
-          </a:fontRef>
-        </p:style>
-        <p:txBody>
-          <a:bodyPr rtlCol="0" anchor="ctr"/>
-          <a:lstStyle/>
-          <a:p/>
-        </p:txBody>
-      </p:sp>
-      <p:sp>
-        <p:nvSpPr>
-          <p:cNvPr id="18" name="TextBox 17"/>
-          <p:cNvSpPr txBox="1"/>
-          <p:nvPr/>
-        </p:nvSpPr>
-        <p:spPr>
-          <a:xfrm>
-            <a:off x="4429658" y="4046220"/>
-            <a:ext cx="1460449" cy="1234439"/>
-          </a:xfrm>
-          <a:prstGeom prst="rect">
-            <a:avLst/>
-          </a:prstGeom>
-          <a:noFill/>
-        </p:spPr>
-        <p:txBody>
-          <a:bodyPr wrap="square" anchor="t" lIns="0" rIns="0" tIns="0" bIns="0"/>
-          <a:lstStyle/>
-          <a:p>
-            <a:pPr algn="l"/>
-            <a:r>
-              <a:rPr sz="1800" b="0" i="0">
-                <a:solidFill>
-                  <a:srgbClr val="202122"/>
-                </a:solidFill>
-                <a:latin typeface="Calibri"/>
-              </a:rPr>
-              <a:t>Test and fix defects in existing code.</a:t>
-            </a:r>
-          </a:p>
-        </p:txBody>
-      </p:sp>
-      <p:sp>
-        <p:nvSpPr>
-          <p:cNvPr id="19" name="Oval 18"/>
-          <p:cNvSpPr/>
-          <p:nvPr/>
-        </p:nvSpPr>
-        <p:spPr>
-          <a:xfrm>
-            <a:off x="6711772" y="2354580"/>
-            <a:ext cx="640080" cy="640080"/>
-          </a:xfrm>
-          <a:prstGeom prst="ellipse">
-            <a:avLst/>
-          </a:prstGeom>
-          <a:solidFill>
-            <a:srgbClr val="F2B705"/>
-          </a:solidFill>
-          <a:ln>
-            <a:noFill/>
-          </a:ln>
-          <a:effectLst/>
-        </p:spPr>
-        <p:style>
-          <a:lnRef idx="1">
-            <a:schemeClr val="accent1"/>
-          </a:lnRef>
-          <a:fillRef idx="3">
-            <a:schemeClr val="accent1"/>
-          </a:fillRef>
-          <a:effectRef idx="2">
-            <a:schemeClr val="accent1"/>
-          </a:effectRef>
-          <a:fontRef idx="minor">
-            <a:schemeClr val="lt1"/>
-          </a:fontRef>
-        </p:style>
-        <p:txBody>
-          <a:bodyPr rtlCol="0" anchor="ctr" lIns="0" rIns="0" tIns="0" bIns="0"/>
-          <a:lstStyle/>
-          <a:p>
-            <a:pPr algn="ctr"/>
-            <a:r>
-              <a:rPr sz="2000" b="1">
-                <a:solidFill>
-                  <a:srgbClr val="202122"/>
-                </a:solidFill>
-                <a:latin typeface="Calibri"/>
-              </a:rPr>
-              <a:t>4</a:t>
-            </a:r>
-          </a:p>
-        </p:txBody>
-      </p:sp>
-      <p:sp>
-        <p:nvSpPr>
-          <p:cNvPr id="20" name="TextBox 19"/>
-          <p:cNvSpPr txBox="1"/>
-          <p:nvPr/>
-        </p:nvSpPr>
-        <p:spPr>
-          <a:xfrm>
-            <a:off x="6164427" y="3131820"/>
-            <a:ext cx="1734769" cy="731520"/>
-          </a:xfrm>
-          <a:prstGeom prst="rect">
-            <a:avLst/>
-          </a:prstGeom>
-          <a:noFill/>
-        </p:spPr>
-        <p:txBody>
-          <a:bodyPr wrap="square" anchor="t" lIns="0" rIns="0" tIns="0" bIns="0"/>
-          <a:lstStyle/>
-          <a:p>
-            <a:pPr algn="ctr"/>
-            <a:r>
-              <a:rPr sz="1700" b="1" i="0">
-                <a:solidFill>
-                  <a:srgbClr val="03306E"/>
-                </a:solidFill>
-                <a:latin typeface="Calibri"/>
-              </a:rPr>
-              <a:t>Task 3</a:t>
-            </a:r>
-          </a:p>
-        </p:txBody>
-      </p:sp>
-      <p:sp>
-        <p:nvSpPr>
-          <p:cNvPr id="21" name="Rounded Rectangle 20"/>
-          <p:cNvSpPr/>
-          <p:nvPr/>
-        </p:nvSpPr>
-        <p:spPr>
-          <a:xfrm>
-            <a:off x="6164427" y="3909060"/>
-            <a:ext cx="1734769" cy="1508760"/>
-          </a:xfrm>
-          <a:prstGeom prst="roundRect">
-            <a:avLst>
-              <a:gd name="adj" fmla="val 6000"/>
-            </a:avLst>
-          </a:prstGeom>
-          <a:solidFill>
-            <a:srgbClr val="EAF3FF"/>
-          </a:solidFill>
-          <a:ln>
-            <a:noFill/>
-          </a:ln>
-          <a:effectLst/>
-        </p:spPr>
-        <p:style>
-          <a:lnRef idx="1">
-            <a:schemeClr val="accent1"/>
-          </a:lnRef>
-          <a:fillRef idx="3">
-            <a:schemeClr val="accent1"/>
-          </a:fillRef>
-          <a:effectRef idx="2">
-            <a:schemeClr val="accent1"/>
-          </a:effectRef>
-          <a:fontRef idx="minor">
-            <a:schemeClr val="lt1"/>
-          </a:fontRef>
-        </p:style>
-        <p:txBody>
-          <a:bodyPr rtlCol="0" anchor="ctr"/>
-          <a:lstStyle/>
-          <a:p/>
-        </p:txBody>
-      </p:sp>
-      <p:sp>
-        <p:nvSpPr>
-          <p:cNvPr id="22" name="TextBox 21"/>
-          <p:cNvSpPr txBox="1"/>
-          <p:nvPr/>
-        </p:nvSpPr>
-        <p:spPr>
-          <a:xfrm>
-            <a:off x="6301587" y="4046220"/>
-            <a:ext cx="1460449" cy="1234439"/>
-          </a:xfrm>
-          <a:prstGeom prst="rect">
-            <a:avLst/>
-          </a:prstGeom>
-          <a:noFill/>
-        </p:spPr>
-        <p:txBody>
-          <a:bodyPr wrap="square" anchor="t" lIns="0" rIns="0" tIns="0" bIns="0"/>
-          <a:lstStyle/>
-          <a:p>
-            <a:pPr algn="l"/>
-            <a:r>
-              <a:rPr sz="1800" b="0" i="0">
-                <a:solidFill>
-                  <a:srgbClr val="202122"/>
-                </a:solidFill>
-                <a:latin typeface="Calibri"/>
-              </a:rPr>
-              <a:t>Decompose and design a solution.</a:t>
-            </a:r>
-          </a:p>
-        </p:txBody>
-      </p:sp>
-      <p:sp>
-        <p:nvSpPr>
-          <p:cNvPr id="23" name="Oval 22"/>
-          <p:cNvSpPr/>
-          <p:nvPr/>
-        </p:nvSpPr>
-        <p:spPr>
-          <a:xfrm>
-            <a:off x="8583701" y="2354580"/>
-            <a:ext cx="640080" cy="640080"/>
-          </a:xfrm>
-          <a:prstGeom prst="ellipse">
-            <a:avLst/>
-          </a:prstGeom>
-          <a:solidFill>
-            <a:srgbClr val="F2B705"/>
-          </a:solidFill>
-          <a:ln>
-            <a:noFill/>
-          </a:ln>
-          <a:effectLst/>
-        </p:spPr>
-        <p:style>
-          <a:lnRef idx="1">
-            <a:schemeClr val="accent1"/>
-          </a:lnRef>
-          <a:fillRef idx="3">
-            <a:schemeClr val="accent1"/>
-          </a:fillRef>
-          <a:effectRef idx="2">
-            <a:schemeClr val="accent1"/>
-          </a:effectRef>
-          <a:fontRef idx="minor">
-            <a:schemeClr val="lt1"/>
-          </a:fontRef>
-        </p:style>
-        <p:txBody>
-          <a:bodyPr rtlCol="0" anchor="ctr" lIns="0" rIns="0" tIns="0" bIns="0"/>
-          <a:lstStyle/>
-          <a:p>
-            <a:pPr algn="ctr"/>
-            <a:r>
-              <a:rPr sz="2000" b="1">
-                <a:solidFill>
-                  <a:srgbClr val="202122"/>
-                </a:solidFill>
-                <a:latin typeface="Calibri"/>
-              </a:rPr>
-              <a:t>5</a:t>
-            </a:r>
-          </a:p>
-        </p:txBody>
-      </p:sp>
-      <p:sp>
-        <p:nvSpPr>
-          <p:cNvPr id="24" name="TextBox 23"/>
-          <p:cNvSpPr txBox="1"/>
-          <p:nvPr/>
-        </p:nvSpPr>
-        <p:spPr>
-          <a:xfrm>
-            <a:off x="8036356" y="3131820"/>
-            <a:ext cx="1734769" cy="731520"/>
-          </a:xfrm>
-          <a:prstGeom prst="rect">
-            <a:avLst/>
-          </a:prstGeom>
-          <a:noFill/>
-        </p:spPr>
-        <p:txBody>
-          <a:bodyPr wrap="square" anchor="t" lIns="0" rIns="0" tIns="0" bIns="0"/>
-          <a:lstStyle/>
-          <a:p>
-            <a:pPr algn="ctr"/>
-            <a:r>
-              <a:rPr sz="1700" b="1" i="0">
-                <a:solidFill>
-                  <a:srgbClr val="03306E"/>
-                </a:solidFill>
-                <a:latin typeface="Calibri"/>
-              </a:rPr>
-              <a:t>Task 4a</a:t>
-            </a:r>
-          </a:p>
-        </p:txBody>
-      </p:sp>
-      <p:sp>
-        <p:nvSpPr>
-          <p:cNvPr id="25" name="Rounded Rectangle 24"/>
-          <p:cNvSpPr/>
-          <p:nvPr/>
-        </p:nvSpPr>
-        <p:spPr>
-          <a:xfrm>
-            <a:off x="8036356" y="3909060"/>
-            <a:ext cx="1734769" cy="1508760"/>
-          </a:xfrm>
-          <a:prstGeom prst="roundRect">
-            <a:avLst>
-              <a:gd name="adj" fmla="val 6000"/>
-            </a:avLst>
-          </a:prstGeom>
-          <a:solidFill>
-            <a:srgbClr val="EAF3FF"/>
-          </a:solidFill>
-          <a:ln>
-            <a:noFill/>
-          </a:ln>
-          <a:effectLst/>
-        </p:spPr>
-        <p:style>
-          <a:lnRef idx="1">
-            <a:schemeClr val="accent1"/>
-          </a:lnRef>
-          <a:fillRef idx="3">
-            <a:schemeClr val="accent1"/>
-          </a:fillRef>
-          <a:effectRef idx="2">
-            <a:schemeClr val="accent1"/>
-          </a:effectRef>
-          <a:fontRef idx="minor">
-            <a:schemeClr val="lt1"/>
-          </a:fontRef>
-        </p:style>
-        <p:txBody>
-          <a:bodyPr rtlCol="0" anchor="ctr"/>
-          <a:lstStyle/>
-          <a:p/>
-        </p:txBody>
-      </p:sp>
-      <p:sp>
-        <p:nvSpPr>
-          <p:cNvPr id="26" name="TextBox 25"/>
-          <p:cNvSpPr txBox="1"/>
-          <p:nvPr/>
-        </p:nvSpPr>
-        <p:spPr>
-          <a:xfrm>
-            <a:off x="8173516" y="4046220"/>
-            <a:ext cx="1460449" cy="1234439"/>
-          </a:xfrm>
-          <a:prstGeom prst="rect">
-            <a:avLst/>
-          </a:prstGeom>
-          <a:noFill/>
-        </p:spPr>
-        <p:txBody>
-          <a:bodyPr wrap="square" anchor="t" lIns="0" rIns="0" tIns="0" bIns="0"/>
-          <a:lstStyle/>
-          <a:p>
-            <a:pPr algn="l"/>
-            <a:r>
-              <a:rPr sz="1800" b="0" i="0">
-                <a:solidFill>
-                  <a:srgbClr val="202122"/>
-                </a:solidFill>
-                <a:latin typeface="Calibri"/>
-              </a:rPr>
-              <a:t>Develop the solution in Python.</a:t>
-            </a:r>
-          </a:p>
-        </p:txBody>
-      </p:sp>
-      <p:sp>
-        <p:nvSpPr>
-          <p:cNvPr id="27" name="Oval 26"/>
-          <p:cNvSpPr/>
-          <p:nvPr/>
-        </p:nvSpPr>
-        <p:spPr>
-          <a:xfrm>
-            <a:off x="10455630" y="2354580"/>
-            <a:ext cx="640080" cy="640080"/>
-          </a:xfrm>
-          <a:prstGeom prst="ellipse">
-            <a:avLst/>
-          </a:prstGeom>
-          <a:solidFill>
-            <a:srgbClr val="F2B705"/>
-          </a:solidFill>
-          <a:ln>
-            <a:noFill/>
-          </a:ln>
-          <a:effectLst/>
-        </p:spPr>
-        <p:style>
-          <a:lnRef idx="1">
-            <a:schemeClr val="accent1"/>
-          </a:lnRef>
-          <a:fillRef idx="3">
-            <a:schemeClr val="accent1"/>
-          </a:fillRef>
-          <a:effectRef idx="2">
-            <a:schemeClr val="accent1"/>
-          </a:effectRef>
-          <a:fontRef idx="minor">
-            <a:schemeClr val="lt1"/>
-          </a:fontRef>
-        </p:style>
-        <p:txBody>
-          <a:bodyPr rtlCol="0" anchor="ctr" lIns="0" rIns="0" tIns="0" bIns="0"/>
-          <a:lstStyle/>
-          <a:p>
-            <a:pPr algn="ctr"/>
-            <a:r>
-              <a:rPr sz="2000" b="1">
-                <a:solidFill>
-                  <a:srgbClr val="202122"/>
-                </a:solidFill>
-                <a:latin typeface="Calibri"/>
-              </a:rPr>
-              <a:t>6</a:t>
-            </a:r>
-          </a:p>
-        </p:txBody>
-      </p:sp>
-      <p:sp>
-        <p:nvSpPr>
-          <p:cNvPr id="28" name="TextBox 27"/>
-          <p:cNvSpPr txBox="1"/>
-          <p:nvPr/>
-        </p:nvSpPr>
-        <p:spPr>
-          <a:xfrm>
-            <a:off x="9908286" y="3131820"/>
-            <a:ext cx="1734769" cy="731520"/>
-          </a:xfrm>
-          <a:prstGeom prst="rect">
-            <a:avLst/>
-          </a:prstGeom>
-          <a:noFill/>
-        </p:spPr>
-        <p:txBody>
-          <a:bodyPr wrap="square" anchor="t" lIns="0" rIns="0" tIns="0" bIns="0"/>
-          <a:lstStyle/>
-          <a:p>
-            <a:pPr algn="ctr"/>
-            <a:r>
-              <a:rPr sz="1700" b="1" i="0">
-                <a:solidFill>
-                  <a:srgbClr val="03306E"/>
-                </a:solidFill>
-                <a:latin typeface="Calibri"/>
-              </a:rPr>
-              <a:t>Task 4b</a:t>
-            </a:r>
-          </a:p>
-        </p:txBody>
-      </p:sp>
-      <p:sp>
-        <p:nvSpPr>
-          <p:cNvPr id="29" name="Rounded Rectangle 28"/>
-          <p:cNvSpPr/>
-          <p:nvPr/>
-        </p:nvSpPr>
-        <p:spPr>
-          <a:xfrm>
-            <a:off x="9908286" y="3909060"/>
-            <a:ext cx="1734769" cy="1508760"/>
-          </a:xfrm>
-          <a:prstGeom prst="roundRect">
-            <a:avLst>
-              <a:gd name="adj" fmla="val 6000"/>
-            </a:avLst>
-          </a:prstGeom>
-          <a:solidFill>
-            <a:srgbClr val="EAF3FF"/>
-          </a:solidFill>
-          <a:ln>
-            <a:noFill/>
-          </a:ln>
-          <a:effectLst/>
-        </p:spPr>
-        <p:style>
-          <a:lnRef idx="1">
-            <a:schemeClr val="accent1"/>
-          </a:lnRef>
-          <a:fillRef idx="3">
-            <a:schemeClr val="accent1"/>
-          </a:fillRef>
-          <a:effectRef idx="2">
-            <a:schemeClr val="accent1"/>
-          </a:effectRef>
-          <a:fontRef idx="minor">
-            <a:schemeClr val="lt1"/>
-          </a:fontRef>
-        </p:style>
-        <p:txBody>
-          <a:bodyPr rtlCol="0" anchor="ctr"/>
-          <a:lstStyle/>
-          <a:p/>
-        </p:txBody>
-      </p:sp>
-      <p:sp>
-        <p:nvSpPr>
-          <p:cNvPr id="30" name="TextBox 29"/>
-          <p:cNvSpPr txBox="1"/>
-          <p:nvPr/>
-        </p:nvSpPr>
-        <p:spPr>
-          <a:xfrm>
-            <a:off x="10045446" y="4046220"/>
-            <a:ext cx="1460449" cy="1234439"/>
-          </a:xfrm>
-          <a:prstGeom prst="rect">
-            <a:avLst/>
-          </a:prstGeom>
-          <a:noFill/>
-        </p:spPr>
-        <p:txBody>
-          <a:bodyPr wrap="square" anchor="t" lIns="0" rIns="0" tIns="0" bIns="0"/>
-          <a:lstStyle/>
-          <a:p>
-            <a:pPr algn="l"/>
-            <a:r>
-              <a:rPr sz="1800" b="0" i="0">
-                <a:solidFill>
-                  <a:srgbClr val="202122"/>
-                </a:solidFill>
-                <a:latin typeface="Calibri"/>
-              </a:rPr>
-              <a:t>Reflective evaluation.</a:t>
+              <a:rPr sz="2200" b="0" i="0">
+                <a:solidFill>
+                  <a:srgbClr val="FFFFFF"/>
+                </a:solidFill>
+                <a:latin typeface="Cambria"/>
+              </a:rPr>
+              <a:t>The order and detail of tasks can change each series, but the number and focus of tasks stay the same.</a:t>
             </a:r>
           </a:p>
         </p:txBody>
@@ -6746,7 +8406,7 @@
                 </a:solidFill>
                 <a:latin typeface="Cambria"/>
               </a:rPr>
-              <a:t>What earns marks</a:t>
+              <a:t>Quick check: What is the ESP?</a:t>
             </a:r>
           </a:p>
         </p:txBody>
@@ -6819,58 +8479,14 @@
       </p:sp>
       <p:sp>
         <p:nvSpPr>
-          <p:cNvPr id="6" name="Rounded Rectangle 5"/>
+          <p:cNvPr id="6" name="Oval 5"/>
           <p:cNvSpPr/>
           <p:nvPr/>
         </p:nvSpPr>
         <p:spPr>
           <a:xfrm>
-            <a:off x="548640" y="1600200"/>
-            <a:ext cx="5410047" cy="2148840"/>
-          </a:xfrm>
-          <a:prstGeom prst="roundRect">
-            <a:avLst>
-              <a:gd name="adj" fmla="val 6000"/>
-            </a:avLst>
-          </a:prstGeom>
-          <a:solidFill>
-            <a:srgbClr val="EAF3FF"/>
-          </a:solidFill>
-          <a:ln>
-            <a:noFill/>
-          </a:ln>
-          <a:effectLst/>
-        </p:spPr>
-        <p:style>
-          <a:lnRef idx="1">
-            <a:schemeClr val="accent1"/>
-          </a:lnRef>
-          <a:fillRef idx="3">
-            <a:schemeClr val="accent1"/>
-          </a:fillRef>
-          <a:effectRef idx="2">
-            <a:schemeClr val="accent1"/>
-          </a:effectRef>
-          <a:fontRef idx="minor">
-            <a:schemeClr val="lt1"/>
-          </a:fontRef>
-        </p:style>
-        <p:txBody>
-          <a:bodyPr rtlCol="0" anchor="ctr"/>
-          <a:lstStyle/>
-          <a:p/>
-        </p:txBody>
-      </p:sp>
-      <p:sp>
-        <p:nvSpPr>
-          <p:cNvPr id="7" name="Oval 6"/>
-          <p:cNvSpPr/>
-          <p:nvPr/>
-        </p:nvSpPr>
-        <p:spPr>
-          <a:xfrm>
-            <a:off x="777240" y="1828800"/>
-            <a:ext cx="457200" cy="457200"/>
+            <a:off x="548640" y="1691640"/>
+            <a:ext cx="502920" cy="502920"/>
           </a:xfrm>
           <a:prstGeom prst="ellipse">
             <a:avLst/>
@@ -6903,7 +8519,7 @@
           <a:p>
             <a:pPr algn="ctr"/>
             <a:r>
-              <a:rPr sz="1500" b="1">
+              <a:rPr sz="1600" b="1">
                 <a:solidFill>
                   <a:srgbClr val="202122"/>
                 </a:solidFill>
@@ -6916,124 +8532,47 @@
       </p:sp>
       <p:sp>
         <p:nvSpPr>
-          <p:cNvPr id="8" name="TextBox 7"/>
-          <p:cNvSpPr txBox="1"/>
-          <p:nvPr/>
-        </p:nvSpPr>
-        <p:spPr>
-          <a:xfrm>
-            <a:off x="1371600" y="1801368"/>
-            <a:ext cx="4404207" cy="512064"/>
-          </a:xfrm>
-          <a:prstGeom prst="rect">
-            <a:avLst/>
-          </a:prstGeom>
-          <a:noFill/>
-        </p:spPr>
-        <p:txBody>
-          <a:bodyPr wrap="square" anchor="ctr" lIns="0" rIns="0" tIns="0" bIns="0"/>
+          <p:cNvPr id="7" name="TextBox 6"/>
+          <p:cNvSpPr txBox="1"/>
+          <p:nvPr/>
+        </p:nvSpPr>
+        <p:spPr>
+          <a:xfrm>
+            <a:off x="1371600" y="1645920"/>
+            <a:ext cx="10271455" cy="1188720"/>
+          </a:xfrm>
+          <a:prstGeom prst="rect">
+            <a:avLst/>
+          </a:prstGeom>
+          <a:noFill/>
+        </p:spPr>
+        <p:txBody>
+          <a:bodyPr wrap="square" anchor="t" lIns="0" rIns="0" tIns="0" bIns="0"/>
           <a:lstStyle/>
           <a:p>
             <a:pPr algn="l"/>
             <a:r>
-              <a:rPr sz="1900" b="1" i="0">
-                <a:solidFill>
-                  <a:srgbClr val="03306E"/>
-                </a:solidFill>
-                <a:latin typeface="Calibri"/>
-              </a:rPr>
-              <a:t>Task 2 testing</a:t>
-            </a:r>
-          </a:p>
-        </p:txBody>
-      </p:sp>
-      <p:sp>
-        <p:nvSpPr>
-          <p:cNvPr id="9" name="TextBox 8"/>
-          <p:cNvSpPr txBox="1"/>
-          <p:nvPr/>
-        </p:nvSpPr>
-        <p:spPr>
-          <a:xfrm>
-            <a:off x="777240" y="2468880"/>
-            <a:ext cx="4952847" cy="1143000"/>
-          </a:xfrm>
-          <a:prstGeom prst="rect">
-            <a:avLst/>
-          </a:prstGeom>
-          <a:noFill/>
-        </p:spPr>
-        <p:txBody>
-          <a:bodyPr wrap="square" anchor="t" lIns="0" rIns="0" tIns="0" bIns="0"/>
-          <a:lstStyle/>
-          <a:p>
-            <a:pPr algn="l"/>
-            <a:r>
-              <a:rPr sz="2000" b="0" i="0">
+              <a:rPr sz="2400" b="0" i="0">
                 <a:solidFill>
                   <a:srgbClr val="202122"/>
                 </a:solidFill>
                 <a:latin typeface="Calibri"/>
               </a:rPr>
-              <a:t>Tests, purpose, valid, valid extreme, invalid, invalid extreme and erroneous data, expected and actual results.</a:t>
-            </a:r>
-          </a:p>
-        </p:txBody>
-      </p:sp>
-      <p:sp>
-        <p:nvSpPr>
-          <p:cNvPr id="10" name="Rounded Rectangle 9"/>
+              <a:t>What percentage of the core assessments is the ESP?</a:t>
+            </a:r>
+          </a:p>
+        </p:txBody>
+      </p:sp>
+      <p:sp>
+        <p:nvSpPr>
+          <p:cNvPr id="8" name="Oval 7"/>
           <p:cNvSpPr/>
           <p:nvPr/>
         </p:nvSpPr>
         <p:spPr>
           <a:xfrm>
-            <a:off x="6233007" y="1600200"/>
-            <a:ext cx="5410047" cy="2148840"/>
-          </a:xfrm>
-          <a:prstGeom prst="roundRect">
-            <a:avLst>
-              <a:gd name="adj" fmla="val 6000"/>
-            </a:avLst>
-          </a:prstGeom>
-          <a:solidFill>
-            <a:srgbClr val="EAF3FF"/>
-          </a:solidFill>
-          <a:ln>
-            <a:noFill/>
-          </a:ln>
-          <a:effectLst/>
-        </p:spPr>
-        <p:style>
-          <a:lnRef idx="1">
-            <a:schemeClr val="accent1"/>
-          </a:lnRef>
-          <a:fillRef idx="3">
-            <a:schemeClr val="accent1"/>
-          </a:fillRef>
-          <a:effectRef idx="2">
-            <a:schemeClr val="accent1"/>
-          </a:effectRef>
-          <a:fontRef idx="minor">
-            <a:schemeClr val="lt1"/>
-          </a:fontRef>
-        </p:style>
-        <p:txBody>
-          <a:bodyPr rtlCol="0" anchor="ctr"/>
-          <a:lstStyle/>
-          <a:p/>
-        </p:txBody>
-      </p:sp>
-      <p:sp>
-        <p:nvSpPr>
-          <p:cNvPr id="11" name="Oval 10"/>
-          <p:cNvSpPr/>
-          <p:nvPr/>
-        </p:nvSpPr>
-        <p:spPr>
-          <a:xfrm>
-            <a:off x="6461607" y="1828800"/>
-            <a:ext cx="457200" cy="457200"/>
+            <a:off x="548640" y="3108960"/>
+            <a:ext cx="502920" cy="502920"/>
           </a:xfrm>
           <a:prstGeom prst="ellipse">
             <a:avLst/>
@@ -7066,7 +8605,7 @@
           <a:p>
             <a:pPr algn="ctr"/>
             <a:r>
-              <a:rPr sz="1500" b="1">
+              <a:rPr sz="1600" b="1">
                 <a:solidFill>
                   <a:srgbClr val="202122"/>
                 </a:solidFill>
@@ -7079,124 +8618,47 @@
       </p:sp>
       <p:sp>
         <p:nvSpPr>
-          <p:cNvPr id="12" name="TextBox 11"/>
-          <p:cNvSpPr txBox="1"/>
-          <p:nvPr/>
-        </p:nvSpPr>
-        <p:spPr>
-          <a:xfrm>
-            <a:off x="7055967" y="1801368"/>
-            <a:ext cx="4404207" cy="512064"/>
-          </a:xfrm>
-          <a:prstGeom prst="rect">
-            <a:avLst/>
-          </a:prstGeom>
-          <a:noFill/>
-        </p:spPr>
-        <p:txBody>
-          <a:bodyPr wrap="square" anchor="ctr" lIns="0" rIns="0" tIns="0" bIns="0"/>
+          <p:cNvPr id="9" name="TextBox 8"/>
+          <p:cNvSpPr txBox="1"/>
+          <p:nvPr/>
+        </p:nvSpPr>
+        <p:spPr>
+          <a:xfrm>
+            <a:off x="1371600" y="3063240"/>
+            <a:ext cx="10271455" cy="1188720"/>
+          </a:xfrm>
+          <a:prstGeom prst="rect">
+            <a:avLst/>
+          </a:prstGeom>
+          <a:noFill/>
+        </p:spPr>
+        <p:txBody>
+          <a:bodyPr wrap="square" anchor="t" lIns="0" rIns="0" tIns="0" bIns="0"/>
           <a:lstStyle/>
           <a:p>
             <a:pPr algn="l"/>
             <a:r>
-              <a:rPr sz="1900" b="1" i="0">
-                <a:solidFill>
-                  <a:srgbClr val="03306E"/>
-                </a:solidFill>
-                <a:latin typeface="Calibri"/>
-              </a:rPr>
-              <a:t>Task 3 design</a:t>
-            </a:r>
-          </a:p>
-        </p:txBody>
-      </p:sp>
-      <p:sp>
-        <p:nvSpPr>
-          <p:cNvPr id="13" name="TextBox 12"/>
-          <p:cNvSpPr txBox="1"/>
-          <p:nvPr/>
-        </p:nvSpPr>
-        <p:spPr>
-          <a:xfrm>
-            <a:off x="6461607" y="2468880"/>
-            <a:ext cx="4952847" cy="1143000"/>
-          </a:xfrm>
-          <a:prstGeom prst="rect">
-            <a:avLst/>
-          </a:prstGeom>
-          <a:noFill/>
-        </p:spPr>
-        <p:txBody>
-          <a:bodyPr wrap="square" anchor="t" lIns="0" rIns="0" tIns="0" bIns="0"/>
-          <a:lstStyle/>
-          <a:p>
-            <a:pPr algn="l"/>
-            <a:r>
-              <a:rPr sz="2000" b="0" i="0">
+              <a:rPr sz="2400" b="0" i="0">
                 <a:solidFill>
                   <a:srgbClr val="202122"/>
                 </a:solidFill>
                 <a:latin typeface="Calibri"/>
               </a:rPr>
-              <a:t>Good decomposition, clear algorithms, correct conventions, a design a third party could build.</a:t>
-            </a:r>
-          </a:p>
-        </p:txBody>
-      </p:sp>
-      <p:sp>
-        <p:nvSpPr>
-          <p:cNvPr id="14" name="Rounded Rectangle 13"/>
+              <a:t>Can you use the internet during the ESP?</a:t>
+            </a:r>
+          </a:p>
+        </p:txBody>
+      </p:sp>
+      <p:sp>
+        <p:nvSpPr>
+          <p:cNvPr id="10" name="Oval 9"/>
           <p:cNvSpPr/>
           <p:nvPr/>
         </p:nvSpPr>
         <p:spPr>
           <a:xfrm>
-            <a:off x="548640" y="4023360"/>
-            <a:ext cx="5410047" cy="2148840"/>
-          </a:xfrm>
-          <a:prstGeom prst="roundRect">
-            <a:avLst>
-              <a:gd name="adj" fmla="val 6000"/>
-            </a:avLst>
-          </a:prstGeom>
-          <a:solidFill>
-            <a:srgbClr val="EAF3FF"/>
-          </a:solidFill>
-          <a:ln>
-            <a:noFill/>
-          </a:ln>
-          <a:effectLst/>
-        </p:spPr>
-        <p:style>
-          <a:lnRef idx="1">
-            <a:schemeClr val="accent1"/>
-          </a:lnRef>
-          <a:fillRef idx="3">
-            <a:schemeClr val="accent1"/>
-          </a:fillRef>
-          <a:effectRef idx="2">
-            <a:schemeClr val="accent1"/>
-          </a:effectRef>
-          <a:fontRef idx="minor">
-            <a:schemeClr val="lt1"/>
-          </a:fontRef>
-        </p:style>
-        <p:txBody>
-          <a:bodyPr rtlCol="0" anchor="ctr"/>
-          <a:lstStyle/>
-          <a:p/>
-        </p:txBody>
-      </p:sp>
-      <p:sp>
-        <p:nvSpPr>
-          <p:cNvPr id="15" name="Oval 14"/>
-          <p:cNvSpPr/>
-          <p:nvPr/>
-        </p:nvSpPr>
-        <p:spPr>
-          <a:xfrm>
-            <a:off x="777240" y="4251960"/>
-            <a:ext cx="457200" cy="457200"/>
+            <a:off x="548640" y="4526280"/>
+            <a:ext cx="502920" cy="502920"/>
           </a:xfrm>
           <a:prstGeom prst="ellipse">
             <a:avLst/>
@@ -7229,7 +8691,7 @@
           <a:p>
             <a:pPr algn="ctr"/>
             <a:r>
-              <a:rPr sz="1500" b="1">
+              <a:rPr sz="1600" b="1">
                 <a:solidFill>
                   <a:srgbClr val="202122"/>
                 </a:solidFill>
@@ -7242,47 +8704,47 @@
       </p:sp>
       <p:sp>
         <p:nvSpPr>
-          <p:cNvPr id="16" name="TextBox 15"/>
-          <p:cNvSpPr txBox="1"/>
-          <p:nvPr/>
-        </p:nvSpPr>
-        <p:spPr>
-          <a:xfrm>
-            <a:off x="1371600" y="4224528"/>
-            <a:ext cx="4404207" cy="512064"/>
-          </a:xfrm>
-          <a:prstGeom prst="rect">
-            <a:avLst/>
-          </a:prstGeom>
-          <a:noFill/>
-        </p:spPr>
-        <p:txBody>
-          <a:bodyPr wrap="square" anchor="ctr" lIns="0" rIns="0" tIns="0" bIns="0"/>
+          <p:cNvPr id="11" name="TextBox 10"/>
+          <p:cNvSpPr txBox="1"/>
+          <p:nvPr/>
+        </p:nvSpPr>
+        <p:spPr>
+          <a:xfrm>
+            <a:off x="1371600" y="4480560"/>
+            <a:ext cx="10271455" cy="1188720"/>
+          </a:xfrm>
+          <a:prstGeom prst="rect">
+            <a:avLst/>
+          </a:prstGeom>
+          <a:noFill/>
+        </p:spPr>
+        <p:txBody>
+          <a:bodyPr wrap="square" anchor="t" lIns="0" rIns="0" tIns="0" bIns="0"/>
           <a:lstStyle/>
           <a:p>
             <a:pPr algn="l"/>
             <a:r>
-              <a:rPr sz="1900" b="1" i="0">
-                <a:solidFill>
-                  <a:srgbClr val="03306E"/>
-                </a:solidFill>
-                <a:latin typeface="Calibri"/>
-              </a:rPr>
-              <a:t>Task 4a code</a:t>
-            </a:r>
-          </a:p>
-        </p:txBody>
-      </p:sp>
-      <p:sp>
-        <p:nvSpPr>
-          <p:cNvPr id="17" name="TextBox 16"/>
-          <p:cNvSpPr txBox="1"/>
-          <p:nvPr/>
-        </p:nvSpPr>
-        <p:spPr>
-          <a:xfrm>
-            <a:off x="777240" y="4892040"/>
-            <a:ext cx="4952847" cy="1143000"/>
+              <a:rPr sz="2400" b="0" i="0">
+                <a:solidFill>
+                  <a:srgbClr val="202122"/>
+                </a:solidFill>
+                <a:latin typeface="Calibri"/>
+              </a:rPr>
+              <a:t>Who marks the ESP?</a:t>
+            </a:r>
+          </a:p>
+        </p:txBody>
+      </p:sp>
+      <p:sp>
+        <p:nvSpPr>
+          <p:cNvPr id="12" name="TextBox 11"/>
+          <p:cNvSpPr txBox="1"/>
+          <p:nvPr/>
+        </p:nvSpPr>
+        <p:spPr>
+          <a:xfrm>
+            <a:off x="548640" y="5852160"/>
+            <a:ext cx="11094415" cy="365760"/>
           </a:xfrm>
           <a:prstGeom prst="rect">
             <a:avLst/>
@@ -7295,176 +8757,13 @@
           <a:p>
             <a:pPr algn="l"/>
             <a:r>
-              <a:rPr sz="2000" b="0" i="0">
-                <a:solidFill>
-                  <a:srgbClr val="202122"/>
-                </a:solidFill>
-                <a:latin typeface="Calibri"/>
-              </a:rPr>
-              <a:t>Functions, meaningful names, comments, local variables, constants, exception handling.</a:t>
-            </a:r>
-          </a:p>
-        </p:txBody>
-      </p:sp>
-      <p:sp>
-        <p:nvSpPr>
-          <p:cNvPr id="18" name="Rounded Rectangle 17"/>
-          <p:cNvSpPr/>
-          <p:nvPr/>
-        </p:nvSpPr>
-        <p:spPr>
-          <a:xfrm>
-            <a:off x="6233007" y="4023360"/>
-            <a:ext cx="5410047" cy="2148840"/>
-          </a:xfrm>
-          <a:prstGeom prst="roundRect">
-            <a:avLst>
-              <a:gd name="adj" fmla="val 6000"/>
-            </a:avLst>
-          </a:prstGeom>
-          <a:solidFill>
-            <a:srgbClr val="EAF3FF"/>
-          </a:solidFill>
-          <a:ln>
-            <a:noFill/>
-          </a:ln>
-          <a:effectLst/>
-        </p:spPr>
-        <p:style>
-          <a:lnRef idx="1">
-            <a:schemeClr val="accent1"/>
-          </a:lnRef>
-          <a:fillRef idx="3">
-            <a:schemeClr val="accent1"/>
-          </a:fillRef>
-          <a:effectRef idx="2">
-            <a:schemeClr val="accent1"/>
-          </a:effectRef>
-          <a:fontRef idx="minor">
-            <a:schemeClr val="lt1"/>
-          </a:fontRef>
-        </p:style>
-        <p:txBody>
-          <a:bodyPr rtlCol="0" anchor="ctr"/>
-          <a:lstStyle/>
-          <a:p/>
-        </p:txBody>
-      </p:sp>
-      <p:sp>
-        <p:nvSpPr>
-          <p:cNvPr id="19" name="Oval 18"/>
-          <p:cNvSpPr/>
-          <p:nvPr/>
-        </p:nvSpPr>
-        <p:spPr>
-          <a:xfrm>
-            <a:off x="6461607" y="4251960"/>
-            <a:ext cx="457200" cy="457200"/>
-          </a:xfrm>
-          <a:prstGeom prst="ellipse">
-            <a:avLst/>
-          </a:prstGeom>
-          <a:solidFill>
-            <a:srgbClr val="F2B705"/>
-          </a:solidFill>
-          <a:ln>
-            <a:noFill/>
-          </a:ln>
-          <a:effectLst/>
-        </p:spPr>
-        <p:style>
-          <a:lnRef idx="1">
-            <a:schemeClr val="accent1"/>
-          </a:lnRef>
-          <a:fillRef idx="3">
-            <a:schemeClr val="accent1"/>
-          </a:fillRef>
-          <a:effectRef idx="2">
-            <a:schemeClr val="accent1"/>
-          </a:effectRef>
-          <a:fontRef idx="minor">
-            <a:schemeClr val="lt1"/>
-          </a:fontRef>
-        </p:style>
-        <p:txBody>
-          <a:bodyPr rtlCol="0" anchor="ctr" lIns="0" rIns="0" tIns="0" bIns="0"/>
-          <a:lstStyle/>
-          <a:p>
-            <a:pPr algn="ctr"/>
-            <a:r>
-              <a:rPr sz="1500" b="1">
-                <a:solidFill>
-                  <a:srgbClr val="202122"/>
-                </a:solidFill>
-                <a:latin typeface="Calibri"/>
-              </a:rPr>
-              <a:t>4</a:t>
-            </a:r>
-          </a:p>
-        </p:txBody>
-      </p:sp>
-      <p:sp>
-        <p:nvSpPr>
-          <p:cNvPr id="20" name="TextBox 19"/>
-          <p:cNvSpPr txBox="1"/>
-          <p:nvPr/>
-        </p:nvSpPr>
-        <p:spPr>
-          <a:xfrm>
-            <a:off x="7055967" y="4224528"/>
-            <a:ext cx="4404207" cy="512064"/>
-          </a:xfrm>
-          <a:prstGeom prst="rect">
-            <a:avLst/>
-          </a:prstGeom>
-          <a:noFill/>
-        </p:spPr>
-        <p:txBody>
-          <a:bodyPr wrap="square" anchor="ctr" lIns="0" rIns="0" tIns="0" bIns="0"/>
-          <a:lstStyle/>
-          <a:p>
-            <a:pPr algn="l"/>
-            <a:r>
-              <a:rPr sz="1900" b="1" i="0">
-                <a:solidFill>
-                  <a:srgbClr val="03306E"/>
-                </a:solidFill>
-                <a:latin typeface="Calibri"/>
-              </a:rPr>
-              <a:t>User experience</a:t>
-            </a:r>
-          </a:p>
-        </p:txBody>
-      </p:sp>
-      <p:sp>
-        <p:nvSpPr>
-          <p:cNvPr id="21" name="TextBox 20"/>
-          <p:cNvSpPr txBox="1"/>
-          <p:nvPr/>
-        </p:nvSpPr>
-        <p:spPr>
-          <a:xfrm>
-            <a:off x="6461607" y="4892040"/>
-            <a:ext cx="4952847" cy="1143000"/>
-          </a:xfrm>
-          <a:prstGeom prst="rect">
-            <a:avLst/>
-          </a:prstGeom>
-          <a:noFill/>
-        </p:spPr>
-        <p:txBody>
-          <a:bodyPr wrap="square" anchor="t" lIns="0" rIns="0" tIns="0" bIns="0"/>
-          <a:lstStyle/>
-          <a:p>
-            <a:pPr algn="l"/>
-            <a:r>
-              <a:rPr sz="2000" b="0" i="0">
-                <a:solidFill>
-                  <a:srgbClr val="202122"/>
-                </a:solidFill>
-                <a:latin typeface="Calibri"/>
-              </a:rPr>
-              <a:t>Simple input, meaningful messages, data visualisation with Matplotlib.</a:t>
+              <a:rPr sz="1300" b="0" i="1">
+                <a:solidFill>
+                  <a:srgbClr val="54595D"/>
+                </a:solidFill>
+                <a:latin typeface="Calibri"/>
+              </a:rPr>
+              <a:t>Answer on mini whiteboards or in your book. Answers are in the speaker notes.</a:t>
             </a:r>
           </a:p>
         </p:txBody>
@@ -7556,7 +8855,7 @@
                 </a:solidFill>
                 <a:latin typeface="Cambria"/>
               </a:rPr>
-              <a:t>How to prepare</a:t>
+              <a:t>The tasks</a:t>
             </a:r>
           </a:p>
         </p:txBody>
@@ -7629,150 +8928,20 @@
       </p:sp>
       <p:sp>
         <p:nvSpPr>
-          <p:cNvPr id="6" name="TextBox 5"/>
-          <p:cNvSpPr txBox="1"/>
-          <p:nvPr/>
-        </p:nvSpPr>
-        <p:spPr>
-          <a:xfrm>
-            <a:off x="548640" y="1600200"/>
-            <a:ext cx="6675120" cy="4572000"/>
-          </a:xfrm>
-          <a:prstGeom prst="rect">
-            <a:avLst/>
-          </a:prstGeom>
-          <a:noFill/>
-        </p:spPr>
-        <p:txBody>
-          <a:bodyPr wrap="square" lIns="0" rIns="0" tIns="0" bIns="0">
-            <a:spAutoFit/>
-          </a:bodyPr>
-          <a:lstStyle/>
-          <a:p>
-            <a:pPr marL="274320" indent="-274320">
-              <a:spcAft>
-                <a:spcPts val="1080"/>
-              </a:spcAft>
-              <a:buClr>
-                <a:srgbClr val="0645AD"/>
-              </a:buClr>
-              <a:buFont typeface="Arial"/>
-              <a:buChar char="•"/>
-            </a:pPr>
-            <a:r>
-              <a:rPr sz="2400" b="0">
-                <a:solidFill>
-                  <a:srgbClr val="202122"/>
-                </a:solidFill>
-                <a:latin typeface="Calibri"/>
-              </a:rPr>
-              <a:t>Practise Gantt charts and cost plans against a deadline.</a:t>
-            </a:r>
-          </a:p>
-          <a:p>
-            <a:pPr marL="274320" indent="-274320">
-              <a:spcAft>
-                <a:spcPts val="1080"/>
-              </a:spcAft>
-              <a:buClr>
-                <a:srgbClr val="0645AD"/>
-              </a:buClr>
-              <a:buFont typeface="Arial"/>
-              <a:buChar char="•"/>
-            </a:pPr>
-            <a:r>
-              <a:rPr sz="2400" b="0">
-                <a:solidFill>
-                  <a:srgbClr val="202122"/>
-                </a:solidFill>
-                <a:latin typeface="Calibri"/>
-              </a:rPr>
-              <a:t>Practise finding and fixing bugs in code you did not write.</a:t>
-            </a:r>
-          </a:p>
-          <a:p>
-            <a:pPr marL="274320" indent="-274320">
-              <a:spcAft>
-                <a:spcPts val="1080"/>
-              </a:spcAft>
-              <a:buClr>
-                <a:srgbClr val="0645AD"/>
-              </a:buClr>
-              <a:buFont typeface="Arial"/>
-              <a:buChar char="•"/>
-            </a:pPr>
-            <a:r>
-              <a:rPr sz="2400" b="0">
-                <a:solidFill>
-                  <a:srgbClr val="202122"/>
-                </a:solidFill>
-                <a:latin typeface="Calibri"/>
-              </a:rPr>
-              <a:t>Get fluent with pandas and Matplotlib on CSV files.</a:t>
-            </a:r>
-          </a:p>
-          <a:p>
-            <a:pPr marL="274320" indent="-274320">
-              <a:spcAft>
-                <a:spcPts val="1080"/>
-              </a:spcAft>
-              <a:buClr>
-                <a:srgbClr val="0645AD"/>
-              </a:buClr>
-              <a:buFont typeface="Arial"/>
-              <a:buChar char="•"/>
-            </a:pPr>
-            <a:r>
-              <a:rPr sz="2400" b="0">
-                <a:solidFill>
-                  <a:srgbClr val="202122"/>
-                </a:solidFill>
-                <a:latin typeface="Calibri"/>
-              </a:rPr>
-              <a:t>Practise flowcharts with correct symbols.</a:t>
-            </a:r>
-          </a:p>
-          <a:p>
-            <a:pPr marL="274320" indent="-274320">
-              <a:spcAft>
-                <a:spcPts val="1080"/>
-              </a:spcAft>
-              <a:buClr>
-                <a:srgbClr val="0645AD"/>
-              </a:buClr>
-              <a:buFont typeface="Arial"/>
-              <a:buChar char="•"/>
-            </a:pPr>
-            <a:r>
-              <a:rPr sz="2400" b="0">
-                <a:solidFill>
-                  <a:srgbClr val="202122"/>
-                </a:solidFill>
-                <a:latin typeface="Calibri"/>
-              </a:rPr>
-              <a:t>Write reflections against success criteria.</a:t>
-            </a:r>
-          </a:p>
-        </p:txBody>
-      </p:sp>
-      <p:sp>
-        <p:nvSpPr>
-          <p:cNvPr id="7" name="Rounded Rectangle 6"/>
+          <p:cNvPr id="6" name="Rectangle 5"/>
           <p:cNvSpPr/>
           <p:nvPr/>
         </p:nvSpPr>
         <p:spPr>
           <a:xfrm>
-            <a:off x="7772400" y="1600200"/>
-            <a:ext cx="3867912" cy="4434840"/>
-          </a:xfrm>
-          <a:prstGeom prst="roundRect">
-            <a:avLst>
-              <a:gd name="adj" fmla="val 8000"/>
-            </a:avLst>
+            <a:off x="1416024" y="2656332"/>
+            <a:ext cx="9359646" cy="36576"/>
+          </a:xfrm>
+          <a:prstGeom prst="rect">
+            <a:avLst/>
           </a:prstGeom>
           <a:solidFill>
-            <a:srgbClr val="03306E"/>
+            <a:srgbClr val="A9C8F0"/>
           </a:solidFill>
           <a:ln>
             <a:noFill/>
@@ -7801,14 +8970,14 @@
       </p:sp>
       <p:sp>
         <p:nvSpPr>
-          <p:cNvPr id="8" name="Oval 7"/>
+          <p:cNvPr id="7" name="Oval 6"/>
           <p:cNvSpPr/>
           <p:nvPr/>
         </p:nvSpPr>
         <p:spPr>
           <a:xfrm>
-            <a:off x="8046720" y="1874519"/>
-            <a:ext cx="548640" cy="548640"/>
+            <a:off x="1095984" y="2354580"/>
+            <a:ext cx="640080" cy="640080"/>
           </a:xfrm>
           <a:prstGeom prst="ellipse">
             <a:avLst/>
@@ -7847,21 +9016,21 @@
                 </a:solidFill>
                 <a:latin typeface="Calibri"/>
               </a:rPr>
-              <a:t>!</a:t>
-            </a:r>
-          </a:p>
-        </p:txBody>
-      </p:sp>
-      <p:sp>
-        <p:nvSpPr>
-          <p:cNvPr id="9" name="TextBox 8"/>
-          <p:cNvSpPr txBox="1"/>
-          <p:nvPr/>
-        </p:nvSpPr>
-        <p:spPr>
-          <a:xfrm>
-            <a:off x="8046720" y="2606040"/>
-            <a:ext cx="3291840" cy="365760"/>
+              <a:t>1</a:t>
+            </a:r>
+          </a:p>
+        </p:txBody>
+      </p:sp>
+      <p:sp>
+        <p:nvSpPr>
+          <p:cNvPr id="8" name="TextBox 7"/>
+          <p:cNvSpPr txBox="1"/>
+          <p:nvPr/>
+        </p:nvSpPr>
+        <p:spPr>
+          <a:xfrm>
+            <a:off x="548640" y="3131820"/>
+            <a:ext cx="1734769" cy="731520"/>
           </a:xfrm>
           <a:prstGeom prst="rect">
             <a:avLst/>
@@ -7872,29 +9041,159 @@
           <a:bodyPr wrap="square" anchor="t" lIns="0" rIns="0" tIns="0" bIns="0"/>
           <a:lstStyle/>
           <a:p>
+            <a:pPr algn="ctr"/>
+            <a:r>
+              <a:rPr sz="1700" b="1" i="0">
+                <a:solidFill>
+                  <a:srgbClr val="03306E"/>
+                </a:solidFill>
+                <a:latin typeface="Calibri"/>
+              </a:rPr>
+              <a:t>Pre-task</a:t>
+            </a:r>
+          </a:p>
+        </p:txBody>
+      </p:sp>
+      <p:sp>
+        <p:nvSpPr>
+          <p:cNvPr id="9" name="Rounded Rectangle 8"/>
+          <p:cNvSpPr/>
+          <p:nvPr/>
+        </p:nvSpPr>
+        <p:spPr>
+          <a:xfrm>
+            <a:off x="548640" y="3909060"/>
+            <a:ext cx="1734769" cy="1508760"/>
+          </a:xfrm>
+          <a:prstGeom prst="roundRect">
+            <a:avLst>
+              <a:gd name="adj" fmla="val 6000"/>
+            </a:avLst>
+          </a:prstGeom>
+          <a:solidFill>
+            <a:srgbClr val="EAF3FF"/>
+          </a:solidFill>
+          <a:ln>
+            <a:noFill/>
+          </a:ln>
+          <a:effectLst/>
+        </p:spPr>
+        <p:style>
+          <a:lnRef idx="1">
+            <a:schemeClr val="accent1"/>
+          </a:lnRef>
+          <a:fillRef idx="3">
+            <a:schemeClr val="accent1"/>
+          </a:fillRef>
+          <a:effectRef idx="2">
+            <a:schemeClr val="accent1"/>
+          </a:effectRef>
+          <a:fontRef idx="minor">
+            <a:schemeClr val="lt1"/>
+          </a:fontRef>
+        </p:style>
+        <p:txBody>
+          <a:bodyPr rtlCol="0" anchor="ctr"/>
+          <a:lstStyle/>
+          <a:p/>
+        </p:txBody>
+      </p:sp>
+      <p:sp>
+        <p:nvSpPr>
+          <p:cNvPr id="10" name="TextBox 9"/>
+          <p:cNvSpPr txBox="1"/>
+          <p:nvPr/>
+        </p:nvSpPr>
+        <p:spPr>
+          <a:xfrm>
+            <a:off x="685800" y="4046220"/>
+            <a:ext cx="1460449" cy="1234439"/>
+          </a:xfrm>
+          <a:prstGeom prst="rect">
+            <a:avLst/>
+          </a:prstGeom>
+          <a:noFill/>
+        </p:spPr>
+        <p:txBody>
+          <a:bodyPr wrap="square" anchor="t" lIns="0" rIns="0" tIns="0" bIns="0"/>
+          <a:lstStyle/>
+          <a:p>
             <a:pPr algn="l"/>
             <a:r>
-              <a:rPr sz="1300" b="1" i="0">
-                <a:solidFill>
-                  <a:srgbClr val="A9C8F0"/>
-                </a:solidFill>
-                <a:latin typeface="Calibri"/>
-              </a:rPr>
-              <a:t>KEY IDEA</a:t>
-            </a:r>
-          </a:p>
-        </p:txBody>
-      </p:sp>
-      <p:sp>
-        <p:nvSpPr>
-          <p:cNvPr id="10" name="TextBox 9"/>
-          <p:cNvSpPr txBox="1"/>
-          <p:nvPr/>
-        </p:nvSpPr>
-        <p:spPr>
-          <a:xfrm>
-            <a:off x="8046720" y="3017520"/>
-            <a:ext cx="3291840" cy="2926080"/>
+              <a:rPr sz="1800" b="0" i="0">
+                <a:solidFill>
+                  <a:srgbClr val="202122"/>
+                </a:solidFill>
+                <a:latin typeface="Calibri"/>
+              </a:rPr>
+              <a:t>Research the industry context. Not assessed.</a:t>
+            </a:r>
+          </a:p>
+        </p:txBody>
+      </p:sp>
+      <p:sp>
+        <p:nvSpPr>
+          <p:cNvPr id="11" name="Oval 10"/>
+          <p:cNvSpPr/>
+          <p:nvPr/>
+        </p:nvSpPr>
+        <p:spPr>
+          <a:xfrm>
+            <a:off x="2967913" y="2354580"/>
+            <a:ext cx="640080" cy="640080"/>
+          </a:xfrm>
+          <a:prstGeom prst="ellipse">
+            <a:avLst/>
+          </a:prstGeom>
+          <a:solidFill>
+            <a:srgbClr val="F2B705"/>
+          </a:solidFill>
+          <a:ln>
+            <a:noFill/>
+          </a:ln>
+          <a:effectLst/>
+        </p:spPr>
+        <p:style>
+          <a:lnRef idx="1">
+            <a:schemeClr val="accent1"/>
+          </a:lnRef>
+          <a:fillRef idx="3">
+            <a:schemeClr val="accent1"/>
+          </a:fillRef>
+          <a:effectRef idx="2">
+            <a:schemeClr val="accent1"/>
+          </a:effectRef>
+          <a:fontRef idx="minor">
+            <a:schemeClr val="lt1"/>
+          </a:fontRef>
+        </p:style>
+        <p:txBody>
+          <a:bodyPr rtlCol="0" anchor="ctr" lIns="0" rIns="0" tIns="0" bIns="0"/>
+          <a:lstStyle/>
+          <a:p>
+            <a:pPr algn="ctr"/>
+            <a:r>
+              <a:rPr sz="2000" b="1">
+                <a:solidFill>
+                  <a:srgbClr val="202122"/>
+                </a:solidFill>
+                <a:latin typeface="Calibri"/>
+              </a:rPr>
+              <a:t>2</a:t>
+            </a:r>
+          </a:p>
+        </p:txBody>
+      </p:sp>
+      <p:sp>
+        <p:nvSpPr>
+          <p:cNvPr id="12" name="TextBox 11"/>
+          <p:cNvSpPr txBox="1"/>
+          <p:nvPr/>
+        </p:nvSpPr>
+        <p:spPr>
+          <a:xfrm>
+            <a:off x="2420569" y="3131820"/>
+            <a:ext cx="1734769" cy="731520"/>
           </a:xfrm>
           <a:prstGeom prst="rect">
             <a:avLst/>
@@ -7905,15 +9204,744 @@
           <a:bodyPr wrap="square" anchor="t" lIns="0" rIns="0" tIns="0" bIns="0"/>
           <a:lstStyle/>
           <a:p>
+            <a:pPr algn="ctr"/>
+            <a:r>
+              <a:rPr sz="1700" b="1" i="0">
+                <a:solidFill>
+                  <a:srgbClr val="03306E"/>
+                </a:solidFill>
+                <a:latin typeface="Calibri"/>
+              </a:rPr>
+              <a:t>Task 1</a:t>
+            </a:r>
+          </a:p>
+        </p:txBody>
+      </p:sp>
+      <p:sp>
+        <p:nvSpPr>
+          <p:cNvPr id="13" name="Rounded Rectangle 12"/>
+          <p:cNvSpPr/>
+          <p:nvPr/>
+        </p:nvSpPr>
+        <p:spPr>
+          <a:xfrm>
+            <a:off x="2420569" y="3909060"/>
+            <a:ext cx="1734769" cy="1508760"/>
+          </a:xfrm>
+          <a:prstGeom prst="roundRect">
+            <a:avLst>
+              <a:gd name="adj" fmla="val 6000"/>
+            </a:avLst>
+          </a:prstGeom>
+          <a:solidFill>
+            <a:srgbClr val="EAF3FF"/>
+          </a:solidFill>
+          <a:ln>
+            <a:noFill/>
+          </a:ln>
+          <a:effectLst/>
+        </p:spPr>
+        <p:style>
+          <a:lnRef idx="1">
+            <a:schemeClr val="accent1"/>
+          </a:lnRef>
+          <a:fillRef idx="3">
+            <a:schemeClr val="accent1"/>
+          </a:fillRef>
+          <a:effectRef idx="2">
+            <a:schemeClr val="accent1"/>
+          </a:effectRef>
+          <a:fontRef idx="minor">
+            <a:schemeClr val="lt1"/>
+          </a:fontRef>
+        </p:style>
+        <p:txBody>
+          <a:bodyPr rtlCol="0" anchor="ctr"/>
+          <a:lstStyle/>
+          <a:p/>
+        </p:txBody>
+      </p:sp>
+      <p:sp>
+        <p:nvSpPr>
+          <p:cNvPr id="14" name="TextBox 13"/>
+          <p:cNvSpPr txBox="1"/>
+          <p:nvPr/>
+        </p:nvSpPr>
+        <p:spPr>
+          <a:xfrm>
+            <a:off x="2557729" y="4046220"/>
+            <a:ext cx="1460449" cy="1234439"/>
+          </a:xfrm>
+          <a:prstGeom prst="rect">
+            <a:avLst/>
+          </a:prstGeom>
+          <a:noFill/>
+        </p:spPr>
+        <p:txBody>
+          <a:bodyPr wrap="square" anchor="t" lIns="0" rIns="0" tIns="0" bIns="0"/>
+          <a:lstStyle/>
+          <a:p>
             <a:pPr algn="l"/>
             <a:r>
-              <a:rPr sz="2200" b="0" i="0">
-                <a:solidFill>
-                  <a:srgbClr val="FFFFFF"/>
-                </a:solidFill>
-                <a:latin typeface="Cambria"/>
-              </a:rPr>
-              <a:t>With no internet, you need the Python reference in your head. Practise without looking things up.</a:t>
+              <a:rPr sz="1800" b="0" i="0">
+                <a:solidFill>
+                  <a:srgbClr val="202122"/>
+                </a:solidFill>
+                <a:latin typeface="Calibri"/>
+              </a:rPr>
+              <a:t>Gantt chart, resource and cost plan, rationale.</a:t>
+            </a:r>
+          </a:p>
+        </p:txBody>
+      </p:sp>
+      <p:sp>
+        <p:nvSpPr>
+          <p:cNvPr id="15" name="Oval 14"/>
+          <p:cNvSpPr/>
+          <p:nvPr/>
+        </p:nvSpPr>
+        <p:spPr>
+          <a:xfrm>
+            <a:off x="4839843" y="2354580"/>
+            <a:ext cx="640080" cy="640080"/>
+          </a:xfrm>
+          <a:prstGeom prst="ellipse">
+            <a:avLst/>
+          </a:prstGeom>
+          <a:solidFill>
+            <a:srgbClr val="F2B705"/>
+          </a:solidFill>
+          <a:ln>
+            <a:noFill/>
+          </a:ln>
+          <a:effectLst/>
+        </p:spPr>
+        <p:style>
+          <a:lnRef idx="1">
+            <a:schemeClr val="accent1"/>
+          </a:lnRef>
+          <a:fillRef idx="3">
+            <a:schemeClr val="accent1"/>
+          </a:fillRef>
+          <a:effectRef idx="2">
+            <a:schemeClr val="accent1"/>
+          </a:effectRef>
+          <a:fontRef idx="minor">
+            <a:schemeClr val="lt1"/>
+          </a:fontRef>
+        </p:style>
+        <p:txBody>
+          <a:bodyPr rtlCol="0" anchor="ctr" lIns="0" rIns="0" tIns="0" bIns="0"/>
+          <a:lstStyle/>
+          <a:p>
+            <a:pPr algn="ctr"/>
+            <a:r>
+              <a:rPr sz="2000" b="1">
+                <a:solidFill>
+                  <a:srgbClr val="202122"/>
+                </a:solidFill>
+                <a:latin typeface="Calibri"/>
+              </a:rPr>
+              <a:t>3</a:t>
+            </a:r>
+          </a:p>
+        </p:txBody>
+      </p:sp>
+      <p:sp>
+        <p:nvSpPr>
+          <p:cNvPr id="16" name="TextBox 15"/>
+          <p:cNvSpPr txBox="1"/>
+          <p:nvPr/>
+        </p:nvSpPr>
+        <p:spPr>
+          <a:xfrm>
+            <a:off x="4292498" y="3131820"/>
+            <a:ext cx="1734769" cy="731520"/>
+          </a:xfrm>
+          <a:prstGeom prst="rect">
+            <a:avLst/>
+          </a:prstGeom>
+          <a:noFill/>
+        </p:spPr>
+        <p:txBody>
+          <a:bodyPr wrap="square" anchor="t" lIns="0" rIns="0" tIns="0" bIns="0"/>
+          <a:lstStyle/>
+          <a:p>
+            <a:pPr algn="ctr"/>
+            <a:r>
+              <a:rPr sz="1700" b="1" i="0">
+                <a:solidFill>
+                  <a:srgbClr val="03306E"/>
+                </a:solidFill>
+                <a:latin typeface="Calibri"/>
+              </a:rPr>
+              <a:t>Task 2</a:t>
+            </a:r>
+          </a:p>
+        </p:txBody>
+      </p:sp>
+      <p:sp>
+        <p:nvSpPr>
+          <p:cNvPr id="17" name="Rounded Rectangle 16"/>
+          <p:cNvSpPr/>
+          <p:nvPr/>
+        </p:nvSpPr>
+        <p:spPr>
+          <a:xfrm>
+            <a:off x="4292498" y="3909060"/>
+            <a:ext cx="1734769" cy="1508760"/>
+          </a:xfrm>
+          <a:prstGeom prst="roundRect">
+            <a:avLst>
+              <a:gd name="adj" fmla="val 6000"/>
+            </a:avLst>
+          </a:prstGeom>
+          <a:solidFill>
+            <a:srgbClr val="EAF3FF"/>
+          </a:solidFill>
+          <a:ln>
+            <a:noFill/>
+          </a:ln>
+          <a:effectLst/>
+        </p:spPr>
+        <p:style>
+          <a:lnRef idx="1">
+            <a:schemeClr val="accent1"/>
+          </a:lnRef>
+          <a:fillRef idx="3">
+            <a:schemeClr val="accent1"/>
+          </a:fillRef>
+          <a:effectRef idx="2">
+            <a:schemeClr val="accent1"/>
+          </a:effectRef>
+          <a:fontRef idx="minor">
+            <a:schemeClr val="lt1"/>
+          </a:fontRef>
+        </p:style>
+        <p:txBody>
+          <a:bodyPr rtlCol="0" anchor="ctr"/>
+          <a:lstStyle/>
+          <a:p/>
+        </p:txBody>
+      </p:sp>
+      <p:sp>
+        <p:nvSpPr>
+          <p:cNvPr id="18" name="TextBox 17"/>
+          <p:cNvSpPr txBox="1"/>
+          <p:nvPr/>
+        </p:nvSpPr>
+        <p:spPr>
+          <a:xfrm>
+            <a:off x="4429658" y="4046220"/>
+            <a:ext cx="1460449" cy="1234439"/>
+          </a:xfrm>
+          <a:prstGeom prst="rect">
+            <a:avLst/>
+          </a:prstGeom>
+          <a:noFill/>
+        </p:spPr>
+        <p:txBody>
+          <a:bodyPr wrap="square" anchor="t" lIns="0" rIns="0" tIns="0" bIns="0"/>
+          <a:lstStyle/>
+          <a:p>
+            <a:pPr algn="l"/>
+            <a:r>
+              <a:rPr sz="1800" b="0" i="0">
+                <a:solidFill>
+                  <a:srgbClr val="202122"/>
+                </a:solidFill>
+                <a:latin typeface="Calibri"/>
+              </a:rPr>
+              <a:t>Test and fix defects in existing code.</a:t>
+            </a:r>
+          </a:p>
+        </p:txBody>
+      </p:sp>
+      <p:sp>
+        <p:nvSpPr>
+          <p:cNvPr id="19" name="Oval 18"/>
+          <p:cNvSpPr/>
+          <p:nvPr/>
+        </p:nvSpPr>
+        <p:spPr>
+          <a:xfrm>
+            <a:off x="6711772" y="2354580"/>
+            <a:ext cx="640080" cy="640080"/>
+          </a:xfrm>
+          <a:prstGeom prst="ellipse">
+            <a:avLst/>
+          </a:prstGeom>
+          <a:solidFill>
+            <a:srgbClr val="F2B705"/>
+          </a:solidFill>
+          <a:ln>
+            <a:noFill/>
+          </a:ln>
+          <a:effectLst/>
+        </p:spPr>
+        <p:style>
+          <a:lnRef idx="1">
+            <a:schemeClr val="accent1"/>
+          </a:lnRef>
+          <a:fillRef idx="3">
+            <a:schemeClr val="accent1"/>
+          </a:fillRef>
+          <a:effectRef idx="2">
+            <a:schemeClr val="accent1"/>
+          </a:effectRef>
+          <a:fontRef idx="minor">
+            <a:schemeClr val="lt1"/>
+          </a:fontRef>
+        </p:style>
+        <p:txBody>
+          <a:bodyPr rtlCol="0" anchor="ctr" lIns="0" rIns="0" tIns="0" bIns="0"/>
+          <a:lstStyle/>
+          <a:p>
+            <a:pPr algn="ctr"/>
+            <a:r>
+              <a:rPr sz="2000" b="1">
+                <a:solidFill>
+                  <a:srgbClr val="202122"/>
+                </a:solidFill>
+                <a:latin typeface="Calibri"/>
+              </a:rPr>
+              <a:t>4</a:t>
+            </a:r>
+          </a:p>
+        </p:txBody>
+      </p:sp>
+      <p:sp>
+        <p:nvSpPr>
+          <p:cNvPr id="20" name="TextBox 19"/>
+          <p:cNvSpPr txBox="1"/>
+          <p:nvPr/>
+        </p:nvSpPr>
+        <p:spPr>
+          <a:xfrm>
+            <a:off x="6164427" y="3131820"/>
+            <a:ext cx="1734769" cy="731520"/>
+          </a:xfrm>
+          <a:prstGeom prst="rect">
+            <a:avLst/>
+          </a:prstGeom>
+          <a:noFill/>
+        </p:spPr>
+        <p:txBody>
+          <a:bodyPr wrap="square" anchor="t" lIns="0" rIns="0" tIns="0" bIns="0"/>
+          <a:lstStyle/>
+          <a:p>
+            <a:pPr algn="ctr"/>
+            <a:r>
+              <a:rPr sz="1700" b="1" i="0">
+                <a:solidFill>
+                  <a:srgbClr val="03306E"/>
+                </a:solidFill>
+                <a:latin typeface="Calibri"/>
+              </a:rPr>
+              <a:t>Task 3</a:t>
+            </a:r>
+          </a:p>
+        </p:txBody>
+      </p:sp>
+      <p:sp>
+        <p:nvSpPr>
+          <p:cNvPr id="21" name="Rounded Rectangle 20"/>
+          <p:cNvSpPr/>
+          <p:nvPr/>
+        </p:nvSpPr>
+        <p:spPr>
+          <a:xfrm>
+            <a:off x="6164427" y="3909060"/>
+            <a:ext cx="1734769" cy="1508760"/>
+          </a:xfrm>
+          <a:prstGeom prst="roundRect">
+            <a:avLst>
+              <a:gd name="adj" fmla="val 6000"/>
+            </a:avLst>
+          </a:prstGeom>
+          <a:solidFill>
+            <a:srgbClr val="EAF3FF"/>
+          </a:solidFill>
+          <a:ln>
+            <a:noFill/>
+          </a:ln>
+          <a:effectLst/>
+        </p:spPr>
+        <p:style>
+          <a:lnRef idx="1">
+            <a:schemeClr val="accent1"/>
+          </a:lnRef>
+          <a:fillRef idx="3">
+            <a:schemeClr val="accent1"/>
+          </a:fillRef>
+          <a:effectRef idx="2">
+            <a:schemeClr val="accent1"/>
+          </a:effectRef>
+          <a:fontRef idx="minor">
+            <a:schemeClr val="lt1"/>
+          </a:fontRef>
+        </p:style>
+        <p:txBody>
+          <a:bodyPr rtlCol="0" anchor="ctr"/>
+          <a:lstStyle/>
+          <a:p/>
+        </p:txBody>
+      </p:sp>
+      <p:sp>
+        <p:nvSpPr>
+          <p:cNvPr id="22" name="TextBox 21"/>
+          <p:cNvSpPr txBox="1"/>
+          <p:nvPr/>
+        </p:nvSpPr>
+        <p:spPr>
+          <a:xfrm>
+            <a:off x="6301587" y="4046220"/>
+            <a:ext cx="1460449" cy="1234439"/>
+          </a:xfrm>
+          <a:prstGeom prst="rect">
+            <a:avLst/>
+          </a:prstGeom>
+          <a:noFill/>
+        </p:spPr>
+        <p:txBody>
+          <a:bodyPr wrap="square" anchor="t" lIns="0" rIns="0" tIns="0" bIns="0"/>
+          <a:lstStyle/>
+          <a:p>
+            <a:pPr algn="l"/>
+            <a:r>
+              <a:rPr sz="1800" b="0" i="0">
+                <a:solidFill>
+                  <a:srgbClr val="202122"/>
+                </a:solidFill>
+                <a:latin typeface="Calibri"/>
+              </a:rPr>
+              <a:t>Decompose and design a solution.</a:t>
+            </a:r>
+          </a:p>
+        </p:txBody>
+      </p:sp>
+      <p:sp>
+        <p:nvSpPr>
+          <p:cNvPr id="23" name="Oval 22"/>
+          <p:cNvSpPr/>
+          <p:nvPr/>
+        </p:nvSpPr>
+        <p:spPr>
+          <a:xfrm>
+            <a:off x="8583701" y="2354580"/>
+            <a:ext cx="640080" cy="640080"/>
+          </a:xfrm>
+          <a:prstGeom prst="ellipse">
+            <a:avLst/>
+          </a:prstGeom>
+          <a:solidFill>
+            <a:srgbClr val="F2B705"/>
+          </a:solidFill>
+          <a:ln>
+            <a:noFill/>
+          </a:ln>
+          <a:effectLst/>
+        </p:spPr>
+        <p:style>
+          <a:lnRef idx="1">
+            <a:schemeClr val="accent1"/>
+          </a:lnRef>
+          <a:fillRef idx="3">
+            <a:schemeClr val="accent1"/>
+          </a:fillRef>
+          <a:effectRef idx="2">
+            <a:schemeClr val="accent1"/>
+          </a:effectRef>
+          <a:fontRef idx="minor">
+            <a:schemeClr val="lt1"/>
+          </a:fontRef>
+        </p:style>
+        <p:txBody>
+          <a:bodyPr rtlCol="0" anchor="ctr" lIns="0" rIns="0" tIns="0" bIns="0"/>
+          <a:lstStyle/>
+          <a:p>
+            <a:pPr algn="ctr"/>
+            <a:r>
+              <a:rPr sz="2000" b="1">
+                <a:solidFill>
+                  <a:srgbClr val="202122"/>
+                </a:solidFill>
+                <a:latin typeface="Calibri"/>
+              </a:rPr>
+              <a:t>5</a:t>
+            </a:r>
+          </a:p>
+        </p:txBody>
+      </p:sp>
+      <p:sp>
+        <p:nvSpPr>
+          <p:cNvPr id="24" name="TextBox 23"/>
+          <p:cNvSpPr txBox="1"/>
+          <p:nvPr/>
+        </p:nvSpPr>
+        <p:spPr>
+          <a:xfrm>
+            <a:off x="8036356" y="3131820"/>
+            <a:ext cx="1734769" cy="731520"/>
+          </a:xfrm>
+          <a:prstGeom prst="rect">
+            <a:avLst/>
+          </a:prstGeom>
+          <a:noFill/>
+        </p:spPr>
+        <p:txBody>
+          <a:bodyPr wrap="square" anchor="t" lIns="0" rIns="0" tIns="0" bIns="0"/>
+          <a:lstStyle/>
+          <a:p>
+            <a:pPr algn="ctr"/>
+            <a:r>
+              <a:rPr sz="1700" b="1" i="0">
+                <a:solidFill>
+                  <a:srgbClr val="03306E"/>
+                </a:solidFill>
+                <a:latin typeface="Calibri"/>
+              </a:rPr>
+              <a:t>Task 4a</a:t>
+            </a:r>
+          </a:p>
+        </p:txBody>
+      </p:sp>
+      <p:sp>
+        <p:nvSpPr>
+          <p:cNvPr id="25" name="Rounded Rectangle 24"/>
+          <p:cNvSpPr/>
+          <p:nvPr/>
+        </p:nvSpPr>
+        <p:spPr>
+          <a:xfrm>
+            <a:off x="8036356" y="3909060"/>
+            <a:ext cx="1734769" cy="1508760"/>
+          </a:xfrm>
+          <a:prstGeom prst="roundRect">
+            <a:avLst>
+              <a:gd name="adj" fmla="val 6000"/>
+            </a:avLst>
+          </a:prstGeom>
+          <a:solidFill>
+            <a:srgbClr val="EAF3FF"/>
+          </a:solidFill>
+          <a:ln>
+            <a:noFill/>
+          </a:ln>
+          <a:effectLst/>
+        </p:spPr>
+        <p:style>
+          <a:lnRef idx="1">
+            <a:schemeClr val="accent1"/>
+          </a:lnRef>
+          <a:fillRef idx="3">
+            <a:schemeClr val="accent1"/>
+          </a:fillRef>
+          <a:effectRef idx="2">
+            <a:schemeClr val="accent1"/>
+          </a:effectRef>
+          <a:fontRef idx="minor">
+            <a:schemeClr val="lt1"/>
+          </a:fontRef>
+        </p:style>
+        <p:txBody>
+          <a:bodyPr rtlCol="0" anchor="ctr"/>
+          <a:lstStyle/>
+          <a:p/>
+        </p:txBody>
+      </p:sp>
+      <p:sp>
+        <p:nvSpPr>
+          <p:cNvPr id="26" name="TextBox 25"/>
+          <p:cNvSpPr txBox="1"/>
+          <p:nvPr/>
+        </p:nvSpPr>
+        <p:spPr>
+          <a:xfrm>
+            <a:off x="8173516" y="4046220"/>
+            <a:ext cx="1460449" cy="1234439"/>
+          </a:xfrm>
+          <a:prstGeom prst="rect">
+            <a:avLst/>
+          </a:prstGeom>
+          <a:noFill/>
+        </p:spPr>
+        <p:txBody>
+          <a:bodyPr wrap="square" anchor="t" lIns="0" rIns="0" tIns="0" bIns="0"/>
+          <a:lstStyle/>
+          <a:p>
+            <a:pPr algn="l"/>
+            <a:r>
+              <a:rPr sz="1800" b="0" i="0">
+                <a:solidFill>
+                  <a:srgbClr val="202122"/>
+                </a:solidFill>
+                <a:latin typeface="Calibri"/>
+              </a:rPr>
+              <a:t>Develop the solution in Python.</a:t>
+            </a:r>
+          </a:p>
+        </p:txBody>
+      </p:sp>
+      <p:sp>
+        <p:nvSpPr>
+          <p:cNvPr id="27" name="Oval 26"/>
+          <p:cNvSpPr/>
+          <p:nvPr/>
+        </p:nvSpPr>
+        <p:spPr>
+          <a:xfrm>
+            <a:off x="10455630" y="2354580"/>
+            <a:ext cx="640080" cy="640080"/>
+          </a:xfrm>
+          <a:prstGeom prst="ellipse">
+            <a:avLst/>
+          </a:prstGeom>
+          <a:solidFill>
+            <a:srgbClr val="F2B705"/>
+          </a:solidFill>
+          <a:ln>
+            <a:noFill/>
+          </a:ln>
+          <a:effectLst/>
+        </p:spPr>
+        <p:style>
+          <a:lnRef idx="1">
+            <a:schemeClr val="accent1"/>
+          </a:lnRef>
+          <a:fillRef idx="3">
+            <a:schemeClr val="accent1"/>
+          </a:fillRef>
+          <a:effectRef idx="2">
+            <a:schemeClr val="accent1"/>
+          </a:effectRef>
+          <a:fontRef idx="minor">
+            <a:schemeClr val="lt1"/>
+          </a:fontRef>
+        </p:style>
+        <p:txBody>
+          <a:bodyPr rtlCol="0" anchor="ctr" lIns="0" rIns="0" tIns="0" bIns="0"/>
+          <a:lstStyle/>
+          <a:p>
+            <a:pPr algn="ctr"/>
+            <a:r>
+              <a:rPr sz="2000" b="1">
+                <a:solidFill>
+                  <a:srgbClr val="202122"/>
+                </a:solidFill>
+                <a:latin typeface="Calibri"/>
+              </a:rPr>
+              <a:t>6</a:t>
+            </a:r>
+          </a:p>
+        </p:txBody>
+      </p:sp>
+      <p:sp>
+        <p:nvSpPr>
+          <p:cNvPr id="28" name="TextBox 27"/>
+          <p:cNvSpPr txBox="1"/>
+          <p:nvPr/>
+        </p:nvSpPr>
+        <p:spPr>
+          <a:xfrm>
+            <a:off x="9908286" y="3131820"/>
+            <a:ext cx="1734769" cy="731520"/>
+          </a:xfrm>
+          <a:prstGeom prst="rect">
+            <a:avLst/>
+          </a:prstGeom>
+          <a:noFill/>
+        </p:spPr>
+        <p:txBody>
+          <a:bodyPr wrap="square" anchor="t" lIns="0" rIns="0" tIns="0" bIns="0"/>
+          <a:lstStyle/>
+          <a:p>
+            <a:pPr algn="ctr"/>
+            <a:r>
+              <a:rPr sz="1700" b="1" i="0">
+                <a:solidFill>
+                  <a:srgbClr val="03306E"/>
+                </a:solidFill>
+                <a:latin typeface="Calibri"/>
+              </a:rPr>
+              <a:t>Task 4b</a:t>
+            </a:r>
+          </a:p>
+        </p:txBody>
+      </p:sp>
+      <p:sp>
+        <p:nvSpPr>
+          <p:cNvPr id="29" name="Rounded Rectangle 28"/>
+          <p:cNvSpPr/>
+          <p:nvPr/>
+        </p:nvSpPr>
+        <p:spPr>
+          <a:xfrm>
+            <a:off x="9908286" y="3909060"/>
+            <a:ext cx="1734769" cy="1508760"/>
+          </a:xfrm>
+          <a:prstGeom prst="roundRect">
+            <a:avLst>
+              <a:gd name="adj" fmla="val 6000"/>
+            </a:avLst>
+          </a:prstGeom>
+          <a:solidFill>
+            <a:srgbClr val="EAF3FF"/>
+          </a:solidFill>
+          <a:ln>
+            <a:noFill/>
+          </a:ln>
+          <a:effectLst/>
+        </p:spPr>
+        <p:style>
+          <a:lnRef idx="1">
+            <a:schemeClr val="accent1"/>
+          </a:lnRef>
+          <a:fillRef idx="3">
+            <a:schemeClr val="accent1"/>
+          </a:fillRef>
+          <a:effectRef idx="2">
+            <a:schemeClr val="accent1"/>
+          </a:effectRef>
+          <a:fontRef idx="minor">
+            <a:schemeClr val="lt1"/>
+          </a:fontRef>
+        </p:style>
+        <p:txBody>
+          <a:bodyPr rtlCol="0" anchor="ctr"/>
+          <a:lstStyle/>
+          <a:p/>
+        </p:txBody>
+      </p:sp>
+      <p:sp>
+        <p:nvSpPr>
+          <p:cNvPr id="30" name="TextBox 29"/>
+          <p:cNvSpPr txBox="1"/>
+          <p:nvPr/>
+        </p:nvSpPr>
+        <p:spPr>
+          <a:xfrm>
+            <a:off x="10045446" y="4046220"/>
+            <a:ext cx="1460449" cy="1234439"/>
+          </a:xfrm>
+          <a:prstGeom prst="rect">
+            <a:avLst/>
+          </a:prstGeom>
+          <a:noFill/>
+        </p:spPr>
+        <p:txBody>
+          <a:bodyPr wrap="square" anchor="t" lIns="0" rIns="0" tIns="0" bIns="0"/>
+          <a:lstStyle/>
+          <a:p>
+            <a:pPr algn="l"/>
+            <a:r>
+              <a:rPr sz="1800" b="0" i="0">
+                <a:solidFill>
+                  <a:srgbClr val="202122"/>
+                </a:solidFill>
+                <a:latin typeface="Calibri"/>
+              </a:rPr>
+              <a:t>Reflective evaluation.</a:t>
             </a:r>
           </a:p>
         </p:txBody>
@@ -8005,7 +10033,7 @@
                 </a:solidFill>
                 <a:latin typeface="Cambria"/>
               </a:rPr>
-              <a:t>Check your understanding</a:t>
+              <a:t>What earns marks</a:t>
             </a:r>
           </a:p>
         </p:txBody>
@@ -8078,14 +10106,172 @@
       </p:sp>
       <p:sp>
         <p:nvSpPr>
-          <p:cNvPr id="6" name="Oval 5"/>
+          <p:cNvPr id="6" name="TextBox 5"/>
+          <p:cNvSpPr txBox="1"/>
+          <p:nvPr/>
+        </p:nvSpPr>
+        <p:spPr>
+          <a:xfrm>
+            <a:off x="548640" y="1554480"/>
+            <a:ext cx="6720840" cy="4617720"/>
+          </a:xfrm>
+          <a:prstGeom prst="rect">
+            <a:avLst/>
+          </a:prstGeom>
+          <a:noFill/>
+        </p:spPr>
+        <p:txBody>
+          <a:bodyPr wrap="square" lIns="0" rIns="0" tIns="0" bIns="0">
+            <a:spAutoFit/>
+          </a:bodyPr>
+          <a:lstStyle/>
+          <a:p>
+            <a:pPr>
+              <a:spcAft>
+                <a:spcPts val="1140"/>
+              </a:spcAft>
+            </a:pPr>
+            <a:r>
+              <a:rPr sz="1900" b="0">
+                <a:solidFill>
+                  <a:srgbClr val="202122"/>
+                </a:solidFill>
+                <a:latin typeface="Calibri"/>
+              </a:rPr>
+              <a:t>Each task rewards specific things.</a:t>
+            </a:r>
+          </a:p>
+          <a:p>
+            <a:pPr>
+              <a:spcAft>
+                <a:spcPts val="1140"/>
+              </a:spcAft>
+            </a:pPr>
+            <a:r>
+              <a:rPr sz="1900" b="1">
+                <a:solidFill>
+                  <a:srgbClr val="202122"/>
+                </a:solidFill>
+                <a:latin typeface="Calibri"/>
+              </a:rPr>
+              <a:t>Task 2 (fix defects):</a:t>
+            </a:r>
+            <a:r>
+              <a:rPr sz="1900" b="0">
+                <a:solidFill>
+                  <a:srgbClr val="202122"/>
+                </a:solidFill>
+                <a:latin typeface="Calibri"/>
+              </a:rPr>
+              <a:t> a documented testing process covering each test, its purpose, the test data (valid, valid extreme, invalid, invalid extreme and erroneous), expected and actual results, and the fixes made.</a:t>
+            </a:r>
+          </a:p>
+          <a:p>
+            <a:pPr>
+              <a:spcAft>
+                <a:spcPts val="1140"/>
+              </a:spcAft>
+            </a:pPr>
+            <a:r>
+              <a:rPr sz="1900" b="1">
+                <a:solidFill>
+                  <a:srgbClr val="202122"/>
+                </a:solidFill>
+                <a:latin typeface="Calibri"/>
+              </a:rPr>
+              <a:t>Task 3 (design):</a:t>
+            </a:r>
+            <a:r>
+              <a:rPr sz="1900" b="0">
+                <a:solidFill>
+                  <a:srgbClr val="202122"/>
+                </a:solidFill>
+                <a:latin typeface="Calibri"/>
+              </a:rPr>
+              <a:t> good decomposition, clear algorithms, correct flowchart symbols or code conventions, and a design detailed enough for a third party to build.</a:t>
+            </a:r>
+          </a:p>
+          <a:p>
+            <a:pPr>
+              <a:spcAft>
+                <a:spcPts val="1140"/>
+              </a:spcAft>
+            </a:pPr>
+            <a:r>
+              <a:rPr sz="1900" b="1">
+                <a:solidFill>
+                  <a:srgbClr val="202122"/>
+                </a:solidFill>
+                <a:latin typeface="Calibri"/>
+              </a:rPr>
+              <a:t>Task 4a (develop):</a:t>
+            </a:r>
+            <a:r>
+              <a:rPr sz="1900" b="0">
+                <a:solidFill>
+                  <a:srgbClr val="202122"/>
+                </a:solidFill>
+                <a:latin typeface="Calibri"/>
+              </a:rPr>
+              <a:t> functions, meaningful names, comments, mostly local variables, constants, exception handling and a good user experience, including graphs with Matplotlib.</a:t>
+            </a:r>
+          </a:p>
+        </p:txBody>
+      </p:sp>
+      <p:sp>
+        <p:nvSpPr>
+          <p:cNvPr id="7" name="Rounded Rectangle 6"/>
           <p:cNvSpPr/>
           <p:nvPr/>
         </p:nvSpPr>
         <p:spPr>
           <a:xfrm>
-            <a:off x="548640" y="1618488"/>
-            <a:ext cx="411480" cy="411480"/>
+            <a:off x="7772400" y="1554480"/>
+            <a:ext cx="3867912" cy="4526280"/>
+          </a:xfrm>
+          <a:prstGeom prst="roundRect">
+            <a:avLst>
+              <a:gd name="adj" fmla="val 8000"/>
+            </a:avLst>
+          </a:prstGeom>
+          <a:solidFill>
+            <a:srgbClr val="03306E"/>
+          </a:solidFill>
+          <a:ln>
+            <a:noFill/>
+          </a:ln>
+          <a:effectLst/>
+        </p:spPr>
+        <p:style>
+          <a:lnRef idx="1">
+            <a:schemeClr val="accent1"/>
+          </a:lnRef>
+          <a:fillRef idx="3">
+            <a:schemeClr val="accent1"/>
+          </a:fillRef>
+          <a:effectRef idx="2">
+            <a:schemeClr val="accent1"/>
+          </a:effectRef>
+          <a:fontRef idx="minor">
+            <a:schemeClr val="lt1"/>
+          </a:fontRef>
+        </p:style>
+        <p:txBody>
+          <a:bodyPr rtlCol="0" anchor="ctr"/>
+          <a:lstStyle/>
+          <a:p/>
+        </p:txBody>
+      </p:sp>
+      <p:sp>
+        <p:nvSpPr>
+          <p:cNvPr id="8" name="Oval 7"/>
+          <p:cNvSpPr/>
+          <p:nvPr/>
+        </p:nvSpPr>
+        <p:spPr>
+          <a:xfrm>
+            <a:off x="8046720" y="1828800"/>
+            <a:ext cx="548640" cy="548640"/>
           </a:xfrm>
           <a:prstGeom prst="ellipse">
             <a:avLst/>
@@ -8118,27 +10304,27 @@
           <a:p>
             <a:pPr algn="ctr"/>
             <a:r>
-              <a:rPr sz="1400" b="1">
+              <a:rPr sz="1300" b="1">
                 <a:solidFill>
                   <a:srgbClr val="202122"/>
                 </a:solidFill>
                 <a:latin typeface="Calibri"/>
               </a:rPr>
-              <a:t>1</a:t>
-            </a:r>
-          </a:p>
-        </p:txBody>
-      </p:sp>
-      <p:sp>
-        <p:nvSpPr>
-          <p:cNvPr id="7" name="TextBox 6"/>
-          <p:cNvSpPr txBox="1"/>
-          <p:nvPr/>
-        </p:nvSpPr>
-        <p:spPr>
-          <a:xfrm>
-            <a:off x="1234440" y="1600200"/>
-            <a:ext cx="10408615" cy="1030986"/>
+              <a:t>e.g.</a:t>
+            </a:r>
+          </a:p>
+        </p:txBody>
+      </p:sp>
+      <p:sp>
+        <p:nvSpPr>
+          <p:cNvPr id="9" name="TextBox 8"/>
+          <p:cNvSpPr txBox="1"/>
+          <p:nvPr/>
+        </p:nvSpPr>
+        <p:spPr>
+          <a:xfrm>
+            <a:off x="8046720" y="2560320"/>
+            <a:ext cx="3291840" cy="365760"/>
           </a:xfrm>
           <a:prstGeom prst="rect">
             <a:avLst/>
@@ -8151,80 +10337,27 @@
           <a:p>
             <a:pPr algn="l"/>
             <a:r>
-              <a:rPr sz="2200" b="0" i="0">
-                <a:solidFill>
-                  <a:srgbClr val="202122"/>
-                </a:solidFill>
-                <a:latin typeface="Calibri"/>
-              </a:rPr>
-              <a:t>What percentage of the core assessments is the ESP?</a:t>
-            </a:r>
-          </a:p>
-        </p:txBody>
-      </p:sp>
-      <p:sp>
-        <p:nvSpPr>
-          <p:cNvPr id="8" name="Oval 7"/>
-          <p:cNvSpPr/>
-          <p:nvPr/>
-        </p:nvSpPr>
-        <p:spPr>
-          <a:xfrm>
-            <a:off x="548640" y="2814066"/>
-            <a:ext cx="411480" cy="411480"/>
-          </a:xfrm>
-          <a:prstGeom prst="ellipse">
-            <a:avLst/>
-          </a:prstGeom>
-          <a:solidFill>
-            <a:srgbClr val="F2B705"/>
-          </a:solidFill>
-          <a:ln>
-            <a:noFill/>
-          </a:ln>
-          <a:effectLst/>
-        </p:spPr>
-        <p:style>
-          <a:lnRef idx="1">
-            <a:schemeClr val="accent1"/>
-          </a:lnRef>
-          <a:fillRef idx="3">
-            <a:schemeClr val="accent1"/>
-          </a:fillRef>
-          <a:effectRef idx="2">
-            <a:schemeClr val="accent1"/>
-          </a:effectRef>
-          <a:fontRef idx="minor">
-            <a:schemeClr val="lt1"/>
-          </a:fontRef>
-        </p:style>
-        <p:txBody>
-          <a:bodyPr rtlCol="0" anchor="ctr" lIns="0" rIns="0" tIns="0" bIns="0"/>
-          <a:lstStyle/>
-          <a:p>
-            <a:pPr algn="ctr"/>
-            <a:r>
-              <a:rPr sz="1400" b="1">
-                <a:solidFill>
-                  <a:srgbClr val="202122"/>
-                </a:solidFill>
-                <a:latin typeface="Calibri"/>
-              </a:rPr>
-              <a:t>2</a:t>
-            </a:r>
-          </a:p>
-        </p:txBody>
-      </p:sp>
-      <p:sp>
-        <p:nvSpPr>
-          <p:cNvPr id="9" name="TextBox 8"/>
-          <p:cNvSpPr txBox="1"/>
-          <p:nvPr/>
-        </p:nvSpPr>
-        <p:spPr>
-          <a:xfrm>
-            <a:off x="1234440" y="2795778"/>
-            <a:ext cx="10408615" cy="1030986"/>
+              <a:rPr sz="1300" b="1" i="0">
+                <a:solidFill>
+                  <a:srgbClr val="A9C8F0"/>
+                </a:solidFill>
+                <a:latin typeface="Calibri"/>
+              </a:rPr>
+              <a:t>EXAMPLE</a:t>
+            </a:r>
+          </a:p>
+        </p:txBody>
+      </p:sp>
+      <p:sp>
+        <p:nvSpPr>
+          <p:cNvPr id="10" name="TextBox 9"/>
+          <p:cNvSpPr txBox="1"/>
+          <p:nvPr/>
+        </p:nvSpPr>
+        <p:spPr>
+          <a:xfrm>
+            <a:off x="8046720" y="2971800"/>
+            <a:ext cx="3291840" cy="2971800"/>
           </a:xfrm>
           <a:prstGeom prst="rect">
             <a:avLst/>
@@ -8237,185 +10370,13 @@
           <a:p>
             <a:pPr algn="l"/>
             <a:r>
-              <a:rPr sz="2200" b="0" i="0">
-                <a:solidFill>
-                  <a:srgbClr val="202122"/>
-                </a:solidFill>
-                <a:latin typeface="Calibri"/>
-              </a:rPr>
-              <a:t>Name the five types of test data in Task 2.</a:t>
-            </a:r>
-          </a:p>
-        </p:txBody>
-      </p:sp>
-      <p:sp>
-        <p:nvSpPr>
-          <p:cNvPr id="10" name="Oval 9"/>
-          <p:cNvSpPr/>
-          <p:nvPr/>
-        </p:nvSpPr>
-        <p:spPr>
-          <a:xfrm>
-            <a:off x="548640" y="4009644"/>
-            <a:ext cx="411480" cy="411480"/>
-          </a:xfrm>
-          <a:prstGeom prst="ellipse">
-            <a:avLst/>
-          </a:prstGeom>
-          <a:solidFill>
-            <a:srgbClr val="F2B705"/>
-          </a:solidFill>
-          <a:ln>
-            <a:noFill/>
-          </a:ln>
-          <a:effectLst/>
-        </p:spPr>
-        <p:style>
-          <a:lnRef idx="1">
-            <a:schemeClr val="accent1"/>
-          </a:lnRef>
-          <a:fillRef idx="3">
-            <a:schemeClr val="accent1"/>
-          </a:fillRef>
-          <a:effectRef idx="2">
-            <a:schemeClr val="accent1"/>
-          </a:effectRef>
-          <a:fontRef idx="minor">
-            <a:schemeClr val="lt1"/>
-          </a:fontRef>
-        </p:style>
-        <p:txBody>
-          <a:bodyPr rtlCol="0" anchor="ctr" lIns="0" rIns="0" tIns="0" bIns="0"/>
-          <a:lstStyle/>
-          <a:p>
-            <a:pPr algn="ctr"/>
-            <a:r>
-              <a:rPr sz="1400" b="1">
-                <a:solidFill>
-                  <a:srgbClr val="202122"/>
-                </a:solidFill>
-                <a:latin typeface="Calibri"/>
-              </a:rPr>
-              <a:t>3</a:t>
-            </a:r>
-          </a:p>
-        </p:txBody>
-      </p:sp>
-      <p:sp>
-        <p:nvSpPr>
-          <p:cNvPr id="11" name="TextBox 10"/>
-          <p:cNvSpPr txBox="1"/>
-          <p:nvPr/>
-        </p:nvSpPr>
-        <p:spPr>
-          <a:xfrm>
-            <a:off x="1234440" y="3991356"/>
-            <a:ext cx="10408615" cy="1030986"/>
-          </a:xfrm>
-          <a:prstGeom prst="rect">
-            <a:avLst/>
-          </a:prstGeom>
-          <a:noFill/>
-        </p:spPr>
-        <p:txBody>
-          <a:bodyPr wrap="square" anchor="t" lIns="0" rIns="0" tIns="0" bIns="0"/>
-          <a:lstStyle/>
-          <a:p>
-            <a:pPr algn="l"/>
-            <a:r>
-              <a:rPr sz="2200" b="0" i="0">
-                <a:solidFill>
-                  <a:srgbClr val="202122"/>
-                </a:solidFill>
-                <a:latin typeface="Calibri"/>
-              </a:rPr>
-              <a:t>Which library is suggested for graphs?</a:t>
-            </a:r>
-          </a:p>
-        </p:txBody>
-      </p:sp>
-      <p:sp>
-        <p:nvSpPr>
-          <p:cNvPr id="12" name="Oval 11"/>
-          <p:cNvSpPr/>
-          <p:nvPr/>
-        </p:nvSpPr>
-        <p:spPr>
-          <a:xfrm>
-            <a:off x="548640" y="5205221"/>
-            <a:ext cx="411480" cy="411480"/>
-          </a:xfrm>
-          <a:prstGeom prst="ellipse">
-            <a:avLst/>
-          </a:prstGeom>
-          <a:solidFill>
-            <a:srgbClr val="F2B705"/>
-          </a:solidFill>
-          <a:ln>
-            <a:noFill/>
-          </a:ln>
-          <a:effectLst/>
-        </p:spPr>
-        <p:style>
-          <a:lnRef idx="1">
-            <a:schemeClr val="accent1"/>
-          </a:lnRef>
-          <a:fillRef idx="3">
-            <a:schemeClr val="accent1"/>
-          </a:fillRef>
-          <a:effectRef idx="2">
-            <a:schemeClr val="accent1"/>
-          </a:effectRef>
-          <a:fontRef idx="minor">
-            <a:schemeClr val="lt1"/>
-          </a:fontRef>
-        </p:style>
-        <p:txBody>
-          <a:bodyPr rtlCol="0" anchor="ctr" lIns="0" rIns="0" tIns="0" bIns="0"/>
-          <a:lstStyle/>
-          <a:p>
-            <a:pPr algn="ctr"/>
-            <a:r>
-              <a:rPr sz="1400" b="1">
-                <a:solidFill>
-                  <a:srgbClr val="202122"/>
-                </a:solidFill>
-                <a:latin typeface="Calibri"/>
-              </a:rPr>
-              <a:t>4</a:t>
-            </a:r>
-          </a:p>
-        </p:txBody>
-      </p:sp>
-      <p:sp>
-        <p:nvSpPr>
-          <p:cNvPr id="13" name="TextBox 12"/>
-          <p:cNvSpPr txBox="1"/>
-          <p:nvPr/>
-        </p:nvSpPr>
-        <p:spPr>
-          <a:xfrm>
-            <a:off x="1234440" y="5186933"/>
-            <a:ext cx="10408615" cy="1030986"/>
-          </a:xfrm>
-          <a:prstGeom prst="rect">
-            <a:avLst/>
-          </a:prstGeom>
-          <a:noFill/>
-        </p:spPr>
-        <p:txBody>
-          <a:bodyPr wrap="square" anchor="t" lIns="0" rIns="0" tIns="0" bIns="0"/>
-          <a:lstStyle/>
-          <a:p>
-            <a:pPr algn="l"/>
-            <a:r>
-              <a:rPr sz="2200" b="0" i="0">
-                <a:solidFill>
-                  <a:srgbClr val="202122"/>
-                </a:solidFill>
-                <a:latin typeface="Calibri"/>
-              </a:rPr>
-              <a:t>What must a Task 3 design allow a third party to do?</a:t>
+              <a:rPr sz="1900" b="0" i="0">
+                <a:solidFill>
+                  <a:srgbClr val="FFFFFF"/>
+                </a:solidFill>
+                <a:latin typeface="Cambria"/>
+              </a:rPr>
+              <a:t>Two programs that work equally well can score very differently: the one with functions, clear names, comments and error handling scores higher.</a:t>
             </a:r>
           </a:p>
         </p:txBody>
@@ -8507,7 +10468,7 @@
                 </a:solidFill>
                 <a:latin typeface="Cambria"/>
               </a:rPr>
-              <a:t>Answers</a:t>
+              <a:t>What earns marks</a:t>
             </a:r>
           </a:p>
         </p:txBody>
@@ -8580,14 +10541,58 @@
       </p:sp>
       <p:sp>
         <p:nvSpPr>
-          <p:cNvPr id="6" name="Oval 5"/>
+          <p:cNvPr id="6" name="Rounded Rectangle 5"/>
           <p:cNvSpPr/>
           <p:nvPr/>
         </p:nvSpPr>
         <p:spPr>
           <a:xfrm>
-            <a:off x="548640" y="1618488"/>
-            <a:ext cx="411480" cy="411480"/>
+            <a:off x="548640" y="1600200"/>
+            <a:ext cx="5410047" cy="2148840"/>
+          </a:xfrm>
+          <a:prstGeom prst="roundRect">
+            <a:avLst>
+              <a:gd name="adj" fmla="val 6000"/>
+            </a:avLst>
+          </a:prstGeom>
+          <a:solidFill>
+            <a:srgbClr val="EAF3FF"/>
+          </a:solidFill>
+          <a:ln>
+            <a:noFill/>
+          </a:ln>
+          <a:effectLst/>
+        </p:spPr>
+        <p:style>
+          <a:lnRef idx="1">
+            <a:schemeClr val="accent1"/>
+          </a:lnRef>
+          <a:fillRef idx="3">
+            <a:schemeClr val="accent1"/>
+          </a:fillRef>
+          <a:effectRef idx="2">
+            <a:schemeClr val="accent1"/>
+          </a:effectRef>
+          <a:fontRef idx="minor">
+            <a:schemeClr val="lt1"/>
+          </a:fontRef>
+        </p:style>
+        <p:txBody>
+          <a:bodyPr rtlCol="0" anchor="ctr"/>
+          <a:lstStyle/>
+          <a:p/>
+        </p:txBody>
+      </p:sp>
+      <p:sp>
+        <p:nvSpPr>
+          <p:cNvPr id="7" name="Oval 6"/>
+          <p:cNvSpPr/>
+          <p:nvPr/>
+        </p:nvSpPr>
+        <p:spPr>
+          <a:xfrm>
+            <a:off x="777240" y="1828800"/>
+            <a:ext cx="457200" cy="457200"/>
           </a:xfrm>
           <a:prstGeom prst="ellipse">
             <a:avLst/>
@@ -8620,7 +10625,7 @@
           <a:p>
             <a:pPr algn="ctr"/>
             <a:r>
-              <a:rPr sz="1400" b="1">
+              <a:rPr sz="1500" b="1">
                 <a:solidFill>
                   <a:srgbClr val="202122"/>
                 </a:solidFill>
@@ -8633,14 +10638,47 @@
       </p:sp>
       <p:sp>
         <p:nvSpPr>
-          <p:cNvPr id="7" name="TextBox 6"/>
-          <p:cNvSpPr txBox="1"/>
-          <p:nvPr/>
-        </p:nvSpPr>
-        <p:spPr>
-          <a:xfrm>
-            <a:off x="1234440" y="1600200"/>
-            <a:ext cx="10408615" cy="1030986"/>
+          <p:cNvPr id="8" name="TextBox 7"/>
+          <p:cNvSpPr txBox="1"/>
+          <p:nvPr/>
+        </p:nvSpPr>
+        <p:spPr>
+          <a:xfrm>
+            <a:off x="1371600" y="1801368"/>
+            <a:ext cx="4404207" cy="512064"/>
+          </a:xfrm>
+          <a:prstGeom prst="rect">
+            <a:avLst/>
+          </a:prstGeom>
+          <a:noFill/>
+        </p:spPr>
+        <p:txBody>
+          <a:bodyPr wrap="square" anchor="ctr" lIns="0" rIns="0" tIns="0" bIns="0"/>
+          <a:lstStyle/>
+          <a:p>
+            <a:pPr algn="l"/>
+            <a:r>
+              <a:rPr sz="1900" b="1" i="0">
+                <a:solidFill>
+                  <a:srgbClr val="03306E"/>
+                </a:solidFill>
+                <a:latin typeface="Calibri"/>
+              </a:rPr>
+              <a:t>Task 2 testing</a:t>
+            </a:r>
+          </a:p>
+        </p:txBody>
+      </p:sp>
+      <p:sp>
+        <p:nvSpPr>
+          <p:cNvPr id="9" name="TextBox 8"/>
+          <p:cNvSpPr txBox="1"/>
+          <p:nvPr/>
+        </p:nvSpPr>
+        <p:spPr>
+          <a:xfrm>
+            <a:off x="777240" y="2468880"/>
+            <a:ext cx="4952847" cy="1143000"/>
           </a:xfrm>
           <a:prstGeom prst="rect">
             <a:avLst/>
@@ -8653,38 +10691,71 @@
           <a:p>
             <a:pPr algn="l"/>
             <a:r>
-              <a:rPr sz="1800" b="0" i="0">
-                <a:solidFill>
-                  <a:srgbClr val="54595D"/>
-                </a:solidFill>
-                <a:latin typeface="Calibri"/>
-              </a:rPr>
-              <a:t>What percentage of the core assessments is the ESP?</a:t>
-            </a:r>
-          </a:p>
-          <a:p>
-            <a:r>
-              <a:rPr sz="1800" b="1">
-                <a:solidFill>
-                  <a:srgbClr val="03306E"/>
-                </a:solidFill>
-                <a:latin typeface="Calibri"/>
-              </a:rPr>
-              <a:t>40%.</a:t>
-            </a:r>
-          </a:p>
-        </p:txBody>
-      </p:sp>
-      <p:sp>
-        <p:nvSpPr>
-          <p:cNvPr id="8" name="Oval 7"/>
+              <a:rPr sz="2000" b="0" i="0">
+                <a:solidFill>
+                  <a:srgbClr val="202122"/>
+                </a:solidFill>
+                <a:latin typeface="Calibri"/>
+              </a:rPr>
+              <a:t>Tests, purpose, valid, valid extreme, invalid, invalid extreme and erroneous data, expected and actual results.</a:t>
+            </a:r>
+          </a:p>
+        </p:txBody>
+      </p:sp>
+      <p:sp>
+        <p:nvSpPr>
+          <p:cNvPr id="10" name="Rounded Rectangle 9"/>
           <p:cNvSpPr/>
           <p:nvPr/>
         </p:nvSpPr>
         <p:spPr>
           <a:xfrm>
-            <a:off x="548640" y="2814066"/>
-            <a:ext cx="411480" cy="411480"/>
+            <a:off x="6233007" y="1600200"/>
+            <a:ext cx="5410047" cy="2148840"/>
+          </a:xfrm>
+          <a:prstGeom prst="roundRect">
+            <a:avLst>
+              <a:gd name="adj" fmla="val 6000"/>
+            </a:avLst>
+          </a:prstGeom>
+          <a:solidFill>
+            <a:srgbClr val="EAF3FF"/>
+          </a:solidFill>
+          <a:ln>
+            <a:noFill/>
+          </a:ln>
+          <a:effectLst/>
+        </p:spPr>
+        <p:style>
+          <a:lnRef idx="1">
+            <a:schemeClr val="accent1"/>
+          </a:lnRef>
+          <a:fillRef idx="3">
+            <a:schemeClr val="accent1"/>
+          </a:fillRef>
+          <a:effectRef idx="2">
+            <a:schemeClr val="accent1"/>
+          </a:effectRef>
+          <a:fontRef idx="minor">
+            <a:schemeClr val="lt1"/>
+          </a:fontRef>
+        </p:style>
+        <p:txBody>
+          <a:bodyPr rtlCol="0" anchor="ctr"/>
+          <a:lstStyle/>
+          <a:p/>
+        </p:txBody>
+      </p:sp>
+      <p:sp>
+        <p:nvSpPr>
+          <p:cNvPr id="11" name="Oval 10"/>
+          <p:cNvSpPr/>
+          <p:nvPr/>
+        </p:nvSpPr>
+        <p:spPr>
+          <a:xfrm>
+            <a:off x="6461607" y="1828800"/>
+            <a:ext cx="457200" cy="457200"/>
           </a:xfrm>
           <a:prstGeom prst="ellipse">
             <a:avLst/>
@@ -8717,7 +10788,7 @@
           <a:p>
             <a:pPr algn="ctr"/>
             <a:r>
-              <a:rPr sz="1400" b="1">
+              <a:rPr sz="1500" b="1">
                 <a:solidFill>
                   <a:srgbClr val="202122"/>
                 </a:solidFill>
@@ -8730,14 +10801,47 @@
       </p:sp>
       <p:sp>
         <p:nvSpPr>
-          <p:cNvPr id="9" name="TextBox 8"/>
-          <p:cNvSpPr txBox="1"/>
-          <p:nvPr/>
-        </p:nvSpPr>
-        <p:spPr>
-          <a:xfrm>
-            <a:off x="1234440" y="2795778"/>
-            <a:ext cx="10408615" cy="1030986"/>
+          <p:cNvPr id="12" name="TextBox 11"/>
+          <p:cNvSpPr txBox="1"/>
+          <p:nvPr/>
+        </p:nvSpPr>
+        <p:spPr>
+          <a:xfrm>
+            <a:off x="7055967" y="1801368"/>
+            <a:ext cx="4404207" cy="512064"/>
+          </a:xfrm>
+          <a:prstGeom prst="rect">
+            <a:avLst/>
+          </a:prstGeom>
+          <a:noFill/>
+        </p:spPr>
+        <p:txBody>
+          <a:bodyPr wrap="square" anchor="ctr" lIns="0" rIns="0" tIns="0" bIns="0"/>
+          <a:lstStyle/>
+          <a:p>
+            <a:pPr algn="l"/>
+            <a:r>
+              <a:rPr sz="1900" b="1" i="0">
+                <a:solidFill>
+                  <a:srgbClr val="03306E"/>
+                </a:solidFill>
+                <a:latin typeface="Calibri"/>
+              </a:rPr>
+              <a:t>Task 3 design</a:t>
+            </a:r>
+          </a:p>
+        </p:txBody>
+      </p:sp>
+      <p:sp>
+        <p:nvSpPr>
+          <p:cNvPr id="13" name="TextBox 12"/>
+          <p:cNvSpPr txBox="1"/>
+          <p:nvPr/>
+        </p:nvSpPr>
+        <p:spPr>
+          <a:xfrm>
+            <a:off x="6461607" y="2468880"/>
+            <a:ext cx="4952847" cy="1143000"/>
           </a:xfrm>
           <a:prstGeom prst="rect">
             <a:avLst/>
@@ -8750,38 +10854,71 @@
           <a:p>
             <a:pPr algn="l"/>
             <a:r>
-              <a:rPr sz="1800" b="0" i="0">
-                <a:solidFill>
-                  <a:srgbClr val="54595D"/>
-                </a:solidFill>
-                <a:latin typeface="Calibri"/>
-              </a:rPr>
-              <a:t>Name the five types of test data in Task 2.</a:t>
-            </a:r>
-          </a:p>
-          <a:p>
-            <a:r>
-              <a:rPr sz="1800" b="1">
-                <a:solidFill>
-                  <a:srgbClr val="03306E"/>
-                </a:solidFill>
-                <a:latin typeface="Calibri"/>
-              </a:rPr>
-              <a:t>Valid, valid extreme, invalid, invalid extreme, erroneous.</a:t>
-            </a:r>
-          </a:p>
-        </p:txBody>
-      </p:sp>
-      <p:sp>
-        <p:nvSpPr>
-          <p:cNvPr id="10" name="Oval 9"/>
+              <a:rPr sz="2000" b="0" i="0">
+                <a:solidFill>
+                  <a:srgbClr val="202122"/>
+                </a:solidFill>
+                <a:latin typeface="Calibri"/>
+              </a:rPr>
+              <a:t>Good decomposition, clear algorithms, correct conventions, a design a third party could build.</a:t>
+            </a:r>
+          </a:p>
+        </p:txBody>
+      </p:sp>
+      <p:sp>
+        <p:nvSpPr>
+          <p:cNvPr id="14" name="Rounded Rectangle 13"/>
           <p:cNvSpPr/>
           <p:nvPr/>
         </p:nvSpPr>
         <p:spPr>
           <a:xfrm>
-            <a:off x="548640" y="4009644"/>
-            <a:ext cx="411480" cy="411480"/>
+            <a:off x="548640" y="4023360"/>
+            <a:ext cx="5410047" cy="2148840"/>
+          </a:xfrm>
+          <a:prstGeom prst="roundRect">
+            <a:avLst>
+              <a:gd name="adj" fmla="val 6000"/>
+            </a:avLst>
+          </a:prstGeom>
+          <a:solidFill>
+            <a:srgbClr val="EAF3FF"/>
+          </a:solidFill>
+          <a:ln>
+            <a:noFill/>
+          </a:ln>
+          <a:effectLst/>
+        </p:spPr>
+        <p:style>
+          <a:lnRef idx="1">
+            <a:schemeClr val="accent1"/>
+          </a:lnRef>
+          <a:fillRef idx="3">
+            <a:schemeClr val="accent1"/>
+          </a:fillRef>
+          <a:effectRef idx="2">
+            <a:schemeClr val="accent1"/>
+          </a:effectRef>
+          <a:fontRef idx="minor">
+            <a:schemeClr val="lt1"/>
+          </a:fontRef>
+        </p:style>
+        <p:txBody>
+          <a:bodyPr rtlCol="0" anchor="ctr"/>
+          <a:lstStyle/>
+          <a:p/>
+        </p:txBody>
+      </p:sp>
+      <p:sp>
+        <p:nvSpPr>
+          <p:cNvPr id="15" name="Oval 14"/>
+          <p:cNvSpPr/>
+          <p:nvPr/>
+        </p:nvSpPr>
+        <p:spPr>
+          <a:xfrm>
+            <a:off x="777240" y="4251960"/>
+            <a:ext cx="457200" cy="457200"/>
           </a:xfrm>
           <a:prstGeom prst="ellipse">
             <a:avLst/>
@@ -8814,7 +10951,7 @@
           <a:p>
             <a:pPr algn="ctr"/>
             <a:r>
-              <a:rPr sz="1400" b="1">
+              <a:rPr sz="1500" b="1">
                 <a:solidFill>
                   <a:srgbClr val="202122"/>
                 </a:solidFill>
@@ -8827,14 +10964,47 @@
       </p:sp>
       <p:sp>
         <p:nvSpPr>
-          <p:cNvPr id="11" name="TextBox 10"/>
-          <p:cNvSpPr txBox="1"/>
-          <p:nvPr/>
-        </p:nvSpPr>
-        <p:spPr>
-          <a:xfrm>
-            <a:off x="1234440" y="3991356"/>
-            <a:ext cx="10408615" cy="1030986"/>
+          <p:cNvPr id="16" name="TextBox 15"/>
+          <p:cNvSpPr txBox="1"/>
+          <p:nvPr/>
+        </p:nvSpPr>
+        <p:spPr>
+          <a:xfrm>
+            <a:off x="1371600" y="4224528"/>
+            <a:ext cx="4404207" cy="512064"/>
+          </a:xfrm>
+          <a:prstGeom prst="rect">
+            <a:avLst/>
+          </a:prstGeom>
+          <a:noFill/>
+        </p:spPr>
+        <p:txBody>
+          <a:bodyPr wrap="square" anchor="ctr" lIns="0" rIns="0" tIns="0" bIns="0"/>
+          <a:lstStyle/>
+          <a:p>
+            <a:pPr algn="l"/>
+            <a:r>
+              <a:rPr sz="1900" b="1" i="0">
+                <a:solidFill>
+                  <a:srgbClr val="03306E"/>
+                </a:solidFill>
+                <a:latin typeface="Calibri"/>
+              </a:rPr>
+              <a:t>Task 4a code</a:t>
+            </a:r>
+          </a:p>
+        </p:txBody>
+      </p:sp>
+      <p:sp>
+        <p:nvSpPr>
+          <p:cNvPr id="17" name="TextBox 16"/>
+          <p:cNvSpPr txBox="1"/>
+          <p:nvPr/>
+        </p:nvSpPr>
+        <p:spPr>
+          <a:xfrm>
+            <a:off x="777240" y="4892040"/>
+            <a:ext cx="4952847" cy="1143000"/>
           </a:xfrm>
           <a:prstGeom prst="rect">
             <a:avLst/>
@@ -8847,38 +11017,71 @@
           <a:p>
             <a:pPr algn="l"/>
             <a:r>
-              <a:rPr sz="1800" b="0" i="0">
-                <a:solidFill>
-                  <a:srgbClr val="54595D"/>
-                </a:solidFill>
-                <a:latin typeface="Calibri"/>
-              </a:rPr>
-              <a:t>Which library is suggested for graphs?</a:t>
-            </a:r>
-          </a:p>
-          <a:p>
-            <a:r>
-              <a:rPr sz="1800" b="1">
-                <a:solidFill>
-                  <a:srgbClr val="03306E"/>
-                </a:solidFill>
-                <a:latin typeface="Calibri"/>
-              </a:rPr>
-              <a:t>Matplotlib.</a:t>
-            </a:r>
-          </a:p>
-        </p:txBody>
-      </p:sp>
-      <p:sp>
-        <p:nvSpPr>
-          <p:cNvPr id="12" name="Oval 11"/>
+              <a:rPr sz="2000" b="0" i="0">
+                <a:solidFill>
+                  <a:srgbClr val="202122"/>
+                </a:solidFill>
+                <a:latin typeface="Calibri"/>
+              </a:rPr>
+              <a:t>Functions, meaningful names, comments, local variables, constants, exception handling.</a:t>
+            </a:r>
+          </a:p>
+        </p:txBody>
+      </p:sp>
+      <p:sp>
+        <p:nvSpPr>
+          <p:cNvPr id="18" name="Rounded Rectangle 17"/>
           <p:cNvSpPr/>
           <p:nvPr/>
         </p:nvSpPr>
         <p:spPr>
           <a:xfrm>
-            <a:off x="548640" y="5205221"/>
-            <a:ext cx="411480" cy="411480"/>
+            <a:off x="6233007" y="4023360"/>
+            <a:ext cx="5410047" cy="2148840"/>
+          </a:xfrm>
+          <a:prstGeom prst="roundRect">
+            <a:avLst>
+              <a:gd name="adj" fmla="val 6000"/>
+            </a:avLst>
+          </a:prstGeom>
+          <a:solidFill>
+            <a:srgbClr val="EAF3FF"/>
+          </a:solidFill>
+          <a:ln>
+            <a:noFill/>
+          </a:ln>
+          <a:effectLst/>
+        </p:spPr>
+        <p:style>
+          <a:lnRef idx="1">
+            <a:schemeClr val="accent1"/>
+          </a:lnRef>
+          <a:fillRef idx="3">
+            <a:schemeClr val="accent1"/>
+          </a:fillRef>
+          <a:effectRef idx="2">
+            <a:schemeClr val="accent1"/>
+          </a:effectRef>
+          <a:fontRef idx="minor">
+            <a:schemeClr val="lt1"/>
+          </a:fontRef>
+        </p:style>
+        <p:txBody>
+          <a:bodyPr rtlCol="0" anchor="ctr"/>
+          <a:lstStyle/>
+          <a:p/>
+        </p:txBody>
+      </p:sp>
+      <p:sp>
+        <p:nvSpPr>
+          <p:cNvPr id="19" name="Oval 18"/>
+          <p:cNvSpPr/>
+          <p:nvPr/>
+        </p:nvSpPr>
+        <p:spPr>
+          <a:xfrm>
+            <a:off x="6461607" y="4251960"/>
+            <a:ext cx="457200" cy="457200"/>
           </a:xfrm>
           <a:prstGeom prst="ellipse">
             <a:avLst/>
@@ -8911,7 +11114,7 @@
           <a:p>
             <a:pPr algn="ctr"/>
             <a:r>
-              <a:rPr sz="1400" b="1">
+              <a:rPr sz="1500" b="1">
                 <a:solidFill>
                   <a:srgbClr val="202122"/>
                 </a:solidFill>
@@ -8924,14 +11127,47 @@
       </p:sp>
       <p:sp>
         <p:nvSpPr>
-          <p:cNvPr id="13" name="TextBox 12"/>
-          <p:cNvSpPr txBox="1"/>
-          <p:nvPr/>
-        </p:nvSpPr>
-        <p:spPr>
-          <a:xfrm>
-            <a:off x="1234440" y="5186933"/>
-            <a:ext cx="10408615" cy="1030986"/>
+          <p:cNvPr id="20" name="TextBox 19"/>
+          <p:cNvSpPr txBox="1"/>
+          <p:nvPr/>
+        </p:nvSpPr>
+        <p:spPr>
+          <a:xfrm>
+            <a:off x="7055967" y="4224528"/>
+            <a:ext cx="4404207" cy="512064"/>
+          </a:xfrm>
+          <a:prstGeom prst="rect">
+            <a:avLst/>
+          </a:prstGeom>
+          <a:noFill/>
+        </p:spPr>
+        <p:txBody>
+          <a:bodyPr wrap="square" anchor="ctr" lIns="0" rIns="0" tIns="0" bIns="0"/>
+          <a:lstStyle/>
+          <a:p>
+            <a:pPr algn="l"/>
+            <a:r>
+              <a:rPr sz="1900" b="1" i="0">
+                <a:solidFill>
+                  <a:srgbClr val="03306E"/>
+                </a:solidFill>
+                <a:latin typeface="Calibri"/>
+              </a:rPr>
+              <a:t>User experience</a:t>
+            </a:r>
+          </a:p>
+        </p:txBody>
+      </p:sp>
+      <p:sp>
+        <p:nvSpPr>
+          <p:cNvPr id="21" name="TextBox 20"/>
+          <p:cNvSpPr txBox="1"/>
+          <p:nvPr/>
+        </p:nvSpPr>
+        <p:spPr>
+          <a:xfrm>
+            <a:off x="6461607" y="4892040"/>
+            <a:ext cx="4952847" cy="1143000"/>
           </a:xfrm>
           <a:prstGeom prst="rect">
             <a:avLst/>
@@ -8944,24 +11180,13 @@
           <a:p>
             <a:pPr algn="l"/>
             <a:r>
-              <a:rPr sz="1800" b="0" i="0">
-                <a:solidFill>
-                  <a:srgbClr val="54595D"/>
-                </a:solidFill>
-                <a:latin typeface="Calibri"/>
-              </a:rPr>
-              <a:t>What must a Task 3 design allow a third party to do?</a:t>
-            </a:r>
-          </a:p>
-          <a:p>
-            <a:r>
-              <a:rPr sz="1800" b="1">
-                <a:solidFill>
-                  <a:srgbClr val="03306E"/>
-                </a:solidFill>
-                <a:latin typeface="Calibri"/>
-              </a:rPr>
-              <a:t>Build the proposed solution from it.</a:t>
+              <a:rPr sz="2000" b="0" i="0">
+                <a:solidFill>
+                  <a:srgbClr val="202122"/>
+                </a:solidFill>
+                <a:latin typeface="Calibri"/>
+              </a:rPr>
+              <a:t>Simple input, meaningful messages, data visualisation with Matplotlib.</a:t>
             </a:r>
           </a:p>
         </p:txBody>
@@ -9053,7 +11278,7 @@
                 </a:solidFill>
                 <a:latin typeface="Cambria"/>
               </a:rPr>
-              <a:t>Activity: Mini Task 2</a:t>
+              <a:t>Quick check: What earns marks</a:t>
             </a:r>
           </a:p>
         </p:txBody>
@@ -9126,19 +11351,17 @@
       </p:sp>
       <p:sp>
         <p:nvSpPr>
-          <p:cNvPr id="6" name="Rounded Rectangle 5"/>
+          <p:cNvPr id="6" name="Oval 5"/>
           <p:cNvSpPr/>
           <p:nvPr/>
         </p:nvSpPr>
         <p:spPr>
           <a:xfrm>
-            <a:off x="548640" y="1508760"/>
-            <a:ext cx="2011680" cy="457200"/>
-          </a:xfrm>
-          <a:prstGeom prst="roundRect">
-            <a:avLst>
-              <a:gd name="adj" fmla="val 50000"/>
-            </a:avLst>
+            <a:off x="548640" y="1691640"/>
+            <a:ext cx="502920" cy="502920"/>
+          </a:xfrm>
+          <a:prstGeom prst="ellipse">
+            <a:avLst/>
           </a:prstGeom>
           <a:solidFill>
             <a:srgbClr val="F2B705"/>
@@ -9163,9 +11386,20 @@
           </a:fontRef>
         </p:style>
         <p:txBody>
-          <a:bodyPr rtlCol="0" anchor="ctr"/>
-          <a:lstStyle/>
-          <a:p/>
+          <a:bodyPr rtlCol="0" anchor="ctr" lIns="0" rIns="0" tIns="0" bIns="0"/>
+          <a:lstStyle/>
+          <a:p>
+            <a:pPr algn="ctr"/>
+            <a:r>
+              <a:rPr sz="1600" b="1">
+                <a:solidFill>
+                  <a:srgbClr val="202122"/>
+                </a:solidFill>
+                <a:latin typeface="Calibri"/>
+              </a:rPr>
+              <a:t>1</a:t>
+            </a:r>
+          </a:p>
         </p:txBody>
       </p:sp>
       <p:sp>
@@ -9176,80 +11410,47 @@
         </p:nvSpPr>
         <p:spPr>
           <a:xfrm>
-            <a:off x="548640" y="1508760"/>
-            <a:ext cx="2011680" cy="457200"/>
-          </a:xfrm>
-          <a:prstGeom prst="rect">
-            <a:avLst/>
-          </a:prstGeom>
-          <a:noFill/>
-        </p:spPr>
-        <p:txBody>
-          <a:bodyPr wrap="square" anchor="ctr" lIns="0" rIns="0" tIns="0" bIns="0"/>
-          <a:lstStyle/>
-          <a:p>
-            <a:pPr algn="ctr"/>
-            <a:r>
-              <a:rPr sz="1400" b="1" i="0">
+            <a:off x="1371600" y="1645920"/>
+            <a:ext cx="10271455" cy="1188720"/>
+          </a:xfrm>
+          <a:prstGeom prst="rect">
+            <a:avLst/>
+          </a:prstGeom>
+          <a:noFill/>
+        </p:spPr>
+        <p:txBody>
+          <a:bodyPr wrap="square" anchor="t" lIns="0" rIns="0" tIns="0" bIns="0"/>
+          <a:lstStyle/>
+          <a:p>
+            <a:pPr algn="l"/>
+            <a:r>
+              <a:rPr sz="2400" b="0" i="0">
                 <a:solidFill>
                   <a:srgbClr val="202122"/>
                 </a:solidFill>
                 <a:latin typeface="Calibri"/>
               </a:rPr>
-              <a:t>40 minutes</a:t>
-            </a:r>
-          </a:p>
-        </p:txBody>
-      </p:sp>
-      <p:sp>
-        <p:nvSpPr>
-          <p:cNvPr id="8" name="TextBox 7"/>
-          <p:cNvSpPr txBox="1"/>
-          <p:nvPr/>
-        </p:nvSpPr>
-        <p:spPr>
-          <a:xfrm>
-            <a:off x="2743200" y="1508760"/>
-            <a:ext cx="4754880" cy="457200"/>
-          </a:xfrm>
-          <a:prstGeom prst="rect">
-            <a:avLst/>
-          </a:prstGeom>
-          <a:noFill/>
-        </p:spPr>
-        <p:txBody>
-          <a:bodyPr wrap="square" anchor="ctr" lIns="0" rIns="0" tIns="0" bIns="0"/>
-          <a:lstStyle/>
-          <a:p>
-            <a:pPr algn="l"/>
-            <a:r>
-              <a:rPr sz="1400" b="0" i="1">
-                <a:solidFill>
-                  <a:srgbClr val="54595D"/>
-                </a:solidFill>
-                <a:latin typeface="Calibri"/>
-              </a:rPr>
-              <a:t>Individual</a:t>
-            </a:r>
-          </a:p>
-        </p:txBody>
-      </p:sp>
-      <p:sp>
-        <p:nvSpPr>
-          <p:cNvPr id="9" name="Oval 8"/>
+              <a:t>Name the five types of test data in Task 2.</a:t>
+            </a:r>
+          </a:p>
+        </p:txBody>
+      </p:sp>
+      <p:sp>
+        <p:nvSpPr>
+          <p:cNvPr id="8" name="Oval 7"/>
           <p:cNvSpPr/>
           <p:nvPr/>
         </p:nvSpPr>
         <p:spPr>
           <a:xfrm>
-            <a:off x="548640" y="2482596"/>
-            <a:ext cx="384048" cy="384048"/>
+            <a:off x="548640" y="3108960"/>
+            <a:ext cx="502920" cy="502920"/>
           </a:xfrm>
           <a:prstGeom prst="ellipse">
             <a:avLst/>
           </a:prstGeom>
           <a:solidFill>
-            <a:srgbClr val="0645AD"/>
+            <a:srgbClr val="F2B705"/>
           </a:solidFill>
           <a:ln>
             <a:noFill/>
@@ -9276,66 +11477,66 @@
           <a:p>
             <a:pPr algn="ctr"/>
             <a:r>
-              <a:rPr sz="1300" b="1">
-                <a:solidFill>
-                  <a:srgbClr val="FFFFFF"/>
-                </a:solidFill>
-                <a:latin typeface="Calibri"/>
-              </a:rPr>
-              <a:t>1</a:t>
-            </a:r>
-          </a:p>
-        </p:txBody>
-      </p:sp>
-      <p:sp>
-        <p:nvSpPr>
-          <p:cNvPr id="10" name="TextBox 9"/>
-          <p:cNvSpPr txBox="1"/>
-          <p:nvPr/>
-        </p:nvSpPr>
-        <p:spPr>
-          <a:xfrm>
-            <a:off x="1143000" y="2240280"/>
-            <a:ext cx="5943600" cy="868680"/>
-          </a:xfrm>
-          <a:prstGeom prst="rect">
-            <a:avLst/>
-          </a:prstGeom>
-          <a:noFill/>
-        </p:spPr>
-        <p:txBody>
-          <a:bodyPr wrap="square" anchor="ctr" lIns="0" rIns="0" tIns="0" bIns="0"/>
+              <a:rPr sz="1600" b="1">
+                <a:solidFill>
+                  <a:srgbClr val="202122"/>
+                </a:solidFill>
+                <a:latin typeface="Calibri"/>
+              </a:rPr>
+              <a:t>2</a:t>
+            </a:r>
+          </a:p>
+        </p:txBody>
+      </p:sp>
+      <p:sp>
+        <p:nvSpPr>
+          <p:cNvPr id="9" name="TextBox 8"/>
+          <p:cNvSpPr txBox="1"/>
+          <p:nvPr/>
+        </p:nvSpPr>
+        <p:spPr>
+          <a:xfrm>
+            <a:off x="1371600" y="3063240"/>
+            <a:ext cx="10271455" cy="1188720"/>
+          </a:xfrm>
+          <a:prstGeom prst="rect">
+            <a:avLst/>
+          </a:prstGeom>
+          <a:noFill/>
+        </p:spPr>
+        <p:txBody>
+          <a:bodyPr wrap="square" anchor="t" lIns="0" rIns="0" tIns="0" bIns="0"/>
           <a:lstStyle/>
           <a:p>
             <a:pPr algn="l"/>
             <a:r>
-              <a:rPr sz="1700" b="0" i="0">
+              <a:rPr sz="2400" b="0" i="0">
                 <a:solidFill>
                   <a:srgbClr val="202122"/>
                 </a:solidFill>
                 <a:latin typeface="Calibri"/>
               </a:rPr>
-              <a:t>Your teacher gives you a short program with four defects.</a:t>
-            </a:r>
-          </a:p>
-        </p:txBody>
-      </p:sp>
-      <p:sp>
-        <p:nvSpPr>
-          <p:cNvPr id="11" name="Oval 10"/>
+              <a:t>What should a Task 3 design allow?</a:t>
+            </a:r>
+          </a:p>
+        </p:txBody>
+      </p:sp>
+      <p:sp>
+        <p:nvSpPr>
+          <p:cNvPr id="10" name="Oval 9"/>
           <p:cNvSpPr/>
           <p:nvPr/>
         </p:nvSpPr>
         <p:spPr>
           <a:xfrm>
-            <a:off x="548640" y="3461004"/>
-            <a:ext cx="384048" cy="384048"/>
+            <a:off x="548640" y="4526280"/>
+            <a:ext cx="502920" cy="502920"/>
           </a:xfrm>
           <a:prstGeom prst="ellipse">
             <a:avLst/>
           </a:prstGeom>
           <a:solidFill>
-            <a:srgbClr val="0645AD"/>
+            <a:srgbClr val="F2B705"/>
           </a:solidFill>
           <a:ln>
             <a:noFill/>
@@ -9362,13 +11563,46 @@
           <a:p>
             <a:pPr algn="ctr"/>
             <a:r>
-              <a:rPr sz="1300" b="1">
-                <a:solidFill>
-                  <a:srgbClr val="FFFFFF"/>
-                </a:solidFill>
-                <a:latin typeface="Calibri"/>
-              </a:rPr>
-              <a:t>2</a:t>
+              <a:rPr sz="1600" b="1">
+                <a:solidFill>
+                  <a:srgbClr val="202122"/>
+                </a:solidFill>
+                <a:latin typeface="Calibri"/>
+              </a:rPr>
+              <a:t>3</a:t>
+            </a:r>
+          </a:p>
+        </p:txBody>
+      </p:sp>
+      <p:sp>
+        <p:nvSpPr>
+          <p:cNvPr id="11" name="TextBox 10"/>
+          <p:cNvSpPr txBox="1"/>
+          <p:nvPr/>
+        </p:nvSpPr>
+        <p:spPr>
+          <a:xfrm>
+            <a:off x="1371600" y="4480560"/>
+            <a:ext cx="10271455" cy="1188720"/>
+          </a:xfrm>
+          <a:prstGeom prst="rect">
+            <a:avLst/>
+          </a:prstGeom>
+          <a:noFill/>
+        </p:spPr>
+        <p:txBody>
+          <a:bodyPr wrap="square" anchor="t" lIns="0" rIns="0" tIns="0" bIns="0"/>
+          <a:lstStyle/>
+          <a:p>
+            <a:pPr algn="l"/>
+            <a:r>
+              <a:rPr sz="2400" b="0" i="0">
+                <a:solidFill>
+                  <a:srgbClr val="202122"/>
+                </a:solidFill>
+                <a:latin typeface="Calibri"/>
+              </a:rPr>
+              <a:t>Name three things markers look for in Task 4a code.</a:t>
             </a:r>
           </a:p>
         </p:txBody>
@@ -9381,362 +11615,27 @@
         </p:nvSpPr>
         <p:spPr>
           <a:xfrm>
-            <a:off x="1143000" y="3218688"/>
-            <a:ext cx="5943600" cy="868680"/>
-          </a:xfrm>
-          <a:prstGeom prst="rect">
-            <a:avLst/>
-          </a:prstGeom>
-          <a:noFill/>
-        </p:spPr>
-        <p:txBody>
-          <a:bodyPr wrap="square" anchor="ctr" lIns="0" rIns="0" tIns="0" bIns="0"/>
+            <a:off x="548640" y="5852160"/>
+            <a:ext cx="11094415" cy="365760"/>
+          </a:xfrm>
+          <a:prstGeom prst="rect">
+            <a:avLst/>
+          </a:prstGeom>
+          <a:noFill/>
+        </p:spPr>
+        <p:txBody>
+          <a:bodyPr wrap="square" anchor="t" lIns="0" rIns="0" tIns="0" bIns="0"/>
           <a:lstStyle/>
           <a:p>
             <a:pPr algn="l"/>
             <a:r>
-              <a:rPr sz="1700" b="0" i="0">
-                <a:solidFill>
-                  <a:srgbClr val="202122"/>
-                </a:solidFill>
-                <a:latin typeface="Calibri"/>
-              </a:rPr>
-              <a:t>Write a test table before changing anything.</a:t>
-            </a:r>
-          </a:p>
-        </p:txBody>
-      </p:sp>
-      <p:sp>
-        <p:nvSpPr>
-          <p:cNvPr id="13" name="Oval 12"/>
-          <p:cNvSpPr/>
-          <p:nvPr/>
-        </p:nvSpPr>
-        <p:spPr>
-          <a:xfrm>
-            <a:off x="548640" y="4439412"/>
-            <a:ext cx="384048" cy="384048"/>
-          </a:xfrm>
-          <a:prstGeom prst="ellipse">
-            <a:avLst/>
-          </a:prstGeom>
-          <a:solidFill>
-            <a:srgbClr val="0645AD"/>
-          </a:solidFill>
-          <a:ln>
-            <a:noFill/>
-          </a:ln>
-          <a:effectLst/>
-        </p:spPr>
-        <p:style>
-          <a:lnRef idx="1">
-            <a:schemeClr val="accent1"/>
-          </a:lnRef>
-          <a:fillRef idx="3">
-            <a:schemeClr val="accent1"/>
-          </a:fillRef>
-          <a:effectRef idx="2">
-            <a:schemeClr val="accent1"/>
-          </a:effectRef>
-          <a:fontRef idx="minor">
-            <a:schemeClr val="lt1"/>
-          </a:fontRef>
-        </p:style>
-        <p:txBody>
-          <a:bodyPr rtlCol="0" anchor="ctr" lIns="0" rIns="0" tIns="0" bIns="0"/>
-          <a:lstStyle/>
-          <a:p>
-            <a:pPr algn="ctr"/>
-            <a:r>
-              <a:rPr sz="1300" b="1">
-                <a:solidFill>
-                  <a:srgbClr val="FFFFFF"/>
-                </a:solidFill>
-                <a:latin typeface="Calibri"/>
-              </a:rPr>
-              <a:t>3</a:t>
-            </a:r>
-          </a:p>
-        </p:txBody>
-      </p:sp>
-      <p:sp>
-        <p:nvSpPr>
-          <p:cNvPr id="14" name="TextBox 13"/>
-          <p:cNvSpPr txBox="1"/>
-          <p:nvPr/>
-        </p:nvSpPr>
-        <p:spPr>
-          <a:xfrm>
-            <a:off x="1143000" y="4197096"/>
-            <a:ext cx="5943600" cy="868680"/>
-          </a:xfrm>
-          <a:prstGeom prst="rect">
-            <a:avLst/>
-          </a:prstGeom>
-          <a:noFill/>
-        </p:spPr>
-        <p:txBody>
-          <a:bodyPr wrap="square" anchor="ctr" lIns="0" rIns="0" tIns="0" bIns="0"/>
-          <a:lstStyle/>
-          <a:p>
-            <a:pPr algn="l"/>
-            <a:r>
-              <a:rPr sz="1700" b="0" i="0">
-                <a:solidFill>
-                  <a:srgbClr val="202122"/>
-                </a:solidFill>
-                <a:latin typeface="Calibri"/>
-              </a:rPr>
-              <a:t>Fix each defect and retest.</a:t>
-            </a:r>
-          </a:p>
-        </p:txBody>
-      </p:sp>
-      <p:sp>
-        <p:nvSpPr>
-          <p:cNvPr id="15" name="Oval 14"/>
-          <p:cNvSpPr/>
-          <p:nvPr/>
-        </p:nvSpPr>
-        <p:spPr>
-          <a:xfrm>
-            <a:off x="548640" y="5417820"/>
-            <a:ext cx="384048" cy="384048"/>
-          </a:xfrm>
-          <a:prstGeom prst="ellipse">
-            <a:avLst/>
-          </a:prstGeom>
-          <a:solidFill>
-            <a:srgbClr val="0645AD"/>
-          </a:solidFill>
-          <a:ln>
-            <a:noFill/>
-          </a:ln>
-          <a:effectLst/>
-        </p:spPr>
-        <p:style>
-          <a:lnRef idx="1">
-            <a:schemeClr val="accent1"/>
-          </a:lnRef>
-          <a:fillRef idx="3">
-            <a:schemeClr val="accent1"/>
-          </a:fillRef>
-          <a:effectRef idx="2">
-            <a:schemeClr val="accent1"/>
-          </a:effectRef>
-          <a:fontRef idx="minor">
-            <a:schemeClr val="lt1"/>
-          </a:fontRef>
-        </p:style>
-        <p:txBody>
-          <a:bodyPr rtlCol="0" anchor="ctr" lIns="0" rIns="0" tIns="0" bIns="0"/>
-          <a:lstStyle/>
-          <a:p>
-            <a:pPr algn="ctr"/>
-            <a:r>
-              <a:rPr sz="1300" b="1">
-                <a:solidFill>
-                  <a:srgbClr val="FFFFFF"/>
-                </a:solidFill>
-                <a:latin typeface="Calibri"/>
-              </a:rPr>
-              <a:t>4</a:t>
-            </a:r>
-          </a:p>
-        </p:txBody>
-      </p:sp>
-      <p:sp>
-        <p:nvSpPr>
-          <p:cNvPr id="16" name="TextBox 15"/>
-          <p:cNvSpPr txBox="1"/>
-          <p:nvPr/>
-        </p:nvSpPr>
-        <p:spPr>
-          <a:xfrm>
-            <a:off x="1143000" y="5175504"/>
-            <a:ext cx="5943600" cy="868680"/>
-          </a:xfrm>
-          <a:prstGeom prst="rect">
-            <a:avLst/>
-          </a:prstGeom>
-          <a:noFill/>
-        </p:spPr>
-        <p:txBody>
-          <a:bodyPr wrap="square" anchor="ctr" lIns="0" rIns="0" tIns="0" bIns="0"/>
-          <a:lstStyle/>
-          <a:p>
-            <a:pPr algn="l"/>
-            <a:r>
-              <a:rPr sz="1700" b="0" i="0">
-                <a:solidFill>
-                  <a:srgbClr val="202122"/>
-                </a:solidFill>
-                <a:latin typeface="Calibri"/>
-              </a:rPr>
-              <a:t>Justify each fix in one sentence.</a:t>
-            </a:r>
-          </a:p>
-        </p:txBody>
-      </p:sp>
-      <p:sp>
-        <p:nvSpPr>
-          <p:cNvPr id="17" name="Rounded Rectangle 16"/>
-          <p:cNvSpPr/>
-          <p:nvPr/>
-        </p:nvSpPr>
-        <p:spPr>
-          <a:xfrm>
-            <a:off x="7772400" y="1508760"/>
-            <a:ext cx="3867912" cy="4572000"/>
-          </a:xfrm>
-          <a:prstGeom prst="roundRect">
-            <a:avLst>
-              <a:gd name="adj" fmla="val 8000"/>
-            </a:avLst>
-          </a:prstGeom>
-          <a:solidFill>
-            <a:srgbClr val="EAF3FF"/>
-          </a:solidFill>
-          <a:ln>
-            <a:noFill/>
-          </a:ln>
-          <a:effectLst/>
-        </p:spPr>
-        <p:style>
-          <a:lnRef idx="1">
-            <a:schemeClr val="accent1"/>
-          </a:lnRef>
-          <a:fillRef idx="3">
-            <a:schemeClr val="accent1"/>
-          </a:fillRef>
-          <a:effectRef idx="2">
-            <a:schemeClr val="accent1"/>
-          </a:effectRef>
-          <a:fontRef idx="minor">
-            <a:schemeClr val="lt1"/>
-          </a:fontRef>
-        </p:style>
-        <p:txBody>
-          <a:bodyPr rtlCol="0" anchor="ctr"/>
-          <a:lstStyle/>
-          <a:p/>
-        </p:txBody>
-      </p:sp>
-      <p:sp>
-        <p:nvSpPr>
-          <p:cNvPr id="18" name="TextBox 17"/>
-          <p:cNvSpPr txBox="1"/>
-          <p:nvPr/>
-        </p:nvSpPr>
-        <p:spPr>
-          <a:xfrm>
-            <a:off x="8046720" y="1737360"/>
-            <a:ext cx="3291840" cy="365760"/>
-          </a:xfrm>
-          <a:prstGeom prst="rect">
-            <a:avLst/>
-          </a:prstGeom>
-          <a:noFill/>
-        </p:spPr>
-        <p:txBody>
-          <a:bodyPr wrap="square" anchor="t" lIns="0" rIns="0" tIns="0" bIns="0"/>
-          <a:lstStyle/>
-          <a:p>
-            <a:pPr algn="l"/>
-            <a:r>
-              <a:rPr sz="1300" b="1" i="0">
-                <a:solidFill>
-                  <a:srgbClr val="0645AD"/>
-                </a:solidFill>
-                <a:latin typeface="Calibri"/>
-              </a:rPr>
-              <a:t>SUCCESS CRITERIA</a:t>
-            </a:r>
-          </a:p>
-        </p:txBody>
-      </p:sp>
-      <p:sp>
-        <p:nvSpPr>
-          <p:cNvPr id="19" name="TextBox 18"/>
-          <p:cNvSpPr txBox="1"/>
-          <p:nvPr/>
-        </p:nvSpPr>
-        <p:spPr>
-          <a:xfrm>
-            <a:off x="8046720" y="2240280"/>
-            <a:ext cx="3337560" cy="3657600"/>
-          </a:xfrm>
-          <a:prstGeom prst="rect">
-            <a:avLst/>
-          </a:prstGeom>
-          <a:noFill/>
-        </p:spPr>
-        <p:txBody>
-          <a:bodyPr wrap="square" lIns="0" rIns="0" tIns="0" bIns="0">
-            <a:spAutoFit/>
-          </a:bodyPr>
-          <a:lstStyle/>
-          <a:p>
-            <a:pPr marL="274320" indent="-274320">
-              <a:spcAft>
-                <a:spcPts val="810"/>
-              </a:spcAft>
-              <a:buClr>
-                <a:srgbClr val="0645AD"/>
-              </a:buClr>
-              <a:buFont typeface="Arial"/>
-              <a:buChar char="•"/>
-            </a:pPr>
-            <a:r>
-              <a:rPr sz="1800" b="0">
-                <a:solidFill>
-                  <a:srgbClr val="202122"/>
-                </a:solidFill>
-                <a:latin typeface="Calibri"/>
-              </a:rPr>
-              <a:t>All five test data types used</a:t>
-            </a:r>
-          </a:p>
-          <a:p>
-            <a:pPr marL="274320" indent="-274320">
-              <a:spcAft>
-                <a:spcPts val="810"/>
-              </a:spcAft>
-              <a:buClr>
-                <a:srgbClr val="0645AD"/>
-              </a:buClr>
-              <a:buFont typeface="Arial"/>
-              <a:buChar char="•"/>
-            </a:pPr>
-            <a:r>
-              <a:rPr sz="1800" b="0">
-                <a:solidFill>
-                  <a:srgbClr val="202122"/>
-                </a:solidFill>
-                <a:latin typeface="Calibri"/>
-              </a:rPr>
-              <a:t>Every defect fixed</a:t>
-            </a:r>
-          </a:p>
-          <a:p>
-            <a:pPr marL="274320" indent="-274320">
-              <a:spcAft>
-                <a:spcPts val="810"/>
-              </a:spcAft>
-              <a:buClr>
-                <a:srgbClr val="0645AD"/>
-              </a:buClr>
-              <a:buFont typeface="Arial"/>
-              <a:buChar char="•"/>
-            </a:pPr>
-            <a:r>
-              <a:rPr sz="1800" b="0">
-                <a:solidFill>
-                  <a:srgbClr val="202122"/>
-                </a:solidFill>
-                <a:latin typeface="Calibri"/>
-              </a:rPr>
-              <a:t>Expected and actual results compared</a:t>
+              <a:rPr sz="1300" b="0" i="1">
+                <a:solidFill>
+                  <a:srgbClr val="54595D"/>
+                </a:solidFill>
+                <a:latin typeface="Calibri"/>
+              </a:rPr>
+              <a:t>Answer on mini whiteboards or in your book. Answers are in the speaker notes.</a:t>
             </a:r>
           </a:p>
         </p:txBody>
